--- a/presentations/pitch_deck.pptx
+++ b/presentations/pitch_deck.pptx
@@ -1,38 +1,27 @@
 
 <file path=ppt/presentation.xml><?xml version="1.0" encoding="utf-8"?>
-<p:presentation xmlns:a="http://schemas.openxmlformats.org/drawingml/2006/main" xmlns:r="http://schemas.openxmlformats.org/officeDocument/2006/relationships" xmlns:p="http://schemas.openxmlformats.org/presentationml/2006/main" saveSubsetFonts="1" autoCompressPictures="0">
+<p:presentation xmlns:a="http://schemas.openxmlformats.org/drawingml/2006/main" xmlns:r="http://schemas.openxmlformats.org/officeDocument/2006/relationships" xmlns:mc="http://schemas.openxmlformats.org/markup-compatibility/2006" xmlns:mv="urn:schemas-microsoft-com:mac:vml" xmlns:p="http://schemas.openxmlformats.org/presentationml/2006/main" xmlns:c="http://schemas.openxmlformats.org/drawingml/2006/chart" xmlns:dgm="http://schemas.openxmlformats.org/drawingml/2006/diagram" xmlns:o="urn:schemas-microsoft-com:office:office" xmlns:v="urn:schemas-microsoft-com:vml" xmlns:pvml="urn:schemas-microsoft-com:office:powerpoint" xmlns:com="http://schemas.openxmlformats.org/drawingml/2006/compatibility" xmlns:p14="http://schemas.microsoft.com/office/powerpoint/2010/main" xmlns:p15="http://schemas.microsoft.com/office/powerpoint/2012/main" xmlns:ahyp="http://schemas.microsoft.com/office/drawing/2018/hyperlinkcolor" autoCompressPictures="0" strictFirstAndLastChars="0" saveSubsetFonts="1">
   <p:sldMasterIdLst>
-    <p:sldMasterId id="2147483648" r:id="rId1"/>
+    <p:sldMasterId id="2147483648" r:id="rId5"/>
   </p:sldMasterIdLst>
+  <p:notesMasterIdLst>
+    <p:notesMasterId r:id="rId6"/>
+  </p:notesMasterIdLst>
   <p:sldIdLst>
     <p:sldId id="256" r:id="rId7"/>
-    <p:sldId id="257" r:id="rId8"/>
     <p:sldId id="258" r:id="rId9"/>
-    <p:sldId id="259" r:id="rId10"/>
-    <p:sldId id="260" r:id="rId11"/>
-    <p:sldId id="261" r:id="rId12"/>
-    <p:sldId id="262" r:id="rId13"/>
-    <p:sldId id="263" r:id="rId14"/>
-    <p:sldId id="264" r:id="rId15"/>
-    <p:sldId id="265" r:id="rId16"/>
-    <p:sldId id="266" r:id="rId17"/>
-    <p:sldId id="267" r:id="rId18"/>
-    <p:sldId id="268" r:id="rId19"/>
-    <p:sldId id="269" r:id="rId20"/>
-    <p:sldId id="270" r:id="rId21"/>
-    <p:sldId id="271" r:id="rId22"/>
     <p:sldId id="272" r:id="rId23"/>
-    <p:sldId id="273" r:id="rId24"/>
-    <p:sldId id="274" r:id="rId25"/>
+    <p:sldId id="282" r:id="rId33"/>
+    <p:sldId id="292" r:id="rId43"/>
   </p:sldIdLst>
-  <p:sldSz cx="12191695" cy="6858000" type="screen4x3"/>
-  <p:notesSz cx="6858000" cy="9144000"/>
+  <p:sldSz cy="6858000" cx="9144000"/>
+  <p:notesSz cx="6954825" cy="9309100"/>
   <p:defaultTextStyle>
-    <a:defPPr>
+    <a:defPPr lvl="0">
       <a:defRPr lang="en-US"/>
     </a:defPPr>
-    <a:lvl1pPr marL="0" algn="l" defTabSz="457200" rtl="0" eaLnBrk="1" latinLnBrk="0" hangingPunct="1">
-      <a:defRPr sz="1800" kern="1200">
+    <a:lvl1pPr defTabSz="457200" eaLnBrk="1" hangingPunct="1" latinLnBrk="0" lvl="0" marL="0" rtl="0" algn="l">
+      <a:defRPr kern="1200" sz="1800">
         <a:solidFill>
           <a:schemeClr val="tx1"/>
         </a:solidFill>
@@ -41,8 +30,8 @@
         <a:cs typeface="+mn-cs"/>
       </a:defRPr>
     </a:lvl1pPr>
-    <a:lvl2pPr marL="457200" algn="l" defTabSz="457200" rtl="0" eaLnBrk="1" latinLnBrk="0" hangingPunct="1">
-      <a:defRPr sz="1800" kern="1200">
+    <a:lvl2pPr defTabSz="457200" eaLnBrk="1" hangingPunct="1" latinLnBrk="0" lvl="1" marL="457200" rtl="0" algn="l">
+      <a:defRPr kern="1200" sz="1800">
         <a:solidFill>
           <a:schemeClr val="tx1"/>
         </a:solidFill>
@@ -51,8 +40,8 @@
         <a:cs typeface="+mn-cs"/>
       </a:defRPr>
     </a:lvl2pPr>
-    <a:lvl3pPr marL="914400" algn="l" defTabSz="457200" rtl="0" eaLnBrk="1" latinLnBrk="0" hangingPunct="1">
-      <a:defRPr sz="1800" kern="1200">
+    <a:lvl3pPr defTabSz="457200" eaLnBrk="1" hangingPunct="1" latinLnBrk="0" lvl="2" marL="914400" rtl="0" algn="l">
+      <a:defRPr kern="1200" sz="1800">
         <a:solidFill>
           <a:schemeClr val="tx1"/>
         </a:solidFill>
@@ -61,8 +50,8 @@
         <a:cs typeface="+mn-cs"/>
       </a:defRPr>
     </a:lvl3pPr>
-    <a:lvl4pPr marL="1371600" algn="l" defTabSz="457200" rtl="0" eaLnBrk="1" latinLnBrk="0" hangingPunct="1">
-      <a:defRPr sz="1800" kern="1200">
+    <a:lvl4pPr defTabSz="457200" eaLnBrk="1" hangingPunct="1" latinLnBrk="0" lvl="3" marL="1371600" rtl="0" algn="l">
+      <a:defRPr kern="1200" sz="1800">
         <a:solidFill>
           <a:schemeClr val="tx1"/>
         </a:solidFill>
@@ -71,8 +60,8 @@
         <a:cs typeface="+mn-cs"/>
       </a:defRPr>
     </a:lvl4pPr>
-    <a:lvl5pPr marL="1828800" algn="l" defTabSz="457200" rtl="0" eaLnBrk="1" latinLnBrk="0" hangingPunct="1">
-      <a:defRPr sz="1800" kern="1200">
+    <a:lvl5pPr defTabSz="457200" eaLnBrk="1" hangingPunct="1" latinLnBrk="0" lvl="4" marL="1828800" rtl="0" algn="l">
+      <a:defRPr kern="1200" sz="1800">
         <a:solidFill>
           <a:schemeClr val="tx1"/>
         </a:solidFill>
@@ -81,8 +70,8 @@
         <a:cs typeface="+mn-cs"/>
       </a:defRPr>
     </a:lvl5pPr>
-    <a:lvl6pPr marL="2286000" algn="l" defTabSz="457200" rtl="0" eaLnBrk="1" latinLnBrk="0" hangingPunct="1">
-      <a:defRPr sz="1800" kern="1200">
+    <a:lvl6pPr defTabSz="457200" eaLnBrk="1" hangingPunct="1" latinLnBrk="0" lvl="5" marL="2286000" rtl="0" algn="l">
+      <a:defRPr kern="1200" sz="1800">
         <a:solidFill>
           <a:schemeClr val="tx1"/>
         </a:solidFill>
@@ -91,8 +80,8 @@
         <a:cs typeface="+mn-cs"/>
       </a:defRPr>
     </a:lvl6pPr>
-    <a:lvl7pPr marL="2743200" algn="l" defTabSz="457200" rtl="0" eaLnBrk="1" latinLnBrk="0" hangingPunct="1">
-      <a:defRPr sz="1800" kern="1200">
+    <a:lvl7pPr defTabSz="457200" eaLnBrk="1" hangingPunct="1" latinLnBrk="0" lvl="6" marL="2743200" rtl="0" algn="l">
+      <a:defRPr kern="1200" sz="1800">
         <a:solidFill>
           <a:schemeClr val="tx1"/>
         </a:solidFill>
@@ -101,8 +90,8 @@
         <a:cs typeface="+mn-cs"/>
       </a:defRPr>
     </a:lvl7pPr>
-    <a:lvl8pPr marL="3200400" algn="l" defTabSz="457200" rtl="0" eaLnBrk="1" latinLnBrk="0" hangingPunct="1">
-      <a:defRPr sz="1800" kern="1200">
+    <a:lvl8pPr defTabSz="457200" eaLnBrk="1" hangingPunct="1" latinLnBrk="0" lvl="7" marL="3200400" rtl="0" algn="l">
+      <a:defRPr kern="1200" sz="1800">
         <a:solidFill>
           <a:schemeClr val="tx1"/>
         </a:solidFill>
@@ -111,8 +100,8 @@
         <a:cs typeface="+mn-cs"/>
       </a:defRPr>
     </a:lvl8pPr>
-    <a:lvl9pPr marL="3657600" algn="l" defTabSz="457200" rtl="0" eaLnBrk="1" latinLnBrk="0" hangingPunct="1">
-      <a:defRPr sz="1800" kern="1200">
+    <a:lvl9pPr defTabSz="457200" eaLnBrk="1" hangingPunct="1" latinLnBrk="0" lvl="8" marL="3657600" rtl="0" algn="l">
+      <a:defRPr kern="1200" sz="1800">
         <a:solidFill>
           <a:schemeClr val="tx1"/>
         </a:solidFill>
@@ -122,7 +111,554 @@
       </a:defRPr>
     </a:lvl9pPr>
   </p:defaultTextStyle>
+  <p:extLst>
+    <p:ext uri="{EFAFB233-063F-42B5-8137-9DF3F51BA10A}">
+      <p15:sldGuideLst>
+        <p15:guide id="1" orient="horz" pos="2160">
+          <p15:clr>
+            <a:srgbClr val="A4A3A4"/>
+          </p15:clr>
+        </p15:guide>
+        <p15:guide id="2" pos="2880">
+          <p15:clr>
+            <a:srgbClr val="A4A3A4"/>
+          </p15:clr>
+        </p15:guide>
+      </p15:sldGuideLst>
+    </p:ext>
+  </p:extLst>
 </p:presentation>
+</file>
+
+<file path=ppt/presProps1.xml><?xml version="1.0" encoding="utf-8"?>
+<p:presentationPr xmlns:a="http://schemas.openxmlformats.org/drawingml/2006/main" xmlns:r="http://schemas.openxmlformats.org/officeDocument/2006/relationships" xmlns:mc="http://schemas.openxmlformats.org/markup-compatibility/2006" xmlns:mv="urn:schemas-microsoft-com:mac:vml" xmlns:p="http://schemas.openxmlformats.org/presentationml/2006/main" xmlns:c="http://schemas.openxmlformats.org/drawingml/2006/chart" xmlns:dgm="http://schemas.openxmlformats.org/drawingml/2006/diagram" xmlns:o="urn:schemas-microsoft-com:office:office" xmlns:v="urn:schemas-microsoft-com:vml" xmlns:pvml="urn:schemas-microsoft-com:office:powerpoint" xmlns:com="http://schemas.openxmlformats.org/drawingml/2006/compatibility" xmlns:p14="http://schemas.microsoft.com/office/powerpoint/2010/main" xmlns:p15="http://schemas.microsoft.com/office/powerpoint/2012/main" xmlns:ahyp="http://schemas.microsoft.com/office/drawing/2018/hyperlinkcolor"/>
+</file>
+
+<file path=ppt/tableStyles1.xml><?xml version="1.0" encoding="utf-8"?>
+<a:tblStyleLst xmlns:a="http://schemas.openxmlformats.org/drawingml/2006/main" xmlns:r="http://schemas.openxmlformats.org/officeDocument/2006/relationships" def="{90651C3A-4460-11DB-9652-00E08161165F}">
+  <a:tblStyle styleId="{5940675A-B579-460E-94D1-54222C63F5DA}" styleName="No Style, Table Grid">
+    <a:wholeTbl>
+      <a:tcTxStyle>
+        <a:fontRef idx="minor">
+          <a:scrgbClr b="0" g="0" r="0"/>
+        </a:fontRef>
+        <a:schemeClr val="tx1"/>
+      </a:tcTxStyle>
+      <a:tcStyle>
+        <a:tcBdr>
+          <a:left>
+            <a:ln cmpd="sng" w="12700">
+              <a:solidFill>
+                <a:schemeClr val="tx1"/>
+              </a:solidFill>
+            </a:ln>
+          </a:left>
+          <a:right>
+            <a:ln cmpd="sng" w="12700">
+              <a:solidFill>
+                <a:schemeClr val="tx1"/>
+              </a:solidFill>
+            </a:ln>
+          </a:right>
+          <a:top>
+            <a:ln cmpd="sng" w="12700">
+              <a:solidFill>
+                <a:schemeClr val="tx1"/>
+              </a:solidFill>
+            </a:ln>
+          </a:top>
+          <a:bottom>
+            <a:ln cmpd="sng" w="12700">
+              <a:solidFill>
+                <a:schemeClr val="tx1"/>
+              </a:solidFill>
+            </a:ln>
+          </a:bottom>
+          <a:insideH>
+            <a:ln cmpd="sng" w="12700">
+              <a:solidFill>
+                <a:schemeClr val="tx1"/>
+              </a:solidFill>
+            </a:ln>
+          </a:insideH>
+          <a:insideV>
+            <a:ln cmpd="sng" w="12700">
+              <a:solidFill>
+                <a:schemeClr val="tx1"/>
+              </a:solidFill>
+            </a:ln>
+          </a:insideV>
+        </a:tcBdr>
+        <a:fill>
+          <a:noFill/>
+        </a:fill>
+      </a:tcStyle>
+    </a:wholeTbl>
+  </a:tblStyle>
+</a:tblStyleLst>
+</file>
+
+<file path=ppt/viewProps1.xml><?xml version="1.0" encoding="utf-8"?>
+<p:viewPr xmlns:a="http://schemas.openxmlformats.org/drawingml/2006/main" xmlns:r="http://schemas.openxmlformats.org/officeDocument/2006/relationships" xmlns:mc="http://schemas.openxmlformats.org/markup-compatibility/2006" xmlns:mv="urn:schemas-microsoft-com:mac:vml" xmlns:p="http://schemas.openxmlformats.org/presentationml/2006/main" xmlns:c="http://schemas.openxmlformats.org/drawingml/2006/chart" xmlns:dgm="http://schemas.openxmlformats.org/drawingml/2006/diagram" xmlns:o="urn:schemas-microsoft-com:office:office" xmlns:v="urn:schemas-microsoft-com:vml" xmlns:pvml="urn:schemas-microsoft-com:office:powerpoint" xmlns:com="http://schemas.openxmlformats.org/drawingml/2006/compatibility" xmlns:p14="http://schemas.microsoft.com/office/powerpoint/2010/main" xmlns:p15="http://schemas.microsoft.com/office/powerpoint/2012/main" xmlns:ahyp="http://schemas.microsoft.com/office/drawing/2018/hyperlinkcolor" showComments="0">
+  <p:slideViewPr>
+    <p:cSldViewPr snapToGrid="0">
+      <p:cViewPr varScale="1">
+        <p:scale>
+          <a:sx n="100" d="100"/>
+          <a:sy n="100" d="100"/>
+        </p:scale>
+        <p:origin x="0" y="0"/>
+      </p:cViewPr>
+      <p:guideLst>
+        <p:guide pos="2160" orient="horz"/>
+        <p:guide pos="2880"/>
+      </p:guideLst>
+    </p:cSldViewPr>
+  </p:slideViewPr>
+</p:viewPr>
+</file>
+
+<file path=ppt/notesMasters/notesMaster1.xml><?xml version="1.0" encoding="utf-8"?>
+<p:notesMaster xmlns:a="http://schemas.openxmlformats.org/drawingml/2006/main" xmlns:r="http://schemas.openxmlformats.org/officeDocument/2006/relationships" xmlns:p="http://schemas.openxmlformats.org/presentationml/2006/main">
+  <p:cSld>
+    <p:bg>
+      <p:bgRef idx="1001">
+        <a:schemeClr val="bg1"/>
+      </p:bgRef>
+    </p:bg>
+    <p:spTree>
+      <p:nvGrpSpPr>
+        <p:cNvPr id="1" name=""/>
+        <p:cNvGrpSpPr/>
+        <p:nvPr/>
+      </p:nvGrpSpPr>
+      <p:grpSpPr>
+        <a:xfrm>
+          <a:off x="0" y="0"/>
+          <a:ext cx="0" cy="0"/>
+          <a:chOff x="0" y="0"/>
+          <a:chExt cx="0" cy="0"/>
+        </a:xfrm>
+      </p:grpSpPr>
+      <p:sp>
+        <p:nvSpPr>
+          <p:cNvPr id="2" name="Header Placeholder 1"/>
+          <p:cNvSpPr>
+            <a:spLocks noGrp="1"/>
+          </p:cNvSpPr>
+          <p:nvPr>
+            <p:ph type="hdr" sz="quarter"/>
+          </p:nvPr>
+        </p:nvSpPr>
+        <p:spPr>
+          <a:xfrm>
+            <a:off x="0" y="0"/>
+            <a:ext cx="3013763" cy="467072"/>
+          </a:xfrm>
+          <a:prstGeom prst="rect">
+            <a:avLst/>
+          </a:prstGeom>
+        </p:spPr>
+        <p:txBody>
+          <a:bodyPr vert="horz" lIns="92930" tIns="46465" rIns="92930" bIns="46465" rtlCol="0"/>
+          <a:lstStyle>
+            <a:lvl1pPr algn="l">
+              <a:defRPr sz="1200"/>
+            </a:lvl1pPr>
+          </a:lstStyle>
+          <a:p>
+            <a:endParaRPr lang="en-US"/>
+          </a:p>
+        </p:txBody>
+      </p:sp>
+      <p:sp>
+        <p:nvSpPr>
+          <p:cNvPr id="3" name="Date Placeholder 2"/>
+          <p:cNvSpPr>
+            <a:spLocks noGrp="1"/>
+          </p:cNvSpPr>
+          <p:nvPr>
+            <p:ph type="dt" idx="1"/>
+          </p:nvPr>
+        </p:nvSpPr>
+        <p:spPr>
+          <a:xfrm>
+            <a:off x="3939466" y="0"/>
+            <a:ext cx="3013763" cy="467072"/>
+          </a:xfrm>
+          <a:prstGeom prst="rect">
+            <a:avLst/>
+          </a:prstGeom>
+        </p:spPr>
+        <p:txBody>
+          <a:bodyPr vert="horz" lIns="92930" tIns="46465" rIns="92930" bIns="46465" rtlCol="0"/>
+          <a:lstStyle>
+            <a:lvl1pPr algn="r">
+              <a:defRPr sz="1200"/>
+            </a:lvl1pPr>
+          </a:lstStyle>
+          <a:p>
+            <a:fld id="{71B727E3-9991-4B0C-8167-23E35F3043C3}" type="datetimeFigureOut">
+              <a:rPr lang="en-US" smtClean="0"/>
+              <a:pPr/>
+              <a:t>8/8/2026</a:t>
+            </a:fld>
+            <a:endParaRPr lang="en-US"/>
+          </a:p>
+        </p:txBody>
+      </p:sp>
+      <p:sp>
+        <p:nvSpPr>
+          <p:cNvPr id="4" name="Slide Image Placeholder 3"/>
+          <p:cNvSpPr>
+            <a:spLocks noGrp="1" noRot="1" noChangeAspect="1"/>
+          </p:cNvSpPr>
+          <p:nvPr>
+            <p:ph type="sldImg" idx="2"/>
+          </p:nvPr>
+        </p:nvSpPr>
+        <p:spPr>
+          <a:xfrm>
+            <a:off x="1384300" y="1163638"/>
+            <a:ext cx="4186238" cy="3141662"/>
+          </a:xfrm>
+          <a:prstGeom prst="rect">
+            <a:avLst/>
+          </a:prstGeom>
+          <a:noFill/>
+          <a:ln w="12700">
+            <a:solidFill>
+              <a:prstClr val="black"/>
+            </a:solidFill>
+          </a:ln>
+        </p:spPr>
+        <p:txBody>
+          <a:bodyPr vert="horz" lIns="92930" tIns="46465" rIns="92930" bIns="46465" rtlCol="0" anchor="ctr"/>
+          <a:lstStyle/>
+          <a:p>
+            <a:endParaRPr lang="en-US"/>
+          </a:p>
+        </p:txBody>
+      </p:sp>
+      <p:sp>
+        <p:nvSpPr>
+          <p:cNvPr id="5" name="Notes Placeholder 4"/>
+          <p:cNvSpPr>
+            <a:spLocks noGrp="1"/>
+          </p:cNvSpPr>
+          <p:nvPr>
+            <p:ph type="body" sz="quarter" idx="3"/>
+          </p:nvPr>
+        </p:nvSpPr>
+        <p:spPr>
+          <a:xfrm>
+            <a:off x="695484" y="4480004"/>
+            <a:ext cx="5563870" cy="3665458"/>
+          </a:xfrm>
+          <a:prstGeom prst="rect">
+            <a:avLst/>
+          </a:prstGeom>
+        </p:spPr>
+        <p:txBody>
+          <a:bodyPr vert="horz" lIns="92930" tIns="46465" rIns="92930" bIns="46465" rtlCol="0"/>
+          <a:lstStyle/>
+          <a:p>
+            <a:pPr lvl="0"/>
+            <a:r>
+              <a:rPr lang="en-US"/>
+              <a:t>Click to edit Master text styles</a:t>
+            </a:r>
+          </a:p>
+          <a:p>
+            <a:pPr lvl="1"/>
+            <a:r>
+              <a:rPr lang="en-US"/>
+              <a:t>Second level</a:t>
+            </a:r>
+          </a:p>
+          <a:p>
+            <a:pPr lvl="2"/>
+            <a:r>
+              <a:rPr lang="en-US"/>
+              <a:t>Third level</a:t>
+            </a:r>
+          </a:p>
+          <a:p>
+            <a:pPr lvl="3"/>
+            <a:r>
+              <a:rPr lang="en-US"/>
+              <a:t>Fourth level</a:t>
+            </a:r>
+          </a:p>
+          <a:p>
+            <a:pPr lvl="4"/>
+            <a:r>
+              <a:rPr lang="en-US"/>
+              <a:t>Fifth level</a:t>
+            </a:r>
+          </a:p>
+        </p:txBody>
+      </p:sp>
+      <p:sp>
+        <p:nvSpPr>
+          <p:cNvPr id="6" name="Footer Placeholder 5"/>
+          <p:cNvSpPr>
+            <a:spLocks noGrp="1"/>
+          </p:cNvSpPr>
+          <p:nvPr>
+            <p:ph type="ftr" sz="quarter" idx="4"/>
+          </p:nvPr>
+        </p:nvSpPr>
+        <p:spPr>
+          <a:xfrm>
+            <a:off x="0" y="8842030"/>
+            <a:ext cx="3013763" cy="467071"/>
+          </a:xfrm>
+          <a:prstGeom prst="rect">
+            <a:avLst/>
+          </a:prstGeom>
+        </p:spPr>
+        <p:txBody>
+          <a:bodyPr vert="horz" lIns="92930" tIns="46465" rIns="92930" bIns="46465" rtlCol="0" anchor="b"/>
+          <a:lstStyle>
+            <a:lvl1pPr algn="l">
+              <a:defRPr sz="1200"/>
+            </a:lvl1pPr>
+          </a:lstStyle>
+          <a:p>
+            <a:endParaRPr lang="en-US"/>
+          </a:p>
+        </p:txBody>
+      </p:sp>
+      <p:sp>
+        <p:nvSpPr>
+          <p:cNvPr id="7" name="Slide Number Placeholder 6"/>
+          <p:cNvSpPr>
+            <a:spLocks noGrp="1"/>
+          </p:cNvSpPr>
+          <p:nvPr>
+            <p:ph type="sldNum" sz="quarter" idx="5"/>
+          </p:nvPr>
+        </p:nvSpPr>
+        <p:spPr>
+          <a:xfrm>
+            <a:off x="3939466" y="8842030"/>
+            <a:ext cx="3013763" cy="467071"/>
+          </a:xfrm>
+          <a:prstGeom prst="rect">
+            <a:avLst/>
+          </a:prstGeom>
+        </p:spPr>
+        <p:txBody>
+          <a:bodyPr vert="horz" lIns="92930" tIns="46465" rIns="92930" bIns="46465" rtlCol="0" anchor="b"/>
+          <a:lstStyle>
+            <a:lvl1pPr algn="r">
+              <a:defRPr sz="1200"/>
+            </a:lvl1pPr>
+          </a:lstStyle>
+          <a:p>
+            <a:fld id="{78B3C13F-8C70-4967-B114-F8782C3B91C0}" type="slidenum">
+              <a:rPr lang="en-US" smtClean="0"/>
+              <a:pPr/>
+              <a:t>‹#›</a:t>
+            </a:fld>
+            <a:endParaRPr lang="en-US"/>
+          </a:p>
+        </p:txBody>
+      </p:sp>
+    </p:spTree>
+    <p:extLst>
+      <p:ext uri="{BB962C8B-B14F-4D97-AF65-F5344CB8AC3E}">
+        <p14:creationId xmlns:p14="http://schemas.microsoft.com/office/powerpoint/2010/main" val="4196010818"/>
+      </p:ext>
+    </p:extLst>
+  </p:cSld>
+  <p:clrMap bg1="lt1" tx1="dk1" bg2="lt2" tx2="dk2" accent1="accent1" accent2="accent2" accent3="accent3" accent4="accent4" accent5="accent5" accent6="accent6" hlink="hlink" folHlink="folHlink"/>
+  <p:notesStyle>
+    <a:lvl1pPr marL="0" algn="l" defTabSz="914400" rtl="0" eaLnBrk="1" latinLnBrk="0" hangingPunct="1">
+      <a:defRPr sz="1200" kern="1200">
+        <a:solidFill>
+          <a:schemeClr val="tx1"/>
+        </a:solidFill>
+        <a:latin typeface="+mn-lt"/>
+        <a:ea typeface="+mn-ea"/>
+        <a:cs typeface="+mn-cs"/>
+      </a:defRPr>
+    </a:lvl1pPr>
+    <a:lvl2pPr marL="457200" algn="l" defTabSz="914400" rtl="0" eaLnBrk="1" latinLnBrk="0" hangingPunct="1">
+      <a:defRPr sz="1200" kern="1200">
+        <a:solidFill>
+          <a:schemeClr val="tx1"/>
+        </a:solidFill>
+        <a:latin typeface="+mn-lt"/>
+        <a:ea typeface="+mn-ea"/>
+        <a:cs typeface="+mn-cs"/>
+      </a:defRPr>
+    </a:lvl2pPr>
+    <a:lvl3pPr marL="914400" algn="l" defTabSz="914400" rtl="0" eaLnBrk="1" latinLnBrk="0" hangingPunct="1">
+      <a:defRPr sz="1200" kern="1200">
+        <a:solidFill>
+          <a:schemeClr val="tx1"/>
+        </a:solidFill>
+        <a:latin typeface="+mn-lt"/>
+        <a:ea typeface="+mn-ea"/>
+        <a:cs typeface="+mn-cs"/>
+      </a:defRPr>
+    </a:lvl3pPr>
+    <a:lvl4pPr marL="1371600" algn="l" defTabSz="914400" rtl="0" eaLnBrk="1" latinLnBrk="0" hangingPunct="1">
+      <a:defRPr sz="1200" kern="1200">
+        <a:solidFill>
+          <a:schemeClr val="tx1"/>
+        </a:solidFill>
+        <a:latin typeface="+mn-lt"/>
+        <a:ea typeface="+mn-ea"/>
+        <a:cs typeface="+mn-cs"/>
+      </a:defRPr>
+    </a:lvl4pPr>
+    <a:lvl5pPr marL="1828800" algn="l" defTabSz="914400" rtl="0" eaLnBrk="1" latinLnBrk="0" hangingPunct="1">
+      <a:defRPr sz="1200" kern="1200">
+        <a:solidFill>
+          <a:schemeClr val="tx1"/>
+        </a:solidFill>
+        <a:latin typeface="+mn-lt"/>
+        <a:ea typeface="+mn-ea"/>
+        <a:cs typeface="+mn-cs"/>
+      </a:defRPr>
+    </a:lvl5pPr>
+    <a:lvl6pPr marL="2286000" algn="l" defTabSz="914400" rtl="0" eaLnBrk="1" latinLnBrk="0" hangingPunct="1">
+      <a:defRPr sz="1200" kern="1200">
+        <a:solidFill>
+          <a:schemeClr val="tx1"/>
+        </a:solidFill>
+        <a:latin typeface="+mn-lt"/>
+        <a:ea typeface="+mn-ea"/>
+        <a:cs typeface="+mn-cs"/>
+      </a:defRPr>
+    </a:lvl6pPr>
+    <a:lvl7pPr marL="2743200" algn="l" defTabSz="914400" rtl="0" eaLnBrk="1" latinLnBrk="0" hangingPunct="1">
+      <a:defRPr sz="1200" kern="1200">
+        <a:solidFill>
+          <a:schemeClr val="tx1"/>
+        </a:solidFill>
+        <a:latin typeface="+mn-lt"/>
+        <a:ea typeface="+mn-ea"/>
+        <a:cs typeface="+mn-cs"/>
+      </a:defRPr>
+    </a:lvl7pPr>
+    <a:lvl8pPr marL="3200400" algn="l" defTabSz="914400" rtl="0" eaLnBrk="1" latinLnBrk="0" hangingPunct="1">
+      <a:defRPr sz="1200" kern="1200">
+        <a:solidFill>
+          <a:schemeClr val="tx1"/>
+        </a:solidFill>
+        <a:latin typeface="+mn-lt"/>
+        <a:ea typeface="+mn-ea"/>
+        <a:cs typeface="+mn-cs"/>
+      </a:defRPr>
+    </a:lvl8pPr>
+    <a:lvl9pPr marL="3657600" algn="l" defTabSz="914400" rtl="0" eaLnBrk="1" latinLnBrk="0" hangingPunct="1">
+      <a:defRPr sz="1200" kern="1200">
+        <a:solidFill>
+          <a:schemeClr val="tx1"/>
+        </a:solidFill>
+        <a:latin typeface="+mn-lt"/>
+        <a:ea typeface="+mn-ea"/>
+        <a:cs typeface="+mn-cs"/>
+      </a:defRPr>
+    </a:lvl9pPr>
+  </p:notesStyle>
+</p:notesMaster>
+</file>
+
+<file path=ppt/notesSlides/notesSlide1.xml><?xml version="1.0" encoding="utf-8"?>
+<p:notes xmlns:a="http://schemas.openxmlformats.org/drawingml/2006/main" xmlns:p="http://schemas.openxmlformats.org/presentationml/2006/main" xmlns:r="http://schemas.openxmlformats.org/officeDocument/2006/relationships">
+  <p:cSld>
+    <p:spTree>
+      <p:nvGrpSpPr>
+        <p:cNvPr id="1" name=""/>
+        <p:cNvGrpSpPr/>
+        <p:nvPr/>
+      </p:nvGrpSpPr>
+      <p:grpSpPr>
+        <a:xfrm>
+          <a:off x="0" y="0"/>
+          <a:ext cx="0" cy="0"/>
+          <a:chOff x="0" y="0"/>
+          <a:chExt cx="0" cy="0"/>
+        </a:xfrm>
+      </p:grpSpPr>
+      <p:sp>
+        <p:nvSpPr>
+          <p:cNvPr id="2" name="Slide Image Placeholder 1"/>
+          <p:cNvSpPr>
+            <a:spLocks noGrp="1"/>
+          </p:cNvSpPr>
+          <p:nvPr>
+            <p:ph type="sldImg" idx="2"/>
+          </p:nvPr>
+        </p:nvSpPr>
+        <p:spPr/>
+      </p:sp>
+      <p:sp>
+        <p:nvSpPr>
+          <p:cNvPr id="3" name="Notes Placeholder 2"/>
+          <p:cNvSpPr>
+            <a:spLocks noGrp="1"/>
+          </p:cNvSpPr>
+          <p:nvPr>
+            <p:ph type="body" idx="3" sz="quarter"/>
+          </p:nvPr>
+        </p:nvSpPr>
+        <p:spPr/>
+        <p:txBody>
+          <a:bodyPr/>
+          <a:lstStyle/>
+          <a:p>
+            <a:r>
+              <a:t>Contact-biased attention:</a:t>
+            </a:r>
+          </a:p>
+          <a:p>
+            <a:r>
+              <a:t>  a_ij = softmax_j ( q_i . k_j / sqrt(d) + b_HiC(c_ij) + b_dist(d_ij) + b_scale(r) )</a:t>
+            </a:r>
+          </a:p>
+          <a:p>
+            <a:r>
+              <a:t>c_ij is normalised contact strength, d_ij linear genomic distance, r the contact resolution. The bias terms are learned. Attention runs over graph edges only, which is what makes 640 kb of context fit on one 48 GB GPU.</a:t>
+            </a:r>
+          </a:p>
+          <a:p/>
+          <a:p>
+            <a:r>
+              <a:t>Objective: L = 1.0*L_DNA + 0.5*L_contrast + 1.0*L_contact</a:t>
+            </a:r>
+          </a:p>
+          <a:p/>
+          <a:p>
+            <a:r>
+              <a:t>Two design choices make the claim testable. Structure dropout (p = 0.3) drops the whole graph during pretraining, so Hi-C-free inference is in-distribution rather than an untested hope. Held-out target edges keep the contact head from copying its own input.</a:t>
+            </a:r>
+          </a:p>
+        </p:txBody>
+      </p:sp>
+      <p:sp>
+        <p:nvSpPr>
+          <p:cNvPr id="4" name="Slide Number Placeholder 3"/>
+          <p:cNvSpPr>
+            <a:spLocks noGrp="1"/>
+          </p:cNvSpPr>
+          <p:nvPr>
+            <p:ph type="sldNum" idx="5" sz="quarter"/>
+          </p:nvPr>
+        </p:nvSpPr>
+        <p:spPr/>
+      </p:sp>
+    </p:spTree>
+  </p:cSld>
+  <p:clrMapOvr>
+    <a:masterClrMapping/>
+  </p:clrMapOvr>
+</p:notes>
 </file>
 
 <file path=ppt/slideLayouts/slideLayout1.xml><?xml version="1.0" encoding="utf-8"?>
@@ -154,19 +690,23 @@
         </p:nvSpPr>
         <p:spPr>
           <a:xfrm>
-            <a:off x="685800" y="2130425"/>
-            <a:ext cx="7772400" cy="1470025"/>
+            <a:off x="685800" y="1122363"/>
+            <a:ext cx="7772400" cy="2387600"/>
           </a:xfrm>
         </p:spPr>
         <p:txBody>
-          <a:bodyPr/>
-          <a:lstStyle/>
-          <a:p>
-            <a:r>
-              <a:rPr lang="en-US" smtClean="0"/>
+          <a:bodyPr anchor="b"/>
+          <a:lstStyle>
+            <a:lvl1pPr algn="ctr">
+              <a:defRPr sz="6000"/>
+            </a:lvl1pPr>
+          </a:lstStyle>
+          <a:p>
+            <a:r>
+              <a:rPr lang="en-US"/>
               <a:t>Click to edit Master title style</a:t>
             </a:r>
-            <a:endParaRPr lang="en-US"/>
+            <a:endParaRPr lang="en-US" dirty="0"/>
           </a:p>
         </p:txBody>
       </p:sp>
@@ -182,8 +722,8 @@
         </p:nvSpPr>
         <p:spPr>
           <a:xfrm>
-            <a:off x="1371600" y="3886200"/>
-            <a:ext cx="6400800" cy="1752600"/>
+            <a:off x="1143000" y="3602038"/>
+            <a:ext cx="6858000" cy="1655762"/>
           </a:xfrm>
         </p:spPr>
         <p:txBody>
@@ -191,122 +731,69 @@
           <a:lstStyle>
             <a:lvl1pPr marL="0" indent="0" algn="ctr">
               <a:buNone/>
-              <a:defRPr>
-                <a:solidFill>
-                  <a:schemeClr val="tx1">
-                    <a:tint val="75000"/>
-                  </a:schemeClr>
-                </a:solidFill>
-              </a:defRPr>
+              <a:defRPr sz="2400"/>
             </a:lvl1pPr>
             <a:lvl2pPr marL="457200" indent="0" algn="ctr">
               <a:buNone/>
-              <a:defRPr>
-                <a:solidFill>
-                  <a:schemeClr val="tx1">
-                    <a:tint val="75000"/>
-                  </a:schemeClr>
-                </a:solidFill>
-              </a:defRPr>
+              <a:defRPr sz="2000"/>
             </a:lvl2pPr>
             <a:lvl3pPr marL="914400" indent="0" algn="ctr">
               <a:buNone/>
-              <a:defRPr>
-                <a:solidFill>
-                  <a:schemeClr val="tx1">
-                    <a:tint val="75000"/>
-                  </a:schemeClr>
-                </a:solidFill>
-              </a:defRPr>
+              <a:defRPr sz="1800"/>
             </a:lvl3pPr>
             <a:lvl4pPr marL="1371600" indent="0" algn="ctr">
               <a:buNone/>
-              <a:defRPr>
-                <a:solidFill>
-                  <a:schemeClr val="tx1">
-                    <a:tint val="75000"/>
-                  </a:schemeClr>
-                </a:solidFill>
-              </a:defRPr>
+              <a:defRPr sz="1600"/>
             </a:lvl4pPr>
             <a:lvl5pPr marL="1828800" indent="0" algn="ctr">
               <a:buNone/>
-              <a:defRPr>
-                <a:solidFill>
-                  <a:schemeClr val="tx1">
-                    <a:tint val="75000"/>
-                  </a:schemeClr>
-                </a:solidFill>
-              </a:defRPr>
+              <a:defRPr sz="1600"/>
             </a:lvl5pPr>
             <a:lvl6pPr marL="2286000" indent="0" algn="ctr">
               <a:buNone/>
-              <a:defRPr>
-                <a:solidFill>
-                  <a:schemeClr val="tx1">
-                    <a:tint val="75000"/>
-                  </a:schemeClr>
-                </a:solidFill>
-              </a:defRPr>
+              <a:defRPr sz="1600"/>
             </a:lvl6pPr>
             <a:lvl7pPr marL="2743200" indent="0" algn="ctr">
               <a:buNone/>
-              <a:defRPr>
-                <a:solidFill>
-                  <a:schemeClr val="tx1">
-                    <a:tint val="75000"/>
-                  </a:schemeClr>
-                </a:solidFill>
-              </a:defRPr>
+              <a:defRPr sz="1600"/>
             </a:lvl7pPr>
             <a:lvl8pPr marL="3200400" indent="0" algn="ctr">
               <a:buNone/>
-              <a:defRPr>
-                <a:solidFill>
-                  <a:schemeClr val="tx1">
-                    <a:tint val="75000"/>
-                  </a:schemeClr>
-                </a:solidFill>
-              </a:defRPr>
+              <a:defRPr sz="1600"/>
             </a:lvl8pPr>
             <a:lvl9pPr marL="3657600" indent="0" algn="ctr">
               <a:buNone/>
-              <a:defRPr>
-                <a:solidFill>
-                  <a:schemeClr val="tx1">
-                    <a:tint val="75000"/>
-                  </a:schemeClr>
-                </a:solidFill>
-              </a:defRPr>
+              <a:defRPr sz="1600"/>
             </a:lvl9pPr>
           </a:lstStyle>
           <a:p>
             <a:r>
+              <a:rPr lang="en-US"/>
+              <a:t>Click to edit Master subtitle style</a:t>
+            </a:r>
+            <a:endParaRPr lang="en-US" dirty="0"/>
+          </a:p>
+        </p:txBody>
+      </p:sp>
+      <p:sp>
+        <p:nvSpPr>
+          <p:cNvPr id="4" name="Date Placeholder 3"/>
+          <p:cNvSpPr>
+            <a:spLocks noGrp="1"/>
+          </p:cNvSpPr>
+          <p:nvPr>
+            <p:ph type="dt" sz="half" idx="10"/>
+          </p:nvPr>
+        </p:nvSpPr>
+        <p:spPr/>
+        <p:txBody>
+          <a:bodyPr/>
+          <a:lstStyle/>
+          <a:p>
+            <a:fld id="{6C6A3A6F-B049-4A3C-A314-6C5DC6ABA413}" type="datetime1">
               <a:rPr lang="en-US" smtClean="0"/>
-              <a:t>Click to edit Master subtitle style</a:t>
-            </a:r>
-            <a:endParaRPr lang="en-US"/>
-          </a:p>
-        </p:txBody>
-      </p:sp>
-      <p:sp>
-        <p:nvSpPr>
-          <p:cNvPr id="4" name="Date Placeholder 3"/>
-          <p:cNvSpPr>
-            <a:spLocks noGrp="1"/>
-          </p:cNvSpPr>
-          <p:nvPr>
-            <p:ph type="dt" sz="half" idx="10"/>
-          </p:nvPr>
-        </p:nvSpPr>
-        <p:spPr/>
-        <p:txBody>
-          <a:bodyPr/>
-          <a:lstStyle/>
-          <a:p>
-            <a:fld id="{5BCAD085-E8A6-8845-BD4E-CB4CCA059FC4}" type="datetimeFigureOut">
-              <a:rPr lang="en-US" smtClean="0"/>
-              <a:t>1/27/13</a:t>
+              <a:pPr/>
+              <a:t>8/8/2026</a:t>
             </a:fld>
             <a:endParaRPr lang="en-US"/>
           </a:p>
@@ -346,8 +833,9 @@
           <a:bodyPr/>
           <a:lstStyle/>
           <a:p>
-            <a:fld id="{C1FF6DA9-008F-8B48-92A6-B652298478BF}" type="slidenum">
+            <a:fld id="{D90542D4-23E8-43E0-BA8E-C972DA1A005D}" type="slidenum">
               <a:rPr lang="en-US" smtClean="0"/>
+              <a:pPr/>
               <a:t>‹#›</a:t>
             </a:fld>
             <a:endParaRPr lang="en-US"/>
@@ -357,7 +845,7 @@
     </p:spTree>
     <p:extLst>
       <p:ext uri="{BB962C8B-B14F-4D97-AF65-F5344CB8AC3E}">
-        <p14:creationId xmlns:p14="http://schemas.microsoft.com/office/powerpoint/2010/main" val="3168075583"/>
+        <p14:creationId xmlns:p14="http://schemas.microsoft.com/office/powerpoint/2010/main" val="4217684153"/>
       </p:ext>
     </p:extLst>
   </p:cSld>
@@ -400,83 +888,84 @@
           <a:lstStyle/>
           <a:p>
             <a:r>
+              <a:rPr lang="en-US"/>
+              <a:t>Click to edit Master title style</a:t>
+            </a:r>
+            <a:endParaRPr lang="en-US" dirty="0"/>
+          </a:p>
+        </p:txBody>
+      </p:sp>
+      <p:sp>
+        <p:nvSpPr>
+          <p:cNvPr id="3" name="Vertical Text Placeholder 2"/>
+          <p:cNvSpPr>
+            <a:spLocks noGrp="1"/>
+          </p:cNvSpPr>
+          <p:nvPr>
+            <p:ph type="body" orient="vert" idx="1"/>
+          </p:nvPr>
+        </p:nvSpPr>
+        <p:spPr/>
+        <p:txBody>
+          <a:bodyPr vert="eaVert"/>
+          <a:lstStyle/>
+          <a:p>
+            <a:pPr lvl="0"/>
+            <a:r>
+              <a:rPr lang="en-US"/>
+              <a:t>Click to edit Master text styles</a:t>
+            </a:r>
+          </a:p>
+          <a:p>
+            <a:pPr lvl="1"/>
+            <a:r>
+              <a:rPr lang="en-US"/>
+              <a:t>Second level</a:t>
+            </a:r>
+          </a:p>
+          <a:p>
+            <a:pPr lvl="2"/>
+            <a:r>
+              <a:rPr lang="en-US"/>
+              <a:t>Third level</a:t>
+            </a:r>
+          </a:p>
+          <a:p>
+            <a:pPr lvl="3"/>
+            <a:r>
+              <a:rPr lang="en-US"/>
+              <a:t>Fourth level</a:t>
+            </a:r>
+          </a:p>
+          <a:p>
+            <a:pPr lvl="4"/>
+            <a:r>
+              <a:rPr lang="en-US"/>
+              <a:t>Fifth level</a:t>
+            </a:r>
+            <a:endParaRPr lang="en-US" dirty="0"/>
+          </a:p>
+        </p:txBody>
+      </p:sp>
+      <p:sp>
+        <p:nvSpPr>
+          <p:cNvPr id="4" name="Date Placeholder 3"/>
+          <p:cNvSpPr>
+            <a:spLocks noGrp="1"/>
+          </p:cNvSpPr>
+          <p:nvPr>
+            <p:ph type="dt" sz="half" idx="10"/>
+          </p:nvPr>
+        </p:nvSpPr>
+        <p:spPr/>
+        <p:txBody>
+          <a:bodyPr/>
+          <a:lstStyle/>
+          <a:p>
+            <a:fld id="{BE0F1400-0AF8-4881-9500-1BCE077EF02C}" type="datetime1">
               <a:rPr lang="en-US" smtClean="0"/>
-              <a:t>Click to edit Master title style</a:t>
-            </a:r>
-            <a:endParaRPr lang="en-US"/>
-          </a:p>
-        </p:txBody>
-      </p:sp>
-      <p:sp>
-        <p:nvSpPr>
-          <p:cNvPr id="3" name="Vertical Text Placeholder 2"/>
-          <p:cNvSpPr>
-            <a:spLocks noGrp="1"/>
-          </p:cNvSpPr>
-          <p:nvPr>
-            <p:ph type="body" orient="vert" idx="1"/>
-          </p:nvPr>
-        </p:nvSpPr>
-        <p:spPr/>
-        <p:txBody>
-          <a:bodyPr vert="eaVert"/>
-          <a:lstStyle/>
-          <a:p>
-            <a:pPr lvl="0"/>
-            <a:r>
-              <a:rPr lang="en-US" smtClean="0"/>
-              <a:t>Click to edit Master text styles</a:t>
-            </a:r>
-          </a:p>
-          <a:p>
-            <a:pPr lvl="1"/>
-            <a:r>
-              <a:rPr lang="en-US" smtClean="0"/>
-              <a:t>Second level</a:t>
-            </a:r>
-          </a:p>
-          <a:p>
-            <a:pPr lvl="2"/>
-            <a:r>
-              <a:rPr lang="en-US" smtClean="0"/>
-              <a:t>Third level</a:t>
-            </a:r>
-          </a:p>
-          <a:p>
-            <a:pPr lvl="3"/>
-            <a:r>
-              <a:rPr lang="en-US" smtClean="0"/>
-              <a:t>Fourth level</a:t>
-            </a:r>
-          </a:p>
-          <a:p>
-            <a:pPr lvl="4"/>
-            <a:r>
-              <a:rPr lang="en-US" smtClean="0"/>
-              <a:t>Fifth level</a:t>
-            </a:r>
-            <a:endParaRPr lang="en-US"/>
-          </a:p>
-        </p:txBody>
-      </p:sp>
-      <p:sp>
-        <p:nvSpPr>
-          <p:cNvPr id="4" name="Date Placeholder 3"/>
-          <p:cNvSpPr>
-            <a:spLocks noGrp="1"/>
-          </p:cNvSpPr>
-          <p:nvPr>
-            <p:ph type="dt" sz="half" idx="10"/>
-          </p:nvPr>
-        </p:nvSpPr>
-        <p:spPr/>
-        <p:txBody>
-          <a:bodyPr/>
-          <a:lstStyle/>
-          <a:p>
-            <a:fld id="{5BCAD085-E8A6-8845-BD4E-CB4CCA059FC4}" type="datetimeFigureOut">
-              <a:rPr lang="en-US" smtClean="0"/>
-              <a:t>1/27/13</a:t>
+              <a:pPr/>
+              <a:t>8/8/2026</a:t>
             </a:fld>
             <a:endParaRPr lang="en-US"/>
           </a:p>
@@ -516,8 +1005,9 @@
           <a:bodyPr/>
           <a:lstStyle/>
           <a:p>
-            <a:fld id="{C1FF6DA9-008F-8B48-92A6-B652298478BF}" type="slidenum">
+            <a:fld id="{D90542D4-23E8-43E0-BA8E-C972DA1A005D}" type="slidenum">
               <a:rPr lang="en-US" smtClean="0"/>
+              <a:pPr/>
               <a:t>‹#›</a:t>
             </a:fld>
             <a:endParaRPr lang="en-US"/>
@@ -527,7 +1017,7 @@
     </p:spTree>
     <p:extLst>
       <p:ext uri="{BB962C8B-B14F-4D97-AF65-F5344CB8AC3E}">
-        <p14:creationId xmlns:p14="http://schemas.microsoft.com/office/powerpoint/2010/main" val="2910927964"/>
+        <p14:creationId xmlns:p14="http://schemas.microsoft.com/office/powerpoint/2010/main" val="4165504290"/>
       </p:ext>
     </p:extLst>
   </p:cSld>
@@ -566,8 +1056,8 @@
         </p:nvSpPr>
         <p:spPr>
           <a:xfrm>
-            <a:off x="6629400" y="274638"/>
-            <a:ext cx="2057400" cy="5851525"/>
+            <a:off x="6543675" y="365125"/>
+            <a:ext cx="1971675" cy="5811838"/>
           </a:xfrm>
         </p:spPr>
         <p:txBody>
@@ -575,10 +1065,10 @@
           <a:lstStyle/>
           <a:p>
             <a:r>
-              <a:rPr lang="en-US" smtClean="0"/>
+              <a:rPr lang="en-US"/>
               <a:t>Click to edit Master title style</a:t>
             </a:r>
-            <a:endParaRPr lang="en-US"/>
+            <a:endParaRPr lang="en-US" dirty="0"/>
           </a:p>
         </p:txBody>
       </p:sp>
@@ -594,8 +1084,8 @@
         </p:nvSpPr>
         <p:spPr>
           <a:xfrm>
-            <a:off x="457200" y="274638"/>
-            <a:ext cx="6019800" cy="5851525"/>
+            <a:off x="628650" y="365125"/>
+            <a:ext cx="5800725" cy="5811838"/>
           </a:xfrm>
         </p:spPr>
         <p:txBody>
@@ -604,59 +1094,60 @@
           <a:p>
             <a:pPr lvl="0"/>
             <a:r>
+              <a:rPr lang="en-US"/>
+              <a:t>Click to edit Master text styles</a:t>
+            </a:r>
+          </a:p>
+          <a:p>
+            <a:pPr lvl="1"/>
+            <a:r>
+              <a:rPr lang="en-US"/>
+              <a:t>Second level</a:t>
+            </a:r>
+          </a:p>
+          <a:p>
+            <a:pPr lvl="2"/>
+            <a:r>
+              <a:rPr lang="en-US"/>
+              <a:t>Third level</a:t>
+            </a:r>
+          </a:p>
+          <a:p>
+            <a:pPr lvl="3"/>
+            <a:r>
+              <a:rPr lang="en-US"/>
+              <a:t>Fourth level</a:t>
+            </a:r>
+          </a:p>
+          <a:p>
+            <a:pPr lvl="4"/>
+            <a:r>
+              <a:rPr lang="en-US"/>
+              <a:t>Fifth level</a:t>
+            </a:r>
+            <a:endParaRPr lang="en-US" dirty="0"/>
+          </a:p>
+        </p:txBody>
+      </p:sp>
+      <p:sp>
+        <p:nvSpPr>
+          <p:cNvPr id="4" name="Date Placeholder 3"/>
+          <p:cNvSpPr>
+            <a:spLocks noGrp="1"/>
+          </p:cNvSpPr>
+          <p:nvPr>
+            <p:ph type="dt" sz="half" idx="10"/>
+          </p:nvPr>
+        </p:nvSpPr>
+        <p:spPr/>
+        <p:txBody>
+          <a:bodyPr/>
+          <a:lstStyle/>
+          <a:p>
+            <a:fld id="{5B520AC9-8025-43C3-9D7A-B30453D05E68}" type="datetime1">
               <a:rPr lang="en-US" smtClean="0"/>
-              <a:t>Click to edit Master text styles</a:t>
-            </a:r>
-          </a:p>
-          <a:p>
-            <a:pPr lvl="1"/>
-            <a:r>
-              <a:rPr lang="en-US" smtClean="0"/>
-              <a:t>Second level</a:t>
-            </a:r>
-          </a:p>
-          <a:p>
-            <a:pPr lvl="2"/>
-            <a:r>
-              <a:rPr lang="en-US" smtClean="0"/>
-              <a:t>Third level</a:t>
-            </a:r>
-          </a:p>
-          <a:p>
-            <a:pPr lvl="3"/>
-            <a:r>
-              <a:rPr lang="en-US" smtClean="0"/>
-              <a:t>Fourth level</a:t>
-            </a:r>
-          </a:p>
-          <a:p>
-            <a:pPr lvl="4"/>
-            <a:r>
-              <a:rPr lang="en-US" smtClean="0"/>
-              <a:t>Fifth level</a:t>
-            </a:r>
-            <a:endParaRPr lang="en-US"/>
-          </a:p>
-        </p:txBody>
-      </p:sp>
-      <p:sp>
-        <p:nvSpPr>
-          <p:cNvPr id="4" name="Date Placeholder 3"/>
-          <p:cNvSpPr>
-            <a:spLocks noGrp="1"/>
-          </p:cNvSpPr>
-          <p:nvPr>
-            <p:ph type="dt" sz="half" idx="10"/>
-          </p:nvPr>
-        </p:nvSpPr>
-        <p:spPr/>
-        <p:txBody>
-          <a:bodyPr/>
-          <a:lstStyle/>
-          <a:p>
-            <a:fld id="{5BCAD085-E8A6-8845-BD4E-CB4CCA059FC4}" type="datetimeFigureOut">
-              <a:rPr lang="en-US" smtClean="0"/>
-              <a:t>1/27/13</a:t>
+              <a:pPr/>
+              <a:t>8/8/2026</a:t>
             </a:fld>
             <a:endParaRPr lang="en-US"/>
           </a:p>
@@ -696,8 +1187,9 @@
           <a:bodyPr/>
           <a:lstStyle/>
           <a:p>
-            <a:fld id="{C1FF6DA9-008F-8B48-92A6-B652298478BF}" type="slidenum">
+            <a:fld id="{D90542D4-23E8-43E0-BA8E-C972DA1A005D}" type="slidenum">
               <a:rPr lang="en-US" smtClean="0"/>
+              <a:pPr/>
               <a:t>‹#›</a:t>
             </a:fld>
             <a:endParaRPr lang="en-US"/>
@@ -707,7 +1199,7 @@
     </p:spTree>
     <p:extLst>
       <p:ext uri="{BB962C8B-B14F-4D97-AF65-F5344CB8AC3E}">
-        <p14:creationId xmlns:p14="http://schemas.microsoft.com/office/powerpoint/2010/main" val="3612223792"/>
+        <p14:creationId xmlns:p14="http://schemas.microsoft.com/office/powerpoint/2010/main" val="2716315678"/>
       </p:ext>
     </p:extLst>
   </p:cSld>
@@ -750,83 +1242,84 @@
           <a:lstStyle/>
           <a:p>
             <a:r>
+              <a:rPr lang="en-US"/>
+              <a:t>Click to edit Master title style</a:t>
+            </a:r>
+            <a:endParaRPr lang="en-US" dirty="0"/>
+          </a:p>
+        </p:txBody>
+      </p:sp>
+      <p:sp>
+        <p:nvSpPr>
+          <p:cNvPr id="3" name="Content Placeholder 2"/>
+          <p:cNvSpPr>
+            <a:spLocks noGrp="1"/>
+          </p:cNvSpPr>
+          <p:nvPr>
+            <p:ph idx="1"/>
+          </p:nvPr>
+        </p:nvSpPr>
+        <p:spPr/>
+        <p:txBody>
+          <a:bodyPr/>
+          <a:lstStyle/>
+          <a:p>
+            <a:pPr lvl="0"/>
+            <a:r>
+              <a:rPr lang="en-US"/>
+              <a:t>Click to edit Master text styles</a:t>
+            </a:r>
+          </a:p>
+          <a:p>
+            <a:pPr lvl="1"/>
+            <a:r>
+              <a:rPr lang="en-US"/>
+              <a:t>Second level</a:t>
+            </a:r>
+          </a:p>
+          <a:p>
+            <a:pPr lvl="2"/>
+            <a:r>
+              <a:rPr lang="en-US"/>
+              <a:t>Third level</a:t>
+            </a:r>
+          </a:p>
+          <a:p>
+            <a:pPr lvl="3"/>
+            <a:r>
+              <a:rPr lang="en-US"/>
+              <a:t>Fourth level</a:t>
+            </a:r>
+          </a:p>
+          <a:p>
+            <a:pPr lvl="4"/>
+            <a:r>
+              <a:rPr lang="en-US"/>
+              <a:t>Fifth level</a:t>
+            </a:r>
+            <a:endParaRPr lang="en-US" dirty="0"/>
+          </a:p>
+        </p:txBody>
+      </p:sp>
+      <p:sp>
+        <p:nvSpPr>
+          <p:cNvPr id="4" name="Date Placeholder 3"/>
+          <p:cNvSpPr>
+            <a:spLocks noGrp="1"/>
+          </p:cNvSpPr>
+          <p:nvPr>
+            <p:ph type="dt" sz="half" idx="10"/>
+          </p:nvPr>
+        </p:nvSpPr>
+        <p:spPr/>
+        <p:txBody>
+          <a:bodyPr/>
+          <a:lstStyle/>
+          <a:p>
+            <a:fld id="{880A0579-E4EA-4069-8E9E-A5661942CE83}" type="datetime1">
               <a:rPr lang="en-US" smtClean="0"/>
-              <a:t>Click to edit Master title style</a:t>
-            </a:r>
-            <a:endParaRPr lang="en-US"/>
-          </a:p>
-        </p:txBody>
-      </p:sp>
-      <p:sp>
-        <p:nvSpPr>
-          <p:cNvPr id="3" name="Content Placeholder 2"/>
-          <p:cNvSpPr>
-            <a:spLocks noGrp="1"/>
-          </p:cNvSpPr>
-          <p:nvPr>
-            <p:ph idx="1"/>
-          </p:nvPr>
-        </p:nvSpPr>
-        <p:spPr/>
-        <p:txBody>
-          <a:bodyPr/>
-          <a:lstStyle/>
-          <a:p>
-            <a:pPr lvl="0"/>
-            <a:r>
-              <a:rPr lang="en-US" smtClean="0"/>
-              <a:t>Click to edit Master text styles</a:t>
-            </a:r>
-          </a:p>
-          <a:p>
-            <a:pPr lvl="1"/>
-            <a:r>
-              <a:rPr lang="en-US" smtClean="0"/>
-              <a:t>Second level</a:t>
-            </a:r>
-          </a:p>
-          <a:p>
-            <a:pPr lvl="2"/>
-            <a:r>
-              <a:rPr lang="en-US" smtClean="0"/>
-              <a:t>Third level</a:t>
-            </a:r>
-          </a:p>
-          <a:p>
-            <a:pPr lvl="3"/>
-            <a:r>
-              <a:rPr lang="en-US" smtClean="0"/>
-              <a:t>Fourth level</a:t>
-            </a:r>
-          </a:p>
-          <a:p>
-            <a:pPr lvl="4"/>
-            <a:r>
-              <a:rPr lang="en-US" smtClean="0"/>
-              <a:t>Fifth level</a:t>
-            </a:r>
-            <a:endParaRPr lang="en-US"/>
-          </a:p>
-        </p:txBody>
-      </p:sp>
-      <p:sp>
-        <p:nvSpPr>
-          <p:cNvPr id="4" name="Date Placeholder 3"/>
-          <p:cNvSpPr>
-            <a:spLocks noGrp="1"/>
-          </p:cNvSpPr>
-          <p:nvPr>
-            <p:ph type="dt" sz="half" idx="10"/>
-          </p:nvPr>
-        </p:nvSpPr>
-        <p:spPr/>
-        <p:txBody>
-          <a:bodyPr/>
-          <a:lstStyle/>
-          <a:p>
-            <a:fld id="{5BCAD085-E8A6-8845-BD4E-CB4CCA059FC4}" type="datetimeFigureOut">
-              <a:rPr lang="en-US" smtClean="0"/>
-              <a:t>1/27/13</a:t>
+              <a:pPr/>
+              <a:t>8/8/2026</a:t>
             </a:fld>
             <a:endParaRPr lang="en-US"/>
           </a:p>
@@ -866,8 +1359,9 @@
           <a:bodyPr/>
           <a:lstStyle/>
           <a:p>
-            <a:fld id="{C1FF6DA9-008F-8B48-92A6-B652298478BF}" type="slidenum">
+            <a:fld id="{D90542D4-23E8-43E0-BA8E-C972DA1A005D}" type="slidenum">
               <a:rPr lang="en-US" smtClean="0"/>
+              <a:pPr/>
               <a:t>‹#›</a:t>
             </a:fld>
             <a:endParaRPr lang="en-US"/>
@@ -877,7 +1371,7 @@
     </p:spTree>
     <p:extLst>
       <p:ext uri="{BB962C8B-B14F-4D97-AF65-F5344CB8AC3E}">
-        <p14:creationId xmlns:p14="http://schemas.microsoft.com/office/powerpoint/2010/main" val="2614314258"/>
+        <p14:creationId xmlns:p14="http://schemas.microsoft.com/office/powerpoint/2010/main" val="3203546835"/>
       </p:ext>
     </p:extLst>
   </p:cSld>
@@ -916,23 +1410,23 @@
         </p:nvSpPr>
         <p:spPr>
           <a:xfrm>
-            <a:off x="722313" y="4406900"/>
-            <a:ext cx="7772400" cy="1362075"/>
+            <a:off x="623888" y="1709739"/>
+            <a:ext cx="7886700" cy="2852737"/>
           </a:xfrm>
         </p:spPr>
         <p:txBody>
-          <a:bodyPr anchor="t"/>
+          <a:bodyPr anchor="b"/>
           <a:lstStyle>
-            <a:lvl1pPr algn="l">
-              <a:defRPr sz="4000" b="1" cap="all"/>
+            <a:lvl1pPr>
+              <a:defRPr sz="6000"/>
             </a:lvl1pPr>
           </a:lstStyle>
           <a:p>
             <a:r>
-              <a:rPr lang="en-US" smtClean="0"/>
+              <a:rPr lang="en-US"/>
               <a:t>Click to edit Master title style</a:t>
             </a:r>
-            <a:endParaRPr lang="en-US"/>
+            <a:endParaRPr lang="en-US" dirty="0"/>
           </a:p>
         </p:txBody>
       </p:sp>
@@ -948,26 +1442,24 @@
         </p:nvSpPr>
         <p:spPr>
           <a:xfrm>
-            <a:off x="722313" y="2906713"/>
-            <a:ext cx="7772400" cy="1500187"/>
+            <a:off x="623888" y="4589464"/>
+            <a:ext cx="7886700" cy="1500187"/>
           </a:xfrm>
         </p:spPr>
         <p:txBody>
-          <a:bodyPr anchor="b"/>
+          <a:bodyPr/>
           <a:lstStyle>
             <a:lvl1pPr marL="0" indent="0">
               <a:buNone/>
-              <a:defRPr sz="2000">
+              <a:defRPr sz="2400">
                 <a:solidFill>
-                  <a:schemeClr val="tx1">
-                    <a:tint val="75000"/>
-                  </a:schemeClr>
+                  <a:schemeClr val="tx1"/>
                 </a:solidFill>
               </a:defRPr>
             </a:lvl1pPr>
             <a:lvl2pPr marL="457200" indent="0">
               <a:buNone/>
-              <a:defRPr sz="1800">
+              <a:defRPr sz="2000">
                 <a:solidFill>
                   <a:schemeClr val="tx1">
                     <a:tint val="75000"/>
@@ -977,7 +1469,7 @@
             </a:lvl2pPr>
             <a:lvl3pPr marL="914400" indent="0">
               <a:buNone/>
-              <a:defRPr sz="1600">
+              <a:defRPr sz="1800">
                 <a:solidFill>
                   <a:schemeClr val="tx1">
                     <a:tint val="75000"/>
@@ -987,7 +1479,7 @@
             </a:lvl3pPr>
             <a:lvl4pPr marL="1371600" indent="0">
               <a:buNone/>
-              <a:defRPr sz="1400">
+              <a:defRPr sz="1600">
                 <a:solidFill>
                   <a:schemeClr val="tx1">
                     <a:tint val="75000"/>
@@ -997,7 +1489,7 @@
             </a:lvl4pPr>
             <a:lvl5pPr marL="1828800" indent="0">
               <a:buNone/>
-              <a:defRPr sz="1400">
+              <a:defRPr sz="1600">
                 <a:solidFill>
                   <a:schemeClr val="tx1">
                     <a:tint val="75000"/>
@@ -1007,7 +1499,7 @@
             </a:lvl5pPr>
             <a:lvl6pPr marL="2286000" indent="0">
               <a:buNone/>
-              <a:defRPr sz="1400">
+              <a:defRPr sz="1600">
                 <a:solidFill>
                   <a:schemeClr val="tx1">
                     <a:tint val="75000"/>
@@ -1017,7 +1509,7 @@
             </a:lvl6pPr>
             <a:lvl7pPr marL="2743200" indent="0">
               <a:buNone/>
-              <a:defRPr sz="1400">
+              <a:defRPr sz="1600">
                 <a:solidFill>
                   <a:schemeClr val="tx1">
                     <a:tint val="75000"/>
@@ -1027,7 +1519,7 @@
             </a:lvl7pPr>
             <a:lvl8pPr marL="3200400" indent="0">
               <a:buNone/>
-              <a:defRPr sz="1400">
+              <a:defRPr sz="1600">
                 <a:solidFill>
                   <a:schemeClr val="tx1">
                     <a:tint val="75000"/>
@@ -1037,7 +1529,7 @@
             </a:lvl8pPr>
             <a:lvl9pPr marL="3657600" indent="0">
               <a:buNone/>
-              <a:defRPr sz="1400">
+              <a:defRPr sz="1600">
                 <a:solidFill>
                   <a:schemeClr val="tx1">
                     <a:tint val="75000"/>
@@ -1049,30 +1541,31 @@
           <a:p>
             <a:pPr lvl="0"/>
             <a:r>
+              <a:rPr lang="en-US"/>
+              <a:t>Click to edit Master text styles</a:t>
+            </a:r>
+          </a:p>
+        </p:txBody>
+      </p:sp>
+      <p:sp>
+        <p:nvSpPr>
+          <p:cNvPr id="4" name="Date Placeholder 3"/>
+          <p:cNvSpPr>
+            <a:spLocks noGrp="1"/>
+          </p:cNvSpPr>
+          <p:nvPr>
+            <p:ph type="dt" sz="half" idx="10"/>
+          </p:nvPr>
+        </p:nvSpPr>
+        <p:spPr/>
+        <p:txBody>
+          <a:bodyPr/>
+          <a:lstStyle/>
+          <a:p>
+            <a:fld id="{DCBAC4A0-A0AB-494A-9349-6940CE23F0BB}" type="datetime1">
               <a:rPr lang="en-US" smtClean="0"/>
-              <a:t>Click to edit Master text styles</a:t>
-            </a:r>
-          </a:p>
-        </p:txBody>
-      </p:sp>
-      <p:sp>
-        <p:nvSpPr>
-          <p:cNvPr id="4" name="Date Placeholder 3"/>
-          <p:cNvSpPr>
-            <a:spLocks noGrp="1"/>
-          </p:cNvSpPr>
-          <p:nvPr>
-            <p:ph type="dt" sz="half" idx="10"/>
-          </p:nvPr>
-        </p:nvSpPr>
-        <p:spPr/>
-        <p:txBody>
-          <a:bodyPr/>
-          <a:lstStyle/>
-          <a:p>
-            <a:fld id="{5BCAD085-E8A6-8845-BD4E-CB4CCA059FC4}" type="datetimeFigureOut">
-              <a:rPr lang="en-US" smtClean="0"/>
-              <a:t>1/27/13</a:t>
+              <a:pPr/>
+              <a:t>8/8/2026</a:t>
             </a:fld>
             <a:endParaRPr lang="en-US"/>
           </a:p>
@@ -1112,8 +1605,9 @@
           <a:bodyPr/>
           <a:lstStyle/>
           <a:p>
-            <a:fld id="{C1FF6DA9-008F-8B48-92A6-B652298478BF}" type="slidenum">
+            <a:fld id="{D90542D4-23E8-43E0-BA8E-C972DA1A005D}" type="slidenum">
               <a:rPr lang="en-US" smtClean="0"/>
+              <a:pPr/>
               <a:t>‹#›</a:t>
             </a:fld>
             <a:endParaRPr lang="en-US"/>
@@ -1123,7 +1617,7 @@
     </p:spTree>
     <p:extLst>
       <p:ext uri="{BB962C8B-B14F-4D97-AF65-F5344CB8AC3E}">
-        <p14:creationId xmlns:p14="http://schemas.microsoft.com/office/powerpoint/2010/main" val="960648375"/>
+        <p14:creationId xmlns:p14="http://schemas.microsoft.com/office/powerpoint/2010/main" val="2522349692"/>
       </p:ext>
     </p:extLst>
   </p:cSld>
@@ -1166,10 +1660,10 @@
           <a:lstStyle/>
           <a:p>
             <a:r>
-              <a:rPr lang="en-US" smtClean="0"/>
+              <a:rPr lang="en-US"/>
               <a:t>Click to edit Master title style</a:t>
             </a:r>
-            <a:endParaRPr lang="en-US"/>
+            <a:endParaRPr lang="en-US" dirty="0"/>
           </a:p>
         </p:txBody>
       </p:sp>
@@ -1185,76 +1679,48 @@
         </p:nvSpPr>
         <p:spPr>
           <a:xfrm>
-            <a:off x="457200" y="1600200"/>
-            <a:ext cx="4038600" cy="4525963"/>
+            <a:off x="628650" y="1825625"/>
+            <a:ext cx="3886200" cy="4351338"/>
           </a:xfrm>
         </p:spPr>
         <p:txBody>
           <a:bodyPr/>
-          <a:lstStyle>
-            <a:lvl1pPr>
-              <a:defRPr sz="2800"/>
-            </a:lvl1pPr>
-            <a:lvl2pPr>
-              <a:defRPr sz="2400"/>
-            </a:lvl2pPr>
-            <a:lvl3pPr>
-              <a:defRPr sz="2000"/>
-            </a:lvl3pPr>
-            <a:lvl4pPr>
-              <a:defRPr sz="1800"/>
-            </a:lvl4pPr>
-            <a:lvl5pPr>
-              <a:defRPr sz="1800"/>
-            </a:lvl5pPr>
-            <a:lvl6pPr>
-              <a:defRPr sz="1800"/>
-            </a:lvl6pPr>
-            <a:lvl7pPr>
-              <a:defRPr sz="1800"/>
-            </a:lvl7pPr>
-            <a:lvl8pPr>
-              <a:defRPr sz="1800"/>
-            </a:lvl8pPr>
-            <a:lvl9pPr>
-              <a:defRPr sz="1800"/>
-            </a:lvl9pPr>
-          </a:lstStyle>
+          <a:lstStyle/>
           <a:p>
             <a:pPr lvl="0"/>
             <a:r>
-              <a:rPr lang="en-US" smtClean="0"/>
+              <a:rPr lang="en-US"/>
               <a:t>Click to edit Master text styles</a:t>
             </a:r>
           </a:p>
           <a:p>
             <a:pPr lvl="1"/>
             <a:r>
-              <a:rPr lang="en-US" smtClean="0"/>
+              <a:rPr lang="en-US"/>
               <a:t>Second level</a:t>
             </a:r>
           </a:p>
           <a:p>
             <a:pPr lvl="2"/>
             <a:r>
-              <a:rPr lang="en-US" smtClean="0"/>
+              <a:rPr lang="en-US"/>
               <a:t>Third level</a:t>
             </a:r>
           </a:p>
           <a:p>
             <a:pPr lvl="3"/>
             <a:r>
-              <a:rPr lang="en-US" smtClean="0"/>
+              <a:rPr lang="en-US"/>
               <a:t>Fourth level</a:t>
             </a:r>
           </a:p>
           <a:p>
             <a:pPr lvl="4"/>
             <a:r>
-              <a:rPr lang="en-US" smtClean="0"/>
+              <a:rPr lang="en-US"/>
               <a:t>Fifth level</a:t>
             </a:r>
-            <a:endParaRPr lang="en-US"/>
+            <a:endParaRPr lang="en-US" dirty="0"/>
           </a:p>
         </p:txBody>
       </p:sp>
@@ -1270,97 +1736,70 @@
         </p:nvSpPr>
         <p:spPr>
           <a:xfrm>
-            <a:off x="4648200" y="1600200"/>
-            <a:ext cx="4038600" cy="4525963"/>
+            <a:off x="4629150" y="1825625"/>
+            <a:ext cx="3886200" cy="4351338"/>
           </a:xfrm>
         </p:spPr>
         <p:txBody>
           <a:bodyPr/>
-          <a:lstStyle>
-            <a:lvl1pPr>
-              <a:defRPr sz="2800"/>
-            </a:lvl1pPr>
-            <a:lvl2pPr>
-              <a:defRPr sz="2400"/>
-            </a:lvl2pPr>
-            <a:lvl3pPr>
-              <a:defRPr sz="2000"/>
-            </a:lvl3pPr>
-            <a:lvl4pPr>
-              <a:defRPr sz="1800"/>
-            </a:lvl4pPr>
-            <a:lvl5pPr>
-              <a:defRPr sz="1800"/>
-            </a:lvl5pPr>
-            <a:lvl6pPr>
-              <a:defRPr sz="1800"/>
-            </a:lvl6pPr>
-            <a:lvl7pPr>
-              <a:defRPr sz="1800"/>
-            </a:lvl7pPr>
-            <a:lvl8pPr>
-              <a:defRPr sz="1800"/>
-            </a:lvl8pPr>
-            <a:lvl9pPr>
-              <a:defRPr sz="1800"/>
-            </a:lvl9pPr>
-          </a:lstStyle>
+          <a:lstStyle/>
           <a:p>
             <a:pPr lvl="0"/>
             <a:r>
+              <a:rPr lang="en-US"/>
+              <a:t>Click to edit Master text styles</a:t>
+            </a:r>
+          </a:p>
+          <a:p>
+            <a:pPr lvl="1"/>
+            <a:r>
+              <a:rPr lang="en-US"/>
+              <a:t>Second level</a:t>
+            </a:r>
+          </a:p>
+          <a:p>
+            <a:pPr lvl="2"/>
+            <a:r>
+              <a:rPr lang="en-US"/>
+              <a:t>Third level</a:t>
+            </a:r>
+          </a:p>
+          <a:p>
+            <a:pPr lvl="3"/>
+            <a:r>
+              <a:rPr lang="en-US"/>
+              <a:t>Fourth level</a:t>
+            </a:r>
+          </a:p>
+          <a:p>
+            <a:pPr lvl="4"/>
+            <a:r>
+              <a:rPr lang="en-US"/>
+              <a:t>Fifth level</a:t>
+            </a:r>
+            <a:endParaRPr lang="en-US" dirty="0"/>
+          </a:p>
+        </p:txBody>
+      </p:sp>
+      <p:sp>
+        <p:nvSpPr>
+          <p:cNvPr id="5" name="Date Placeholder 4"/>
+          <p:cNvSpPr>
+            <a:spLocks noGrp="1"/>
+          </p:cNvSpPr>
+          <p:nvPr>
+            <p:ph type="dt" sz="half" idx="10"/>
+          </p:nvPr>
+        </p:nvSpPr>
+        <p:spPr/>
+        <p:txBody>
+          <a:bodyPr/>
+          <a:lstStyle/>
+          <a:p>
+            <a:fld id="{8409F13F-E3C0-47E7-81E7-2D67CDFD97CE}" type="datetime1">
               <a:rPr lang="en-US" smtClean="0"/>
-              <a:t>Click to edit Master text styles</a:t>
-            </a:r>
-          </a:p>
-          <a:p>
-            <a:pPr lvl="1"/>
-            <a:r>
-              <a:rPr lang="en-US" smtClean="0"/>
-              <a:t>Second level</a:t>
-            </a:r>
-          </a:p>
-          <a:p>
-            <a:pPr lvl="2"/>
-            <a:r>
-              <a:rPr lang="en-US" smtClean="0"/>
-              <a:t>Third level</a:t>
-            </a:r>
-          </a:p>
-          <a:p>
-            <a:pPr lvl="3"/>
-            <a:r>
-              <a:rPr lang="en-US" smtClean="0"/>
-              <a:t>Fourth level</a:t>
-            </a:r>
-          </a:p>
-          <a:p>
-            <a:pPr lvl="4"/>
-            <a:r>
-              <a:rPr lang="en-US" smtClean="0"/>
-              <a:t>Fifth level</a:t>
-            </a:r>
-            <a:endParaRPr lang="en-US"/>
-          </a:p>
-        </p:txBody>
-      </p:sp>
-      <p:sp>
-        <p:nvSpPr>
-          <p:cNvPr id="5" name="Date Placeholder 4"/>
-          <p:cNvSpPr>
-            <a:spLocks noGrp="1"/>
-          </p:cNvSpPr>
-          <p:nvPr>
-            <p:ph type="dt" sz="half" idx="10"/>
-          </p:nvPr>
-        </p:nvSpPr>
-        <p:spPr/>
-        <p:txBody>
-          <a:bodyPr/>
-          <a:lstStyle/>
-          <a:p>
-            <a:fld id="{5BCAD085-E8A6-8845-BD4E-CB4CCA059FC4}" type="datetimeFigureOut">
-              <a:rPr lang="en-US" smtClean="0"/>
-              <a:t>1/27/13</a:t>
+              <a:pPr/>
+              <a:t>8/8/2026</a:t>
             </a:fld>
             <a:endParaRPr lang="en-US"/>
           </a:p>
@@ -1400,8 +1839,9 @@
           <a:bodyPr/>
           <a:lstStyle/>
           <a:p>
-            <a:fld id="{C1FF6DA9-008F-8B48-92A6-B652298478BF}" type="slidenum">
+            <a:fld id="{D90542D4-23E8-43E0-BA8E-C972DA1A005D}" type="slidenum">
               <a:rPr lang="en-US" smtClean="0"/>
+              <a:pPr/>
               <a:t>‹#›</a:t>
             </a:fld>
             <a:endParaRPr lang="en-US"/>
@@ -1411,7 +1851,7 @@
     </p:spTree>
     <p:extLst>
       <p:ext uri="{BB962C8B-B14F-4D97-AF65-F5344CB8AC3E}">
-        <p14:creationId xmlns:p14="http://schemas.microsoft.com/office/powerpoint/2010/main" val="2782244947"/>
+        <p14:creationId xmlns:p14="http://schemas.microsoft.com/office/powerpoint/2010/main" val="2258336560"/>
       </p:ext>
     </p:extLst>
   </p:cSld>
@@ -1448,37 +1888,38 @@
             <p:ph type="title"/>
           </p:nvPr>
         </p:nvSpPr>
-        <p:spPr/>
-        <p:txBody>
-          <a:bodyPr/>
-          <a:lstStyle>
-            <a:lvl1pPr>
-              <a:defRPr/>
-            </a:lvl1pPr>
-          </a:lstStyle>
-          <a:p>
-            <a:r>
-              <a:rPr lang="en-US" smtClean="0"/>
-              <a:t>Click to edit Master title style</a:t>
-            </a:r>
-            <a:endParaRPr lang="en-US"/>
-          </a:p>
-        </p:txBody>
-      </p:sp>
-      <p:sp>
-        <p:nvSpPr>
-          <p:cNvPr id="3" name="Text Placeholder 2"/>
-          <p:cNvSpPr>
-            <a:spLocks noGrp="1"/>
-          </p:cNvSpPr>
-          <p:nvPr>
-            <p:ph type="body" idx="1"/>
-          </p:nvPr>
-        </p:nvSpPr>
         <p:spPr>
           <a:xfrm>
-            <a:off x="457200" y="1535113"/>
-            <a:ext cx="4040188" cy="639762"/>
+            <a:off x="629841" y="365126"/>
+            <a:ext cx="7886700" cy="1325563"/>
+          </a:xfrm>
+        </p:spPr>
+        <p:txBody>
+          <a:bodyPr/>
+          <a:lstStyle/>
+          <a:p>
+            <a:r>
+              <a:rPr lang="en-US"/>
+              <a:t>Click to edit Master title style</a:t>
+            </a:r>
+            <a:endParaRPr lang="en-US" dirty="0"/>
+          </a:p>
+        </p:txBody>
+      </p:sp>
+      <p:sp>
+        <p:nvSpPr>
+          <p:cNvPr id="3" name="Text Placeholder 2"/>
+          <p:cNvSpPr>
+            <a:spLocks noGrp="1"/>
+          </p:cNvSpPr>
+          <p:nvPr>
+            <p:ph type="body" idx="1"/>
+          </p:nvPr>
+        </p:nvSpPr>
+        <p:spPr>
+          <a:xfrm>
+            <a:off x="629842" y="1681163"/>
+            <a:ext cx="3868340" cy="823912"/>
           </a:xfrm>
         </p:spPr>
         <p:txBody>
@@ -1524,7 +1965,7 @@
           <a:p>
             <a:pPr lvl="0"/>
             <a:r>
-              <a:rPr lang="en-US" smtClean="0"/>
+              <a:rPr lang="en-US"/>
               <a:t>Click to edit Master text styles</a:t>
             </a:r>
           </a:p>
@@ -1542,76 +1983,48 @@
         </p:nvSpPr>
         <p:spPr>
           <a:xfrm>
-            <a:off x="457200" y="2174875"/>
-            <a:ext cx="4040188" cy="3951288"/>
+            <a:off x="629842" y="2505075"/>
+            <a:ext cx="3868340" cy="3684588"/>
           </a:xfrm>
         </p:spPr>
         <p:txBody>
           <a:bodyPr/>
-          <a:lstStyle>
-            <a:lvl1pPr>
-              <a:defRPr sz="2400"/>
-            </a:lvl1pPr>
-            <a:lvl2pPr>
-              <a:defRPr sz="2000"/>
-            </a:lvl2pPr>
-            <a:lvl3pPr>
-              <a:defRPr sz="1800"/>
-            </a:lvl3pPr>
-            <a:lvl4pPr>
-              <a:defRPr sz="1600"/>
-            </a:lvl4pPr>
-            <a:lvl5pPr>
-              <a:defRPr sz="1600"/>
-            </a:lvl5pPr>
-            <a:lvl6pPr>
-              <a:defRPr sz="1600"/>
-            </a:lvl6pPr>
-            <a:lvl7pPr>
-              <a:defRPr sz="1600"/>
-            </a:lvl7pPr>
-            <a:lvl8pPr>
-              <a:defRPr sz="1600"/>
-            </a:lvl8pPr>
-            <a:lvl9pPr>
-              <a:defRPr sz="1600"/>
-            </a:lvl9pPr>
-          </a:lstStyle>
+          <a:lstStyle/>
           <a:p>
             <a:pPr lvl="0"/>
             <a:r>
-              <a:rPr lang="en-US" smtClean="0"/>
+              <a:rPr lang="en-US"/>
               <a:t>Click to edit Master text styles</a:t>
             </a:r>
           </a:p>
           <a:p>
             <a:pPr lvl="1"/>
             <a:r>
-              <a:rPr lang="en-US" smtClean="0"/>
+              <a:rPr lang="en-US"/>
               <a:t>Second level</a:t>
             </a:r>
           </a:p>
           <a:p>
             <a:pPr lvl="2"/>
             <a:r>
-              <a:rPr lang="en-US" smtClean="0"/>
+              <a:rPr lang="en-US"/>
               <a:t>Third level</a:t>
             </a:r>
           </a:p>
           <a:p>
             <a:pPr lvl="3"/>
             <a:r>
-              <a:rPr lang="en-US" smtClean="0"/>
+              <a:rPr lang="en-US"/>
               <a:t>Fourth level</a:t>
             </a:r>
           </a:p>
           <a:p>
             <a:pPr lvl="4"/>
             <a:r>
-              <a:rPr lang="en-US" smtClean="0"/>
+              <a:rPr lang="en-US"/>
               <a:t>Fifth level</a:t>
             </a:r>
-            <a:endParaRPr lang="en-US"/>
+            <a:endParaRPr lang="en-US" dirty="0"/>
           </a:p>
         </p:txBody>
       </p:sp>
@@ -1627,8 +2040,8 @@
         </p:nvSpPr>
         <p:spPr>
           <a:xfrm>
-            <a:off x="4645025" y="1535113"/>
-            <a:ext cx="4041775" cy="639762"/>
+            <a:off x="4629150" y="1681163"/>
+            <a:ext cx="3887391" cy="823912"/>
           </a:xfrm>
         </p:spPr>
         <p:txBody>
@@ -1674,7 +2087,7 @@
           <a:p>
             <a:pPr lvl="0"/>
             <a:r>
-              <a:rPr lang="en-US" smtClean="0"/>
+              <a:rPr lang="en-US"/>
               <a:t>Click to edit Master text styles</a:t>
             </a:r>
           </a:p>
@@ -1692,97 +2105,70 @@
         </p:nvSpPr>
         <p:spPr>
           <a:xfrm>
-            <a:off x="4645025" y="2174875"/>
-            <a:ext cx="4041775" cy="3951288"/>
+            <a:off x="4629150" y="2505075"/>
+            <a:ext cx="3887391" cy="3684588"/>
           </a:xfrm>
         </p:spPr>
         <p:txBody>
           <a:bodyPr/>
-          <a:lstStyle>
-            <a:lvl1pPr>
-              <a:defRPr sz="2400"/>
-            </a:lvl1pPr>
-            <a:lvl2pPr>
-              <a:defRPr sz="2000"/>
-            </a:lvl2pPr>
-            <a:lvl3pPr>
-              <a:defRPr sz="1800"/>
-            </a:lvl3pPr>
-            <a:lvl4pPr>
-              <a:defRPr sz="1600"/>
-            </a:lvl4pPr>
-            <a:lvl5pPr>
-              <a:defRPr sz="1600"/>
-            </a:lvl5pPr>
-            <a:lvl6pPr>
-              <a:defRPr sz="1600"/>
-            </a:lvl6pPr>
-            <a:lvl7pPr>
-              <a:defRPr sz="1600"/>
-            </a:lvl7pPr>
-            <a:lvl8pPr>
-              <a:defRPr sz="1600"/>
-            </a:lvl8pPr>
-            <a:lvl9pPr>
-              <a:defRPr sz="1600"/>
-            </a:lvl9pPr>
-          </a:lstStyle>
+          <a:lstStyle/>
           <a:p>
             <a:pPr lvl="0"/>
             <a:r>
+              <a:rPr lang="en-US"/>
+              <a:t>Click to edit Master text styles</a:t>
+            </a:r>
+          </a:p>
+          <a:p>
+            <a:pPr lvl="1"/>
+            <a:r>
+              <a:rPr lang="en-US"/>
+              <a:t>Second level</a:t>
+            </a:r>
+          </a:p>
+          <a:p>
+            <a:pPr lvl="2"/>
+            <a:r>
+              <a:rPr lang="en-US"/>
+              <a:t>Third level</a:t>
+            </a:r>
+          </a:p>
+          <a:p>
+            <a:pPr lvl="3"/>
+            <a:r>
+              <a:rPr lang="en-US"/>
+              <a:t>Fourth level</a:t>
+            </a:r>
+          </a:p>
+          <a:p>
+            <a:pPr lvl="4"/>
+            <a:r>
+              <a:rPr lang="en-US"/>
+              <a:t>Fifth level</a:t>
+            </a:r>
+            <a:endParaRPr lang="en-US" dirty="0"/>
+          </a:p>
+        </p:txBody>
+      </p:sp>
+      <p:sp>
+        <p:nvSpPr>
+          <p:cNvPr id="7" name="Date Placeholder 6"/>
+          <p:cNvSpPr>
+            <a:spLocks noGrp="1"/>
+          </p:cNvSpPr>
+          <p:nvPr>
+            <p:ph type="dt" sz="half" idx="10"/>
+          </p:nvPr>
+        </p:nvSpPr>
+        <p:spPr/>
+        <p:txBody>
+          <a:bodyPr/>
+          <a:lstStyle/>
+          <a:p>
+            <a:fld id="{E2CB4F48-C21C-4E8E-AA43-BB8E3BD2F306}" type="datetime1">
               <a:rPr lang="en-US" smtClean="0"/>
-              <a:t>Click to edit Master text styles</a:t>
-            </a:r>
-          </a:p>
-          <a:p>
-            <a:pPr lvl="1"/>
-            <a:r>
-              <a:rPr lang="en-US" smtClean="0"/>
-              <a:t>Second level</a:t>
-            </a:r>
-          </a:p>
-          <a:p>
-            <a:pPr lvl="2"/>
-            <a:r>
-              <a:rPr lang="en-US" smtClean="0"/>
-              <a:t>Third level</a:t>
-            </a:r>
-          </a:p>
-          <a:p>
-            <a:pPr lvl="3"/>
-            <a:r>
-              <a:rPr lang="en-US" smtClean="0"/>
-              <a:t>Fourth level</a:t>
-            </a:r>
-          </a:p>
-          <a:p>
-            <a:pPr lvl="4"/>
-            <a:r>
-              <a:rPr lang="en-US" smtClean="0"/>
-              <a:t>Fifth level</a:t>
-            </a:r>
-            <a:endParaRPr lang="en-US"/>
-          </a:p>
-        </p:txBody>
-      </p:sp>
-      <p:sp>
-        <p:nvSpPr>
-          <p:cNvPr id="7" name="Date Placeholder 6"/>
-          <p:cNvSpPr>
-            <a:spLocks noGrp="1"/>
-          </p:cNvSpPr>
-          <p:nvPr>
-            <p:ph type="dt" sz="half" idx="10"/>
-          </p:nvPr>
-        </p:nvSpPr>
-        <p:spPr/>
-        <p:txBody>
-          <a:bodyPr/>
-          <a:lstStyle/>
-          <a:p>
-            <a:fld id="{5BCAD085-E8A6-8845-BD4E-CB4CCA059FC4}" type="datetimeFigureOut">
-              <a:rPr lang="en-US" smtClean="0"/>
-              <a:t>1/27/13</a:t>
+              <a:pPr/>
+              <a:t>8/8/2026</a:t>
             </a:fld>
             <a:endParaRPr lang="en-US"/>
           </a:p>
@@ -1822,8 +2208,9 @@
           <a:bodyPr/>
           <a:lstStyle/>
           <a:p>
-            <a:fld id="{C1FF6DA9-008F-8B48-92A6-B652298478BF}" type="slidenum">
+            <a:fld id="{D90542D4-23E8-43E0-BA8E-C972DA1A005D}" type="slidenum">
               <a:rPr lang="en-US" smtClean="0"/>
+              <a:pPr/>
               <a:t>‹#›</a:t>
             </a:fld>
             <a:endParaRPr lang="en-US"/>
@@ -1833,7 +2220,7 @@
     </p:spTree>
     <p:extLst>
       <p:ext uri="{BB962C8B-B14F-4D97-AF65-F5344CB8AC3E}">
-        <p14:creationId xmlns:p14="http://schemas.microsoft.com/office/powerpoint/2010/main" val="990158736"/>
+        <p14:creationId xmlns:p14="http://schemas.microsoft.com/office/powerpoint/2010/main" val="533100152"/>
       </p:ext>
     </p:extLst>
   </p:cSld>
@@ -1876,31 +2263,32 @@
           <a:lstStyle/>
           <a:p>
             <a:r>
+              <a:rPr lang="en-US"/>
+              <a:t>Click to edit Master title style</a:t>
+            </a:r>
+            <a:endParaRPr lang="en-US" dirty="0"/>
+          </a:p>
+        </p:txBody>
+      </p:sp>
+      <p:sp>
+        <p:nvSpPr>
+          <p:cNvPr id="3" name="Date Placeholder 2"/>
+          <p:cNvSpPr>
+            <a:spLocks noGrp="1"/>
+          </p:cNvSpPr>
+          <p:nvPr>
+            <p:ph type="dt" sz="half" idx="10"/>
+          </p:nvPr>
+        </p:nvSpPr>
+        <p:spPr/>
+        <p:txBody>
+          <a:bodyPr/>
+          <a:lstStyle/>
+          <a:p>
+            <a:fld id="{9990D7BC-B940-4993-A11F-8FBB77BA204E}" type="datetime1">
               <a:rPr lang="en-US" smtClean="0"/>
-              <a:t>Click to edit Master title style</a:t>
-            </a:r>
-            <a:endParaRPr lang="en-US"/>
-          </a:p>
-        </p:txBody>
-      </p:sp>
-      <p:sp>
-        <p:nvSpPr>
-          <p:cNvPr id="3" name="Date Placeholder 2"/>
-          <p:cNvSpPr>
-            <a:spLocks noGrp="1"/>
-          </p:cNvSpPr>
-          <p:nvPr>
-            <p:ph type="dt" sz="half" idx="10"/>
-          </p:nvPr>
-        </p:nvSpPr>
-        <p:spPr/>
-        <p:txBody>
-          <a:bodyPr/>
-          <a:lstStyle/>
-          <a:p>
-            <a:fld id="{5BCAD085-E8A6-8845-BD4E-CB4CCA059FC4}" type="datetimeFigureOut">
-              <a:rPr lang="en-US" smtClean="0"/>
-              <a:t>1/27/13</a:t>
+              <a:pPr/>
+              <a:t>8/8/2026</a:t>
             </a:fld>
             <a:endParaRPr lang="en-US"/>
           </a:p>
@@ -1940,8 +2328,9 @@
           <a:bodyPr/>
           <a:lstStyle/>
           <a:p>
-            <a:fld id="{C1FF6DA9-008F-8B48-92A6-B652298478BF}" type="slidenum">
+            <a:fld id="{D90542D4-23E8-43E0-BA8E-C972DA1A005D}" type="slidenum">
               <a:rPr lang="en-US" smtClean="0"/>
+              <a:pPr/>
               <a:t>‹#›</a:t>
             </a:fld>
             <a:endParaRPr lang="en-US"/>
@@ -1951,7 +2340,7 @@
     </p:spTree>
     <p:extLst>
       <p:ext uri="{BB962C8B-B14F-4D97-AF65-F5344CB8AC3E}">
-        <p14:creationId xmlns:p14="http://schemas.microsoft.com/office/powerpoint/2010/main" val="727027711"/>
+        <p14:creationId xmlns:p14="http://schemas.microsoft.com/office/powerpoint/2010/main" val="3981874873"/>
       </p:ext>
     </p:extLst>
   </p:cSld>
@@ -1993,9 +2382,10 @@
           <a:bodyPr/>
           <a:lstStyle/>
           <a:p>
-            <a:fld id="{5BCAD085-E8A6-8845-BD4E-CB4CCA059FC4}" type="datetimeFigureOut">
+            <a:fld id="{F6094854-92A4-4BB6-9F1F-69BBC71788FF}" type="datetime1">
               <a:rPr lang="en-US" smtClean="0"/>
-              <a:t>1/27/13</a:t>
+              <a:pPr/>
+              <a:t>8/8/2026</a:t>
             </a:fld>
             <a:endParaRPr lang="en-US"/>
           </a:p>
@@ -2035,8 +2425,9 @@
           <a:bodyPr/>
           <a:lstStyle/>
           <a:p>
-            <a:fld id="{C1FF6DA9-008F-8B48-92A6-B652298478BF}" type="slidenum">
+            <a:fld id="{D90542D4-23E8-43E0-BA8E-C972DA1A005D}" type="slidenum">
               <a:rPr lang="en-US" smtClean="0"/>
+              <a:pPr/>
               <a:t>‹#›</a:t>
             </a:fld>
             <a:endParaRPr lang="en-US"/>
@@ -2046,7 +2437,7 @@
     </p:spTree>
     <p:extLst>
       <p:ext uri="{BB962C8B-B14F-4D97-AF65-F5344CB8AC3E}">
-        <p14:creationId xmlns:p14="http://schemas.microsoft.com/office/powerpoint/2010/main" val="1212999818"/>
+        <p14:creationId xmlns:p14="http://schemas.microsoft.com/office/powerpoint/2010/main" val="1844546698"/>
       </p:ext>
     </p:extLst>
   </p:cSld>
@@ -2085,23 +2476,23 @@
         </p:nvSpPr>
         <p:spPr>
           <a:xfrm>
-            <a:off x="457200" y="273050"/>
-            <a:ext cx="3008313" cy="1162050"/>
+            <a:off x="629841" y="457200"/>
+            <a:ext cx="2949178" cy="1600200"/>
           </a:xfrm>
         </p:spPr>
         <p:txBody>
           <a:bodyPr anchor="b"/>
           <a:lstStyle>
-            <a:lvl1pPr algn="l">
-              <a:defRPr sz="2000" b="1"/>
+            <a:lvl1pPr>
+              <a:defRPr sz="3200"/>
             </a:lvl1pPr>
           </a:lstStyle>
           <a:p>
             <a:r>
-              <a:rPr lang="en-US" smtClean="0"/>
+              <a:rPr lang="en-US"/>
               <a:t>Click to edit Master title style</a:t>
             </a:r>
-            <a:endParaRPr lang="en-US"/>
+            <a:endParaRPr lang="en-US" dirty="0"/>
           </a:p>
         </p:txBody>
       </p:sp>
@@ -2117,8 +2508,8 @@
         </p:nvSpPr>
         <p:spPr>
           <a:xfrm>
-            <a:off x="3575050" y="273050"/>
-            <a:ext cx="5111750" cy="5853113"/>
+            <a:off x="3887391" y="987426"/>
+            <a:ext cx="4629150" cy="4873625"/>
           </a:xfrm>
         </p:spPr>
         <p:txBody>
@@ -2155,38 +2546,38 @@
           <a:p>
             <a:pPr lvl="0"/>
             <a:r>
-              <a:rPr lang="en-US" smtClean="0"/>
+              <a:rPr lang="en-US"/>
               <a:t>Click to edit Master text styles</a:t>
             </a:r>
           </a:p>
           <a:p>
             <a:pPr lvl="1"/>
             <a:r>
-              <a:rPr lang="en-US" smtClean="0"/>
+              <a:rPr lang="en-US"/>
               <a:t>Second level</a:t>
             </a:r>
           </a:p>
           <a:p>
             <a:pPr lvl="2"/>
             <a:r>
-              <a:rPr lang="en-US" smtClean="0"/>
+              <a:rPr lang="en-US"/>
               <a:t>Third level</a:t>
             </a:r>
           </a:p>
           <a:p>
             <a:pPr lvl="3"/>
             <a:r>
-              <a:rPr lang="en-US" smtClean="0"/>
+              <a:rPr lang="en-US"/>
               <a:t>Fourth level</a:t>
             </a:r>
           </a:p>
           <a:p>
             <a:pPr lvl="4"/>
             <a:r>
-              <a:rPr lang="en-US" smtClean="0"/>
+              <a:rPr lang="en-US"/>
               <a:t>Fifth level</a:t>
             </a:r>
-            <a:endParaRPr lang="en-US"/>
+            <a:endParaRPr lang="en-US" dirty="0"/>
           </a:p>
         </p:txBody>
       </p:sp>
@@ -2202,8 +2593,8 @@
         </p:nvSpPr>
         <p:spPr>
           <a:xfrm>
-            <a:off x="457200" y="1435100"/>
-            <a:ext cx="3008313" cy="4691063"/>
+            <a:off x="629841" y="2057400"/>
+            <a:ext cx="2949178" cy="3811588"/>
           </a:xfrm>
         </p:spPr>
         <p:txBody>
@@ -2211,68 +2602,69 @@
           <a:lstStyle>
             <a:lvl1pPr marL="0" indent="0">
               <a:buNone/>
-              <a:defRPr sz="1400"/>
+              <a:defRPr sz="1600"/>
             </a:lvl1pPr>
             <a:lvl2pPr marL="457200" indent="0">
               <a:buNone/>
-              <a:defRPr sz="1200"/>
+              <a:defRPr sz="1400"/>
             </a:lvl2pPr>
             <a:lvl3pPr marL="914400" indent="0">
               <a:buNone/>
-              <a:defRPr sz="1000"/>
+              <a:defRPr sz="1200"/>
             </a:lvl3pPr>
             <a:lvl4pPr marL="1371600" indent="0">
               <a:buNone/>
-              <a:defRPr sz="900"/>
+              <a:defRPr sz="1000"/>
             </a:lvl4pPr>
             <a:lvl5pPr marL="1828800" indent="0">
               <a:buNone/>
-              <a:defRPr sz="900"/>
+              <a:defRPr sz="1000"/>
             </a:lvl5pPr>
             <a:lvl6pPr marL="2286000" indent="0">
               <a:buNone/>
-              <a:defRPr sz="900"/>
+              <a:defRPr sz="1000"/>
             </a:lvl6pPr>
             <a:lvl7pPr marL="2743200" indent="0">
               <a:buNone/>
-              <a:defRPr sz="900"/>
+              <a:defRPr sz="1000"/>
             </a:lvl7pPr>
             <a:lvl8pPr marL="3200400" indent="0">
               <a:buNone/>
-              <a:defRPr sz="900"/>
+              <a:defRPr sz="1000"/>
             </a:lvl8pPr>
             <a:lvl9pPr marL="3657600" indent="0">
               <a:buNone/>
-              <a:defRPr sz="900"/>
+              <a:defRPr sz="1000"/>
             </a:lvl9pPr>
           </a:lstStyle>
           <a:p>
             <a:pPr lvl="0"/>
             <a:r>
+              <a:rPr lang="en-US"/>
+              <a:t>Click to edit Master text styles</a:t>
+            </a:r>
+          </a:p>
+        </p:txBody>
+      </p:sp>
+      <p:sp>
+        <p:nvSpPr>
+          <p:cNvPr id="5" name="Date Placeholder 4"/>
+          <p:cNvSpPr>
+            <a:spLocks noGrp="1"/>
+          </p:cNvSpPr>
+          <p:nvPr>
+            <p:ph type="dt" sz="half" idx="10"/>
+          </p:nvPr>
+        </p:nvSpPr>
+        <p:spPr/>
+        <p:txBody>
+          <a:bodyPr/>
+          <a:lstStyle/>
+          <a:p>
+            <a:fld id="{8CC6CBDC-D391-4FA9-8D6F-9BC119CA0B97}" type="datetime1">
               <a:rPr lang="en-US" smtClean="0"/>
-              <a:t>Click to edit Master text styles</a:t>
-            </a:r>
-          </a:p>
-        </p:txBody>
-      </p:sp>
-      <p:sp>
-        <p:nvSpPr>
-          <p:cNvPr id="5" name="Date Placeholder 4"/>
-          <p:cNvSpPr>
-            <a:spLocks noGrp="1"/>
-          </p:cNvSpPr>
-          <p:nvPr>
-            <p:ph type="dt" sz="half" idx="10"/>
-          </p:nvPr>
-        </p:nvSpPr>
-        <p:spPr/>
-        <p:txBody>
-          <a:bodyPr/>
-          <a:lstStyle/>
-          <a:p>
-            <a:fld id="{5BCAD085-E8A6-8845-BD4E-CB4CCA059FC4}" type="datetimeFigureOut">
-              <a:rPr lang="en-US" smtClean="0"/>
-              <a:t>1/27/13</a:t>
+              <a:pPr/>
+              <a:t>8/8/2026</a:t>
             </a:fld>
             <a:endParaRPr lang="en-US"/>
           </a:p>
@@ -2312,8 +2704,9 @@
           <a:bodyPr/>
           <a:lstStyle/>
           <a:p>
-            <a:fld id="{C1FF6DA9-008F-8B48-92A6-B652298478BF}" type="slidenum">
+            <a:fld id="{D90542D4-23E8-43E0-BA8E-C972DA1A005D}" type="slidenum">
               <a:rPr lang="en-US" smtClean="0"/>
+              <a:pPr/>
               <a:t>‹#›</a:t>
             </a:fld>
             <a:endParaRPr lang="en-US"/>
@@ -2323,7 +2716,7 @@
     </p:spTree>
     <p:extLst>
       <p:ext uri="{BB962C8B-B14F-4D97-AF65-F5344CB8AC3E}">
-        <p14:creationId xmlns:p14="http://schemas.microsoft.com/office/powerpoint/2010/main" val="1840726560"/>
+        <p14:creationId xmlns:p14="http://schemas.microsoft.com/office/powerpoint/2010/main" val="493602812"/>
       </p:ext>
     </p:extLst>
   </p:cSld>
@@ -2362,23 +2755,23 @@
         </p:nvSpPr>
         <p:spPr>
           <a:xfrm>
-            <a:off x="1792288" y="4800600"/>
-            <a:ext cx="5486400" cy="566738"/>
+            <a:off x="629841" y="457200"/>
+            <a:ext cx="2949178" cy="1600200"/>
           </a:xfrm>
         </p:spPr>
         <p:txBody>
           <a:bodyPr anchor="b"/>
           <a:lstStyle>
-            <a:lvl1pPr algn="l">
-              <a:defRPr sz="2000" b="1"/>
+            <a:lvl1pPr>
+              <a:defRPr sz="3200"/>
             </a:lvl1pPr>
           </a:lstStyle>
           <a:p>
             <a:r>
-              <a:rPr lang="en-US" smtClean="0"/>
+              <a:rPr lang="en-US"/>
               <a:t>Click to edit Master title style</a:t>
             </a:r>
-            <a:endParaRPr lang="en-US"/>
+            <a:endParaRPr lang="en-US" dirty="0"/>
           </a:p>
         </p:txBody>
       </p:sp>
@@ -2386,7 +2779,7 @@
         <p:nvSpPr>
           <p:cNvPr id="3" name="Picture Placeholder 2"/>
           <p:cNvSpPr>
-            <a:spLocks noGrp="1"/>
+            <a:spLocks noGrp="1" noChangeAspect="1"/>
           </p:cNvSpPr>
           <p:nvPr>
             <p:ph type="pic" idx="1"/>
@@ -2394,8 +2787,73 @@
         </p:nvSpPr>
         <p:spPr>
           <a:xfrm>
-            <a:off x="1792288" y="612775"/>
-            <a:ext cx="5486400" cy="4114800"/>
+            <a:off x="3887391" y="987426"/>
+            <a:ext cx="4629150" cy="4873625"/>
+          </a:xfrm>
+        </p:spPr>
+        <p:txBody>
+          <a:bodyPr anchor="t"/>
+          <a:lstStyle>
+            <a:lvl1pPr marL="0" indent="0">
+              <a:buNone/>
+              <a:defRPr sz="3200"/>
+            </a:lvl1pPr>
+            <a:lvl2pPr marL="457200" indent="0">
+              <a:buNone/>
+              <a:defRPr sz="2800"/>
+            </a:lvl2pPr>
+            <a:lvl3pPr marL="914400" indent="0">
+              <a:buNone/>
+              <a:defRPr sz="2400"/>
+            </a:lvl3pPr>
+            <a:lvl4pPr marL="1371600" indent="0">
+              <a:buNone/>
+              <a:defRPr sz="2000"/>
+            </a:lvl4pPr>
+            <a:lvl5pPr marL="1828800" indent="0">
+              <a:buNone/>
+              <a:defRPr sz="2000"/>
+            </a:lvl5pPr>
+            <a:lvl6pPr marL="2286000" indent="0">
+              <a:buNone/>
+              <a:defRPr sz="2000"/>
+            </a:lvl6pPr>
+            <a:lvl7pPr marL="2743200" indent="0">
+              <a:buNone/>
+              <a:defRPr sz="2000"/>
+            </a:lvl7pPr>
+            <a:lvl8pPr marL="3200400" indent="0">
+              <a:buNone/>
+              <a:defRPr sz="2000"/>
+            </a:lvl8pPr>
+            <a:lvl9pPr marL="3657600" indent="0">
+              <a:buNone/>
+              <a:defRPr sz="2000"/>
+            </a:lvl9pPr>
+          </a:lstStyle>
+          <a:p>
+            <a:r>
+              <a:rPr lang="en-US"/>
+              <a:t>Click icon to add picture</a:t>
+            </a:r>
+            <a:endParaRPr lang="en-US" dirty="0"/>
+          </a:p>
+        </p:txBody>
+      </p:sp>
+      <p:sp>
+        <p:nvSpPr>
+          <p:cNvPr id="4" name="Text Placeholder 3"/>
+          <p:cNvSpPr>
+            <a:spLocks noGrp="1"/>
+          </p:cNvSpPr>
+          <p:nvPr>
+            <p:ph type="body" sz="half" idx="2"/>
+          </p:nvPr>
+        </p:nvSpPr>
+        <p:spPr>
+          <a:xfrm>
+            <a:off x="629841" y="2057400"/>
+            <a:ext cx="2949178" cy="3811588"/>
           </a:xfrm>
         </p:spPr>
         <p:txBody>
@@ -2403,129 +2861,69 @@
           <a:lstStyle>
             <a:lvl1pPr marL="0" indent="0">
               <a:buNone/>
-              <a:defRPr sz="3200"/>
+              <a:defRPr sz="1600"/>
             </a:lvl1pPr>
             <a:lvl2pPr marL="457200" indent="0">
               <a:buNone/>
-              <a:defRPr sz="2800"/>
+              <a:defRPr sz="1400"/>
             </a:lvl2pPr>
             <a:lvl3pPr marL="914400" indent="0">
               <a:buNone/>
-              <a:defRPr sz="2400"/>
+              <a:defRPr sz="1200"/>
             </a:lvl3pPr>
             <a:lvl4pPr marL="1371600" indent="0">
               <a:buNone/>
-              <a:defRPr sz="2000"/>
+              <a:defRPr sz="1000"/>
             </a:lvl4pPr>
             <a:lvl5pPr marL="1828800" indent="0">
               <a:buNone/>
-              <a:defRPr sz="2000"/>
+              <a:defRPr sz="1000"/>
             </a:lvl5pPr>
             <a:lvl6pPr marL="2286000" indent="0">
               <a:buNone/>
-              <a:defRPr sz="2000"/>
+              <a:defRPr sz="1000"/>
             </a:lvl6pPr>
             <a:lvl7pPr marL="2743200" indent="0">
               <a:buNone/>
-              <a:defRPr sz="2000"/>
+              <a:defRPr sz="1000"/>
             </a:lvl7pPr>
             <a:lvl8pPr marL="3200400" indent="0">
               <a:buNone/>
-              <a:defRPr sz="2000"/>
+              <a:defRPr sz="1000"/>
             </a:lvl8pPr>
             <a:lvl9pPr marL="3657600" indent="0">
               <a:buNone/>
-              <a:defRPr sz="2000"/>
+              <a:defRPr sz="1000"/>
             </a:lvl9pPr>
           </a:lstStyle>
           <a:p>
-            <a:endParaRPr lang="en-US"/>
-          </a:p>
-        </p:txBody>
-      </p:sp>
-      <p:sp>
-        <p:nvSpPr>
-          <p:cNvPr id="4" name="Text Placeholder 3"/>
-          <p:cNvSpPr>
-            <a:spLocks noGrp="1"/>
-          </p:cNvSpPr>
-          <p:nvPr>
-            <p:ph type="body" sz="half" idx="2"/>
-          </p:nvPr>
-        </p:nvSpPr>
-        <p:spPr>
-          <a:xfrm>
-            <a:off x="1792288" y="5367338"/>
-            <a:ext cx="5486400" cy="804862"/>
-          </a:xfrm>
-        </p:spPr>
+            <a:pPr lvl="0"/>
+            <a:r>
+              <a:rPr lang="en-US"/>
+              <a:t>Click to edit Master text styles</a:t>
+            </a:r>
+          </a:p>
+        </p:txBody>
+      </p:sp>
+      <p:sp>
+        <p:nvSpPr>
+          <p:cNvPr id="5" name="Date Placeholder 4"/>
+          <p:cNvSpPr>
+            <a:spLocks noGrp="1"/>
+          </p:cNvSpPr>
+          <p:nvPr>
+            <p:ph type="dt" sz="half" idx="10"/>
+          </p:nvPr>
+        </p:nvSpPr>
+        <p:spPr/>
         <p:txBody>
           <a:bodyPr/>
-          <a:lstStyle>
-            <a:lvl1pPr marL="0" indent="0">
-              <a:buNone/>
-              <a:defRPr sz="1400"/>
-            </a:lvl1pPr>
-            <a:lvl2pPr marL="457200" indent="0">
-              <a:buNone/>
-              <a:defRPr sz="1200"/>
-            </a:lvl2pPr>
-            <a:lvl3pPr marL="914400" indent="0">
-              <a:buNone/>
-              <a:defRPr sz="1000"/>
-            </a:lvl3pPr>
-            <a:lvl4pPr marL="1371600" indent="0">
-              <a:buNone/>
-              <a:defRPr sz="900"/>
-            </a:lvl4pPr>
-            <a:lvl5pPr marL="1828800" indent="0">
-              <a:buNone/>
-              <a:defRPr sz="900"/>
-            </a:lvl5pPr>
-            <a:lvl6pPr marL="2286000" indent="0">
-              <a:buNone/>
-              <a:defRPr sz="900"/>
-            </a:lvl6pPr>
-            <a:lvl7pPr marL="2743200" indent="0">
-              <a:buNone/>
-              <a:defRPr sz="900"/>
-            </a:lvl7pPr>
-            <a:lvl8pPr marL="3200400" indent="0">
-              <a:buNone/>
-              <a:defRPr sz="900"/>
-            </a:lvl8pPr>
-            <a:lvl9pPr marL="3657600" indent="0">
-              <a:buNone/>
-              <a:defRPr sz="900"/>
-            </a:lvl9pPr>
-          </a:lstStyle>
-          <a:p>
-            <a:pPr lvl="0"/>
-            <a:r>
+          <a:lstStyle/>
+          <a:p>
+            <a:fld id="{129F212E-DE5B-4D49-B277-6F5AF26D6AF0}" type="datetime1">
               <a:rPr lang="en-US" smtClean="0"/>
-              <a:t>Click to edit Master text styles</a:t>
-            </a:r>
-          </a:p>
-        </p:txBody>
-      </p:sp>
-      <p:sp>
-        <p:nvSpPr>
-          <p:cNvPr id="5" name="Date Placeholder 4"/>
-          <p:cNvSpPr>
-            <a:spLocks noGrp="1"/>
-          </p:cNvSpPr>
-          <p:nvPr>
-            <p:ph type="dt" sz="half" idx="10"/>
-          </p:nvPr>
-        </p:nvSpPr>
-        <p:spPr/>
-        <p:txBody>
-          <a:bodyPr/>
-          <a:lstStyle/>
-          <a:p>
-            <a:fld id="{5BCAD085-E8A6-8845-BD4E-CB4CCA059FC4}" type="datetimeFigureOut">
-              <a:rPr lang="en-US" smtClean="0"/>
-              <a:t>1/27/13</a:t>
+              <a:pPr/>
+              <a:t>8/8/2026</a:t>
             </a:fld>
             <a:endParaRPr lang="en-US"/>
           </a:p>
@@ -2565,8 +2963,9 @@
           <a:bodyPr/>
           <a:lstStyle/>
           <a:p>
-            <a:fld id="{C1FF6DA9-008F-8B48-92A6-B652298478BF}" type="slidenum">
+            <a:fld id="{D90542D4-23E8-43E0-BA8E-C972DA1A005D}" type="slidenum">
               <a:rPr lang="en-US" smtClean="0"/>
+              <a:pPr/>
               <a:t>‹#›</a:t>
             </a:fld>
             <a:endParaRPr lang="en-US"/>
@@ -2576,7 +2975,7 @@
     </p:spTree>
     <p:extLst>
       <p:ext uri="{BB962C8B-B14F-4D97-AF65-F5344CB8AC3E}">
-        <p14:creationId xmlns:p14="http://schemas.microsoft.com/office/powerpoint/2010/main" val="3889236939"/>
+        <p14:creationId xmlns:p14="http://schemas.microsoft.com/office/powerpoint/2010/main" val="1731351748"/>
       </p:ext>
     </p:extLst>
   </p:cSld>
@@ -2620,8 +3019,8 @@
         </p:nvSpPr>
         <p:spPr>
           <a:xfrm>
-            <a:off x="457200" y="274638"/>
-            <a:ext cx="8229600" cy="1143000"/>
+            <a:off x="628650" y="365126"/>
+            <a:ext cx="7886700" cy="1325563"/>
           </a:xfrm>
           <a:prstGeom prst="rect">
             <a:avLst/>
@@ -2634,10 +3033,10 @@
           <a:lstStyle/>
           <a:p>
             <a:r>
-              <a:rPr lang="en-US" smtClean="0"/>
+              <a:rPr lang="en-US"/>
               <a:t>Click to edit Master title style</a:t>
             </a:r>
-            <a:endParaRPr lang="en-US"/>
+            <a:endParaRPr lang="en-US" dirty="0"/>
           </a:p>
         </p:txBody>
       </p:sp>
@@ -2653,8 +3052,8 @@
         </p:nvSpPr>
         <p:spPr>
           <a:xfrm>
-            <a:off x="457200" y="1600200"/>
-            <a:ext cx="8229600" cy="4525963"/>
+            <a:off x="628650" y="1825625"/>
+            <a:ext cx="7886700" cy="4351338"/>
           </a:xfrm>
           <a:prstGeom prst="rect">
             <a:avLst/>
@@ -2668,38 +3067,38 @@
           <a:p>
             <a:pPr lvl="0"/>
             <a:r>
-              <a:rPr lang="en-US" smtClean="0"/>
+              <a:rPr lang="en-US"/>
               <a:t>Click to edit Master text styles</a:t>
             </a:r>
           </a:p>
           <a:p>
             <a:pPr lvl="1"/>
             <a:r>
-              <a:rPr lang="en-US" smtClean="0"/>
+              <a:rPr lang="en-US"/>
               <a:t>Second level</a:t>
             </a:r>
           </a:p>
           <a:p>
             <a:pPr lvl="2"/>
             <a:r>
-              <a:rPr lang="en-US" smtClean="0"/>
+              <a:rPr lang="en-US"/>
               <a:t>Third level</a:t>
             </a:r>
           </a:p>
           <a:p>
             <a:pPr lvl="3"/>
             <a:r>
-              <a:rPr lang="en-US" smtClean="0"/>
+              <a:rPr lang="en-US"/>
               <a:t>Fourth level</a:t>
             </a:r>
           </a:p>
           <a:p>
             <a:pPr lvl="4"/>
             <a:r>
-              <a:rPr lang="en-US" smtClean="0"/>
+              <a:rPr lang="en-US"/>
               <a:t>Fifth level</a:t>
             </a:r>
-            <a:endParaRPr lang="en-US"/>
+            <a:endParaRPr lang="en-US" dirty="0"/>
           </a:p>
         </p:txBody>
       </p:sp>
@@ -2715,8 +3114,8 @@
         </p:nvSpPr>
         <p:spPr>
           <a:xfrm>
-            <a:off x="457200" y="6356350"/>
-            <a:ext cx="2133600" cy="365125"/>
+            <a:off x="628650" y="6356351"/>
+            <a:ext cx="2057400" cy="365125"/>
           </a:xfrm>
           <a:prstGeom prst="rect">
             <a:avLst/>
@@ -2736,9 +3135,10 @@
             </a:lvl1pPr>
           </a:lstStyle>
           <a:p>
-            <a:fld id="{5BCAD085-E8A6-8845-BD4E-CB4CCA059FC4}" type="datetimeFigureOut">
+            <a:fld id="{505C9A0F-356B-4543-BBC4-6729314C25D3}" type="datetime1">
               <a:rPr lang="en-US" smtClean="0"/>
-              <a:t>1/27/13</a:t>
+              <a:pPr/>
+              <a:t>8/8/2026</a:t>
             </a:fld>
             <a:endParaRPr lang="en-US"/>
           </a:p>
@@ -2756,8 +3156,8 @@
         </p:nvSpPr>
         <p:spPr>
           <a:xfrm>
-            <a:off x="3124200" y="6356350"/>
-            <a:ext cx="2895600" cy="365125"/>
+            <a:off x="3028950" y="6356351"/>
+            <a:ext cx="3086100" cy="365125"/>
           </a:xfrm>
           <a:prstGeom prst="rect">
             <a:avLst/>
@@ -2793,8 +3193,8 @@
         </p:nvSpPr>
         <p:spPr>
           <a:xfrm>
-            <a:off x="6553200" y="6356350"/>
-            <a:ext cx="2133600" cy="365125"/>
+            <a:off x="6457950" y="6356351"/>
+            <a:ext cx="2057400" cy="365125"/>
           </a:xfrm>
           <a:prstGeom prst="rect">
             <a:avLst/>
@@ -2814,8 +3214,9 @@
             </a:lvl1pPr>
           </a:lstStyle>
           <a:p>
-            <a:fld id="{C1FF6DA9-008F-8B48-92A6-B652298478BF}" type="slidenum">
+            <a:fld id="{D90542D4-23E8-43E0-BA8E-C972DA1A005D}" type="slidenum">
               <a:rPr lang="en-US" smtClean="0"/>
+              <a:pPr/>
               <a:t>‹#›</a:t>
             </a:fld>
             <a:endParaRPr lang="en-US"/>
@@ -2825,27 +3226,31 @@
     </p:spTree>
     <p:extLst>
       <p:ext uri="{BB962C8B-B14F-4D97-AF65-F5344CB8AC3E}">
-        <p14:creationId xmlns:p14="http://schemas.microsoft.com/office/powerpoint/2010/main" val="2209977519"/>
+        <p14:creationId xmlns:p14="http://schemas.microsoft.com/office/powerpoint/2010/main" val="2031720640"/>
       </p:ext>
     </p:extLst>
   </p:cSld>
   <p:clrMap bg1="lt1" tx1="dk1" bg2="lt2" tx2="dk2" accent1="accent1" accent2="accent2" accent3="accent3" accent4="accent4" accent5="accent5" accent6="accent6" hlink="hlink" folHlink="folHlink"/>
   <p:sldLayoutIdLst>
-    <p:sldLayoutId id="2147483649" r:id="rId1"/>
-    <p:sldLayoutId id="2147483650" r:id="rId2"/>
-    <p:sldLayoutId id="2147483651" r:id="rId3"/>
-    <p:sldLayoutId id="2147483652" r:id="rId4"/>
-    <p:sldLayoutId id="2147483653" r:id="rId5"/>
-    <p:sldLayoutId id="2147483654" r:id="rId6"/>
-    <p:sldLayoutId id="2147483655" r:id="rId7"/>
-    <p:sldLayoutId id="2147483656" r:id="rId8"/>
-    <p:sldLayoutId id="2147483657" r:id="rId9"/>
-    <p:sldLayoutId id="2147483658" r:id="rId10"/>
-    <p:sldLayoutId id="2147483659" r:id="rId11"/>
+    <p:sldLayoutId id="2147483661" r:id="rId1"/>
+    <p:sldLayoutId id="2147483662" r:id="rId2"/>
+    <p:sldLayoutId id="2147483663" r:id="rId3"/>
+    <p:sldLayoutId id="2147483664" r:id="rId4"/>
+    <p:sldLayoutId id="2147483665" r:id="rId5"/>
+    <p:sldLayoutId id="2147483666" r:id="rId6"/>
+    <p:sldLayoutId id="2147483667" r:id="rId7"/>
+    <p:sldLayoutId id="2147483668" r:id="rId8"/>
+    <p:sldLayoutId id="2147483669" r:id="rId9"/>
+    <p:sldLayoutId id="2147483670" r:id="rId10"/>
+    <p:sldLayoutId id="2147483671" r:id="rId11"/>
   </p:sldLayoutIdLst>
+  <p:hf hdr="0" ftr="0" dt="0"/>
   <p:txStyles>
     <p:titleStyle>
-      <a:lvl1pPr algn="ctr" defTabSz="457200" rtl="0" eaLnBrk="1" latinLnBrk="0" hangingPunct="1">
+      <a:lvl1pPr algn="l" defTabSz="914400" rtl="0" eaLnBrk="1" latinLnBrk="0" hangingPunct="1">
+        <a:lnSpc>
+          <a:spcPct val="90000"/>
+        </a:lnSpc>
         <a:spcBef>
           <a:spcPct val="0"/>
         </a:spcBef>
@@ -2861,13 +3266,16 @@
       </a:lvl1pPr>
     </p:titleStyle>
     <p:bodyStyle>
-      <a:lvl1pPr marL="342900" indent="-342900" algn="l" defTabSz="457200" rtl="0" eaLnBrk="1" latinLnBrk="0" hangingPunct="1">
+      <a:lvl1pPr marL="228600" indent="-228600" algn="l" defTabSz="914400" rtl="0" eaLnBrk="1" latinLnBrk="0" hangingPunct="1">
+        <a:lnSpc>
+          <a:spcPct val="90000"/>
+        </a:lnSpc>
         <a:spcBef>
-          <a:spcPct val="20000"/>
+          <a:spcPts val="1000"/>
         </a:spcBef>
-        <a:buFont typeface="Arial"/>
+        <a:buFont typeface="Arial" panose="020B0604020202020204" pitchFamily="34" charset="0"/>
         <a:buChar char="•"/>
-        <a:defRPr sz="3200" kern="1200">
+        <a:defRPr sz="2800" kern="1200">
           <a:solidFill>
             <a:schemeClr val="tx1"/>
           </a:solidFill>
@@ -2876,26 +3284,14 @@
           <a:cs typeface="+mn-cs"/>
         </a:defRPr>
       </a:lvl1pPr>
-      <a:lvl2pPr marL="742950" indent="-285750" algn="l" defTabSz="457200" rtl="0" eaLnBrk="1" latinLnBrk="0" hangingPunct="1">
+      <a:lvl2pPr marL="685800" indent="-228600" algn="l" defTabSz="914400" rtl="0" eaLnBrk="1" latinLnBrk="0" hangingPunct="1">
+        <a:lnSpc>
+          <a:spcPct val="90000"/>
+        </a:lnSpc>
         <a:spcBef>
-          <a:spcPct val="20000"/>
+          <a:spcPts val="500"/>
         </a:spcBef>
-        <a:buFont typeface="Arial"/>
-        <a:buChar char="–"/>
-        <a:defRPr sz="2800" kern="1200">
-          <a:solidFill>
-            <a:schemeClr val="tx1"/>
-          </a:solidFill>
-          <a:latin typeface="+mn-lt"/>
-          <a:ea typeface="+mn-ea"/>
-          <a:cs typeface="+mn-cs"/>
-        </a:defRPr>
-      </a:lvl2pPr>
-      <a:lvl3pPr marL="1143000" indent="-228600" algn="l" defTabSz="457200" rtl="0" eaLnBrk="1" latinLnBrk="0" hangingPunct="1">
-        <a:spcBef>
-          <a:spcPct val="20000"/>
-        </a:spcBef>
-        <a:buFont typeface="Arial"/>
+        <a:buFont typeface="Arial" panose="020B0604020202020204" pitchFamily="34" charset="0"/>
         <a:buChar char="•"/>
         <a:defRPr sz="2400" kern="1200">
           <a:solidFill>
@@ -2905,42 +3301,15 @@
           <a:ea typeface="+mn-ea"/>
           <a:cs typeface="+mn-cs"/>
         </a:defRPr>
-      </a:lvl3pPr>
-      <a:lvl4pPr marL="1600200" indent="-228600" algn="l" defTabSz="457200" rtl="0" eaLnBrk="1" latinLnBrk="0" hangingPunct="1">
+      </a:lvl2pPr>
+      <a:lvl3pPr marL="1143000" indent="-228600" algn="l" defTabSz="914400" rtl="0" eaLnBrk="1" latinLnBrk="0" hangingPunct="1">
+        <a:lnSpc>
+          <a:spcPct val="90000"/>
+        </a:lnSpc>
         <a:spcBef>
-          <a:spcPct val="20000"/>
+          <a:spcPts val="500"/>
         </a:spcBef>
-        <a:buFont typeface="Arial"/>
-        <a:buChar char="–"/>
-        <a:defRPr sz="2000" kern="1200">
-          <a:solidFill>
-            <a:schemeClr val="tx1"/>
-          </a:solidFill>
-          <a:latin typeface="+mn-lt"/>
-          <a:ea typeface="+mn-ea"/>
-          <a:cs typeface="+mn-cs"/>
-        </a:defRPr>
-      </a:lvl4pPr>
-      <a:lvl5pPr marL="2057400" indent="-228600" algn="l" defTabSz="457200" rtl="0" eaLnBrk="1" latinLnBrk="0" hangingPunct="1">
-        <a:spcBef>
-          <a:spcPct val="20000"/>
-        </a:spcBef>
-        <a:buFont typeface="Arial"/>
-        <a:buChar char="»"/>
-        <a:defRPr sz="2000" kern="1200">
-          <a:solidFill>
-            <a:schemeClr val="tx1"/>
-          </a:solidFill>
-          <a:latin typeface="+mn-lt"/>
-          <a:ea typeface="+mn-ea"/>
-          <a:cs typeface="+mn-cs"/>
-        </a:defRPr>
-      </a:lvl5pPr>
-      <a:lvl6pPr marL="2514600" indent="-228600" algn="l" defTabSz="457200" rtl="0" eaLnBrk="1" latinLnBrk="0" hangingPunct="1">
-        <a:spcBef>
-          <a:spcPct val="20000"/>
-        </a:spcBef>
-        <a:buFont typeface="Arial"/>
+        <a:buFont typeface="Arial" panose="020B0604020202020204" pitchFamily="34" charset="0"/>
         <a:buChar char="•"/>
         <a:defRPr sz="2000" kern="1200">
           <a:solidFill>
@@ -2950,14 +3319,71 @@
           <a:ea typeface="+mn-ea"/>
           <a:cs typeface="+mn-cs"/>
         </a:defRPr>
+      </a:lvl3pPr>
+      <a:lvl4pPr marL="1600200" indent="-228600" algn="l" defTabSz="914400" rtl="0" eaLnBrk="1" latinLnBrk="0" hangingPunct="1">
+        <a:lnSpc>
+          <a:spcPct val="90000"/>
+        </a:lnSpc>
+        <a:spcBef>
+          <a:spcPts val="500"/>
+        </a:spcBef>
+        <a:buFont typeface="Arial" panose="020B0604020202020204" pitchFamily="34" charset="0"/>
+        <a:buChar char="•"/>
+        <a:defRPr sz="1800" kern="1200">
+          <a:solidFill>
+            <a:schemeClr val="tx1"/>
+          </a:solidFill>
+          <a:latin typeface="+mn-lt"/>
+          <a:ea typeface="+mn-ea"/>
+          <a:cs typeface="+mn-cs"/>
+        </a:defRPr>
+      </a:lvl4pPr>
+      <a:lvl5pPr marL="2057400" indent="-228600" algn="l" defTabSz="914400" rtl="0" eaLnBrk="1" latinLnBrk="0" hangingPunct="1">
+        <a:lnSpc>
+          <a:spcPct val="90000"/>
+        </a:lnSpc>
+        <a:spcBef>
+          <a:spcPts val="500"/>
+        </a:spcBef>
+        <a:buFont typeface="Arial" panose="020B0604020202020204" pitchFamily="34" charset="0"/>
+        <a:buChar char="•"/>
+        <a:defRPr sz="1800" kern="1200">
+          <a:solidFill>
+            <a:schemeClr val="tx1"/>
+          </a:solidFill>
+          <a:latin typeface="+mn-lt"/>
+          <a:ea typeface="+mn-ea"/>
+          <a:cs typeface="+mn-cs"/>
+        </a:defRPr>
+      </a:lvl5pPr>
+      <a:lvl6pPr marL="2514600" indent="-228600" algn="l" defTabSz="914400" rtl="0" eaLnBrk="1" latinLnBrk="0" hangingPunct="1">
+        <a:lnSpc>
+          <a:spcPct val="90000"/>
+        </a:lnSpc>
+        <a:spcBef>
+          <a:spcPts val="500"/>
+        </a:spcBef>
+        <a:buFont typeface="Arial" panose="020B0604020202020204" pitchFamily="34" charset="0"/>
+        <a:buChar char="•"/>
+        <a:defRPr sz="1800" kern="1200">
+          <a:solidFill>
+            <a:schemeClr val="tx1"/>
+          </a:solidFill>
+          <a:latin typeface="+mn-lt"/>
+          <a:ea typeface="+mn-ea"/>
+          <a:cs typeface="+mn-cs"/>
+        </a:defRPr>
       </a:lvl6pPr>
-      <a:lvl7pPr marL="2971800" indent="-228600" algn="l" defTabSz="457200" rtl="0" eaLnBrk="1" latinLnBrk="0" hangingPunct="1">
+      <a:lvl7pPr marL="2971800" indent="-228600" algn="l" defTabSz="914400" rtl="0" eaLnBrk="1" latinLnBrk="0" hangingPunct="1">
+        <a:lnSpc>
+          <a:spcPct val="90000"/>
+        </a:lnSpc>
         <a:spcBef>
-          <a:spcPct val="20000"/>
+          <a:spcPts val="500"/>
         </a:spcBef>
-        <a:buFont typeface="Arial"/>
+        <a:buFont typeface="Arial" panose="020B0604020202020204" pitchFamily="34" charset="0"/>
         <a:buChar char="•"/>
-        <a:defRPr sz="2000" kern="1200">
+        <a:defRPr sz="1800" kern="1200">
           <a:solidFill>
             <a:schemeClr val="tx1"/>
           </a:solidFill>
@@ -2966,13 +3392,16 @@
           <a:cs typeface="+mn-cs"/>
         </a:defRPr>
       </a:lvl7pPr>
-      <a:lvl8pPr marL="3429000" indent="-228600" algn="l" defTabSz="457200" rtl="0" eaLnBrk="1" latinLnBrk="0" hangingPunct="1">
+      <a:lvl8pPr marL="3429000" indent="-228600" algn="l" defTabSz="914400" rtl="0" eaLnBrk="1" latinLnBrk="0" hangingPunct="1">
+        <a:lnSpc>
+          <a:spcPct val="90000"/>
+        </a:lnSpc>
         <a:spcBef>
-          <a:spcPct val="20000"/>
+          <a:spcPts val="500"/>
         </a:spcBef>
-        <a:buFont typeface="Arial"/>
+        <a:buFont typeface="Arial" panose="020B0604020202020204" pitchFamily="34" charset="0"/>
         <a:buChar char="•"/>
-        <a:defRPr sz="2000" kern="1200">
+        <a:defRPr sz="1800" kern="1200">
           <a:solidFill>
             <a:schemeClr val="tx1"/>
           </a:solidFill>
@@ -2981,13 +3410,16 @@
           <a:cs typeface="+mn-cs"/>
         </a:defRPr>
       </a:lvl8pPr>
-      <a:lvl9pPr marL="3886200" indent="-228600" algn="l" defTabSz="457200" rtl="0" eaLnBrk="1" latinLnBrk="0" hangingPunct="1">
+      <a:lvl9pPr marL="3886200" indent="-228600" algn="l" defTabSz="914400" rtl="0" eaLnBrk="1" latinLnBrk="0" hangingPunct="1">
+        <a:lnSpc>
+          <a:spcPct val="90000"/>
+        </a:lnSpc>
         <a:spcBef>
-          <a:spcPct val="20000"/>
+          <a:spcPts val="500"/>
         </a:spcBef>
-        <a:buFont typeface="Arial"/>
+        <a:buFont typeface="Arial" panose="020B0604020202020204" pitchFamily="34" charset="0"/>
         <a:buChar char="•"/>
-        <a:defRPr sz="2000" kern="1200">
+        <a:defRPr sz="1800" kern="1200">
           <a:solidFill>
             <a:schemeClr val="tx1"/>
           </a:solidFill>
@@ -3001,7 +3433,7 @@
       <a:defPPr>
         <a:defRPr lang="en-US"/>
       </a:defPPr>
-      <a:lvl1pPr marL="0" algn="l" defTabSz="457200" rtl="0" eaLnBrk="1" latinLnBrk="0" hangingPunct="1">
+      <a:lvl1pPr marL="0" algn="l" defTabSz="914400" rtl="0" eaLnBrk="1" latinLnBrk="0" hangingPunct="1">
         <a:defRPr sz="1800" kern="1200">
           <a:solidFill>
             <a:schemeClr val="tx1"/>
@@ -3011,7 +3443,7 @@
           <a:cs typeface="+mn-cs"/>
         </a:defRPr>
       </a:lvl1pPr>
-      <a:lvl2pPr marL="457200" algn="l" defTabSz="457200" rtl="0" eaLnBrk="1" latinLnBrk="0" hangingPunct="1">
+      <a:lvl2pPr marL="457200" algn="l" defTabSz="914400" rtl="0" eaLnBrk="1" latinLnBrk="0" hangingPunct="1">
         <a:defRPr sz="1800" kern="1200">
           <a:solidFill>
             <a:schemeClr val="tx1"/>
@@ -3021,7 +3453,7 @@
           <a:cs typeface="+mn-cs"/>
         </a:defRPr>
       </a:lvl2pPr>
-      <a:lvl3pPr marL="914400" algn="l" defTabSz="457200" rtl="0" eaLnBrk="1" latinLnBrk="0" hangingPunct="1">
+      <a:lvl3pPr marL="914400" algn="l" defTabSz="914400" rtl="0" eaLnBrk="1" latinLnBrk="0" hangingPunct="1">
         <a:defRPr sz="1800" kern="1200">
           <a:solidFill>
             <a:schemeClr val="tx1"/>
@@ -3031,7 +3463,7 @@
           <a:cs typeface="+mn-cs"/>
         </a:defRPr>
       </a:lvl3pPr>
-      <a:lvl4pPr marL="1371600" algn="l" defTabSz="457200" rtl="0" eaLnBrk="1" latinLnBrk="0" hangingPunct="1">
+      <a:lvl4pPr marL="1371600" algn="l" defTabSz="914400" rtl="0" eaLnBrk="1" latinLnBrk="0" hangingPunct="1">
         <a:defRPr sz="1800" kern="1200">
           <a:solidFill>
             <a:schemeClr val="tx1"/>
@@ -3041,7 +3473,7 @@
           <a:cs typeface="+mn-cs"/>
         </a:defRPr>
       </a:lvl4pPr>
-      <a:lvl5pPr marL="1828800" algn="l" defTabSz="457200" rtl="0" eaLnBrk="1" latinLnBrk="0" hangingPunct="1">
+      <a:lvl5pPr marL="1828800" algn="l" defTabSz="914400" rtl="0" eaLnBrk="1" latinLnBrk="0" hangingPunct="1">
         <a:defRPr sz="1800" kern="1200">
           <a:solidFill>
             <a:schemeClr val="tx1"/>
@@ -3051,7 +3483,7 @@
           <a:cs typeface="+mn-cs"/>
         </a:defRPr>
       </a:lvl5pPr>
-      <a:lvl6pPr marL="2286000" algn="l" defTabSz="457200" rtl="0" eaLnBrk="1" latinLnBrk="0" hangingPunct="1">
+      <a:lvl6pPr marL="2286000" algn="l" defTabSz="914400" rtl="0" eaLnBrk="1" latinLnBrk="0" hangingPunct="1">
         <a:defRPr sz="1800" kern="1200">
           <a:solidFill>
             <a:schemeClr val="tx1"/>
@@ -3061,7 +3493,7 @@
           <a:cs typeface="+mn-cs"/>
         </a:defRPr>
       </a:lvl6pPr>
-      <a:lvl7pPr marL="2743200" algn="l" defTabSz="457200" rtl="0" eaLnBrk="1" latinLnBrk="0" hangingPunct="1">
+      <a:lvl7pPr marL="2743200" algn="l" defTabSz="914400" rtl="0" eaLnBrk="1" latinLnBrk="0" hangingPunct="1">
         <a:defRPr sz="1800" kern="1200">
           <a:solidFill>
             <a:schemeClr val="tx1"/>
@@ -3071,7 +3503,7 @@
           <a:cs typeface="+mn-cs"/>
         </a:defRPr>
       </a:lvl7pPr>
-      <a:lvl8pPr marL="3200400" algn="l" defTabSz="457200" rtl="0" eaLnBrk="1" latinLnBrk="0" hangingPunct="1">
+      <a:lvl8pPr marL="3200400" algn="l" defTabSz="914400" rtl="0" eaLnBrk="1" latinLnBrk="0" hangingPunct="1">
         <a:defRPr sz="1800" kern="1200">
           <a:solidFill>
             <a:schemeClr val="tx1"/>
@@ -3081,7 +3513,7 @@
           <a:cs typeface="+mn-cs"/>
         </a:defRPr>
       </a:lvl8pPr>
-      <a:lvl9pPr marL="3657600" algn="l" defTabSz="457200" rtl="0" eaLnBrk="1" latinLnBrk="0" hangingPunct="1">
+      <a:lvl9pPr marL="3657600" algn="l" defTabSz="914400" rtl="0" eaLnBrk="1" latinLnBrk="0" hangingPunct="1">
         <a:defRPr sz="1800" kern="1200">
           <a:solidFill>
             <a:schemeClr val="tx1"/>
@@ -3097,7 +3529,7 @@
 </file>
 
 <file path=ppt/slides/slide1.xml><?xml version="1.0" encoding="utf-8"?>
-<p:sld xmlns:a="http://schemas.openxmlformats.org/drawingml/2006/main" xmlns:p="http://schemas.openxmlformats.org/presentationml/2006/main" xmlns:r="http://schemas.openxmlformats.org/officeDocument/2006/relationships">
+<p:sld xmlns:a="http://schemas.openxmlformats.org/drawingml/2006/main" xmlns:r="http://schemas.openxmlformats.org/officeDocument/2006/relationships" xmlns:p="http://schemas.openxmlformats.org/presentationml/2006/main">
   <p:cSld>
     <p:spTree>
       <p:nvGrpSpPr>
@@ -3105,326 +3537,564 @@
         <p:cNvGrpSpPr/>
         <p:nvPr/>
       </p:nvGrpSpPr>
-      <p:grpSpPr/>
+      <p:grpSpPr>
+        <a:xfrm>
+          <a:off x="0" y="0"/>
+          <a:ext cx="0" cy="0"/>
+          <a:chOff x="0" y="0"/>
+          <a:chExt cx="0" cy="0"/>
+        </a:xfrm>
+      </p:grpSpPr>
+      <p:sp>
+        <p:nvSpPr>
+          <p:cNvPr id="2" name="Title 1">
+            <a:extLst>
+              <a:ext uri="{FF2B5EF4-FFF2-40B4-BE49-F238E27FC236}">
+                <a16:creationId xmlns:a16="http://schemas.microsoft.com/office/drawing/2014/main" id="{FD1C46DB-D9D6-99F1-B8FD-FBA99021C9C4}"/>
+              </a:ext>
+            </a:extLst>
+          </p:cNvPr>
+          <p:cNvSpPr>
+            <a:spLocks noGrp="1"/>
+          </p:cNvSpPr>
+          <p:nvPr>
+            <p:ph type="ctrTitle"/>
+          </p:nvPr>
+        </p:nvSpPr>
+        <p:spPr>
+          <a:xfrm>
+            <a:off x="685800" y="1457484"/>
+            <a:ext cx="7772400" cy="884259"/>
+          </a:xfrm>
+        </p:spPr>
+        <p:txBody>
+          <a:bodyPr>
+            <a:noAutofit/>
+          </a:bodyPr>
+          <a:lstStyle/>
+          <a:p>
+            <a:pPr algn="ctr"/>
+            <a:r>
+              <a:rPr sz="2000" b="1"/>
+              <a:t>ChromGraphFM: An End-to-End 3D Chromatin-Conditioned Genomic Foundation Model</a:t>
+            </a:r>
+          </a:p>
+        </p:txBody>
+      </p:sp>
+      <p:sp>
+        <p:nvSpPr>
+          <p:cNvPr id="3" name="Subtitle 2">
+            <a:extLst>
+              <a:ext uri="{FF2B5EF4-FFF2-40B4-BE49-F238E27FC236}">
+                <a16:creationId xmlns:a16="http://schemas.microsoft.com/office/drawing/2014/main" id="{65BD8221-192B-76DF-DF92-A9F15F83713B}"/>
+              </a:ext>
+            </a:extLst>
+          </p:cNvPr>
+          <p:cNvSpPr>
+            <a:spLocks noGrp="1"/>
+          </p:cNvSpPr>
+          <p:nvPr>
+            <p:ph type="subTitle" idx="1"/>
+          </p:nvPr>
+        </p:nvSpPr>
+        <p:spPr>
+          <a:xfrm>
+            <a:off x="170624" y="4516258"/>
+            <a:ext cx="3675512" cy="1973635"/>
+          </a:xfrm>
+        </p:spPr>
+        <p:txBody>
+          <a:bodyPr wrap="square">
+            <a:normAutofit fontScale="40000" lnSpcReduction="20000"/>
+          </a:bodyPr>
+          <a:lstStyle/>
+          <a:p>
+            <a:pPr/>
+            <a:r>
+              <a:rPr sz="1400" b="1"/>
+              <a:t>Batch Members</a:t>
+            </a:r>
+          </a:p>
+          <a:p>
+            <a:pPr/>
+            <a:r>
+              <a:rPr sz="1300" b="0"/>
+              <a:t>P. Charan Sai (238W1A5447)</a:t>
+            </a:r>
+          </a:p>
+          <a:p>
+            <a:pPr/>
+            <a:r>
+              <a:rPr sz="1300" b="0"/>
+              <a:t>G. Karthik (248W5A5404)</a:t>
+            </a:r>
+          </a:p>
+          <a:p>
+            <a:pPr/>
+            <a:r>
+              <a:rPr sz="1300" b="0"/>
+              <a:t>P. Sanath (238W1A5446)</a:t>
+            </a:r>
+          </a:p>
+        </p:txBody>
+      </p:sp>
+      <p:sp>
+        <p:nvSpPr>
+          <p:cNvPr id="4" name="Subtitle 2">
+            <a:extLst>
+              <a:ext uri="{FF2B5EF4-FFF2-40B4-BE49-F238E27FC236}">
+                <a16:creationId xmlns:a16="http://schemas.microsoft.com/office/drawing/2014/main" id="{7E82CFBC-36EF-B095-71E8-4AA9D64C0EFE}"/>
+              </a:ext>
+            </a:extLst>
+          </p:cNvPr>
+          <p:cNvSpPr txBox="1">
+            <a:spLocks/>
+          </p:cNvSpPr>
+          <p:nvPr/>
+        </p:nvSpPr>
+        <p:spPr>
+          <a:xfrm>
+            <a:off x="4794945" y="4516258"/>
+            <a:ext cx="4178431" cy="2220295"/>
+          </a:xfrm>
+          <a:prstGeom prst="rect">
+            <a:avLst/>
+          </a:prstGeom>
+        </p:spPr>
+        <p:txBody>
+          <a:bodyPr vert="horz" lIns="91440" tIns="45720" rIns="91440" bIns="45720" rtlCol="0" wrap="square">
+            <a:normAutofit/>
+          </a:bodyPr>
+          <a:lstStyle>
+            <a:lvl1pPr marL="0" indent="0" algn="ctr" defTabSz="914400" rtl="0" eaLnBrk="1" latinLnBrk="0" hangingPunct="1">
+              <a:lnSpc>
+                <a:spcPct val="90000"/>
+              </a:lnSpc>
+              <a:spcBef>
+                <a:spcPts val="1000"/>
+              </a:spcBef>
+              <a:buFont typeface="Arial" panose="020B0604020202020204" pitchFamily="34" charset="0"/>
+              <a:buNone/>
+              <a:defRPr sz="2400" kern="1200">
+                <a:solidFill>
+                  <a:schemeClr val="tx1"/>
+                </a:solidFill>
+                <a:latin typeface="+mn-lt"/>
+                <a:ea typeface="+mn-ea"/>
+                <a:cs typeface="+mn-cs"/>
+              </a:defRPr>
+            </a:lvl1pPr>
+            <a:lvl2pPr marL="457200" indent="0" algn="ctr" defTabSz="914400" rtl="0" eaLnBrk="1" latinLnBrk="0" hangingPunct="1">
+              <a:lnSpc>
+                <a:spcPct val="90000"/>
+              </a:lnSpc>
+              <a:spcBef>
+                <a:spcPts val="500"/>
+              </a:spcBef>
+              <a:buFont typeface="Arial" panose="020B0604020202020204" pitchFamily="34" charset="0"/>
+              <a:buNone/>
+              <a:defRPr sz="2000" kern="1200">
+                <a:solidFill>
+                  <a:schemeClr val="tx1"/>
+                </a:solidFill>
+                <a:latin typeface="+mn-lt"/>
+                <a:ea typeface="+mn-ea"/>
+                <a:cs typeface="+mn-cs"/>
+              </a:defRPr>
+            </a:lvl2pPr>
+            <a:lvl3pPr marL="914400" indent="0" algn="ctr" defTabSz="914400" rtl="0" eaLnBrk="1" latinLnBrk="0" hangingPunct="1">
+              <a:lnSpc>
+                <a:spcPct val="90000"/>
+              </a:lnSpc>
+              <a:spcBef>
+                <a:spcPts val="500"/>
+              </a:spcBef>
+              <a:buFont typeface="Arial" panose="020B0604020202020204" pitchFamily="34" charset="0"/>
+              <a:buNone/>
+              <a:defRPr sz="1800" kern="1200">
+                <a:solidFill>
+                  <a:schemeClr val="tx1"/>
+                </a:solidFill>
+                <a:latin typeface="+mn-lt"/>
+                <a:ea typeface="+mn-ea"/>
+                <a:cs typeface="+mn-cs"/>
+              </a:defRPr>
+            </a:lvl3pPr>
+            <a:lvl4pPr marL="1371600" indent="0" algn="ctr" defTabSz="914400" rtl="0" eaLnBrk="1" latinLnBrk="0" hangingPunct="1">
+              <a:lnSpc>
+                <a:spcPct val="90000"/>
+              </a:lnSpc>
+              <a:spcBef>
+                <a:spcPts val="500"/>
+              </a:spcBef>
+              <a:buFont typeface="Arial" panose="020B0604020202020204" pitchFamily="34" charset="0"/>
+              <a:buNone/>
+              <a:defRPr sz="1600" kern="1200">
+                <a:solidFill>
+                  <a:schemeClr val="tx1"/>
+                </a:solidFill>
+                <a:latin typeface="+mn-lt"/>
+                <a:ea typeface="+mn-ea"/>
+                <a:cs typeface="+mn-cs"/>
+              </a:defRPr>
+            </a:lvl4pPr>
+            <a:lvl5pPr marL="1828800" indent="0" algn="ctr" defTabSz="914400" rtl="0" eaLnBrk="1" latinLnBrk="0" hangingPunct="1">
+              <a:lnSpc>
+                <a:spcPct val="90000"/>
+              </a:lnSpc>
+              <a:spcBef>
+                <a:spcPts val="500"/>
+              </a:spcBef>
+              <a:buFont typeface="Arial" panose="020B0604020202020204" pitchFamily="34" charset="0"/>
+              <a:buNone/>
+              <a:defRPr sz="1600" kern="1200">
+                <a:solidFill>
+                  <a:schemeClr val="tx1"/>
+                </a:solidFill>
+                <a:latin typeface="+mn-lt"/>
+                <a:ea typeface="+mn-ea"/>
+                <a:cs typeface="+mn-cs"/>
+              </a:defRPr>
+            </a:lvl5pPr>
+            <a:lvl6pPr marL="2286000" indent="0" algn="ctr" defTabSz="914400" rtl="0" eaLnBrk="1" latinLnBrk="0" hangingPunct="1">
+              <a:lnSpc>
+                <a:spcPct val="90000"/>
+              </a:lnSpc>
+              <a:spcBef>
+                <a:spcPts val="500"/>
+              </a:spcBef>
+              <a:buFont typeface="Arial" panose="020B0604020202020204" pitchFamily="34" charset="0"/>
+              <a:buNone/>
+              <a:defRPr sz="1600" kern="1200">
+                <a:solidFill>
+                  <a:schemeClr val="tx1"/>
+                </a:solidFill>
+                <a:latin typeface="+mn-lt"/>
+                <a:ea typeface="+mn-ea"/>
+                <a:cs typeface="+mn-cs"/>
+              </a:defRPr>
+            </a:lvl6pPr>
+            <a:lvl7pPr marL="2743200" indent="0" algn="ctr" defTabSz="914400" rtl="0" eaLnBrk="1" latinLnBrk="0" hangingPunct="1">
+              <a:lnSpc>
+                <a:spcPct val="90000"/>
+              </a:lnSpc>
+              <a:spcBef>
+                <a:spcPts val="500"/>
+              </a:spcBef>
+              <a:buFont typeface="Arial" panose="020B0604020202020204" pitchFamily="34" charset="0"/>
+              <a:buNone/>
+              <a:defRPr sz="1600" kern="1200">
+                <a:solidFill>
+                  <a:schemeClr val="tx1"/>
+                </a:solidFill>
+                <a:latin typeface="+mn-lt"/>
+                <a:ea typeface="+mn-ea"/>
+                <a:cs typeface="+mn-cs"/>
+              </a:defRPr>
+            </a:lvl7pPr>
+            <a:lvl8pPr marL="3200400" indent="0" algn="ctr" defTabSz="914400" rtl="0" eaLnBrk="1" latinLnBrk="0" hangingPunct="1">
+              <a:lnSpc>
+                <a:spcPct val="90000"/>
+              </a:lnSpc>
+              <a:spcBef>
+                <a:spcPts val="500"/>
+              </a:spcBef>
+              <a:buFont typeface="Arial" panose="020B0604020202020204" pitchFamily="34" charset="0"/>
+              <a:buNone/>
+              <a:defRPr sz="1600" kern="1200">
+                <a:solidFill>
+                  <a:schemeClr val="tx1"/>
+                </a:solidFill>
+                <a:latin typeface="+mn-lt"/>
+                <a:ea typeface="+mn-ea"/>
+                <a:cs typeface="+mn-cs"/>
+              </a:defRPr>
+            </a:lvl8pPr>
+            <a:lvl9pPr marL="3657600" indent="0" algn="ctr" defTabSz="914400" rtl="0" eaLnBrk="1" latinLnBrk="0" hangingPunct="1">
+              <a:lnSpc>
+                <a:spcPct val="90000"/>
+              </a:lnSpc>
+              <a:spcBef>
+                <a:spcPts val="500"/>
+              </a:spcBef>
+              <a:buFont typeface="Arial" panose="020B0604020202020204" pitchFamily="34" charset="0"/>
+              <a:buNone/>
+              <a:defRPr sz="1600" kern="1200">
+                <a:solidFill>
+                  <a:schemeClr val="tx1"/>
+                </a:solidFill>
+                <a:latin typeface="+mn-lt"/>
+                <a:ea typeface="+mn-ea"/>
+                <a:cs typeface="+mn-cs"/>
+              </a:defRPr>
+            </a:lvl9pPr>
+          </a:lstStyle>
+          <a:p>
+            <a:pPr/>
+            <a:r>
+              <a:rPr sz="1400" b="1"/>
+              <a:t>Under the Guidance of</a:t>
+            </a:r>
+          </a:p>
+          <a:p>
+            <a:pPr/>
+            <a:r>
+              <a:rPr sz="1300" b="0"/>
+              <a:t>Mrs. K. Divya Kothapali</a:t>
+            </a:r>
+          </a:p>
+          <a:p>
+            <a:pPr/>
+            <a:r>
+              <a:rPr sz="1200" b="0"/>
+              <a:t>Assistant Professor</a:t>
+            </a:r>
+          </a:p>
+        </p:txBody>
+      </p:sp>
+      <p:sp>
+        <p:nvSpPr>
+          <p:cNvPr id="6" name="Title 1">
+            <a:extLst>
+              <a:ext uri="{FF2B5EF4-FFF2-40B4-BE49-F238E27FC236}">
+                <a16:creationId xmlns:a16="http://schemas.microsoft.com/office/drawing/2014/main" id="{46D2FCE7-A20E-157E-20FA-2B09A5121833}"/>
+              </a:ext>
+            </a:extLst>
+          </p:cNvPr>
+          <p:cNvSpPr txBox="1">
+            <a:spLocks/>
+          </p:cNvSpPr>
+          <p:nvPr/>
+        </p:nvSpPr>
+        <p:spPr>
+          <a:xfrm>
+            <a:off x="685800" y="3293700"/>
+            <a:ext cx="7772400" cy="791278"/>
+          </a:xfrm>
+          <a:prstGeom prst="rect">
+            <a:avLst/>
+          </a:prstGeom>
+        </p:spPr>
+        <p:txBody>
+          <a:bodyPr vert="horz" lIns="91440" tIns="45720" rIns="91440" bIns="45720" rtlCol="0" anchor="b" wrap="square">
+            <a:noAutofit/>
+          </a:bodyPr>
+          <a:lstStyle>
+            <a:lvl1pPr algn="ctr" defTabSz="914400" rtl="0" eaLnBrk="1" latinLnBrk="0" hangingPunct="1">
+              <a:lnSpc>
+                <a:spcPct val="90000"/>
+              </a:lnSpc>
+              <a:spcBef>
+                <a:spcPct val="0"/>
+              </a:spcBef>
+              <a:buNone/>
+              <a:defRPr sz="6000" kern="1200">
+                <a:solidFill>
+                  <a:schemeClr val="tx1"/>
+                </a:solidFill>
+                <a:latin typeface="+mj-lt"/>
+                <a:ea typeface="+mj-ea"/>
+                <a:cs typeface="+mj-cs"/>
+              </a:defRPr>
+            </a:lvl1pPr>
+          </a:lstStyle>
+          <a:p>
+            <a:pPr/>
+            <a:r>
+              <a:rPr sz="1400" b="0"/>
+              <a:t>23CS7552: B. Tech Mini Project (Project Pitch)</a:t>
+            </a:r>
+          </a:p>
+          <a:p>
+            <a:pPr/>
+            <a:r>
+              <a:rPr sz="1300" b="0"/>
+              <a:t>2026</a:t>
+            </a:r>
+          </a:p>
+          <a:p>
+            <a:pPr/>
+            <a:r>
+              <a:rPr sz="1300" b="0"/>
+              <a:t>Batch No: __</a:t>
+            </a:r>
+          </a:p>
+        </p:txBody>
+      </p:sp>
+      <p:sp>
+        <p:nvSpPr>
+          <p:cNvPr id="7" name="Title 1">
+            <a:extLst>
+              <a:ext uri="{FF2B5EF4-FFF2-40B4-BE49-F238E27FC236}">
+                <a16:creationId xmlns:a16="http://schemas.microsoft.com/office/drawing/2014/main" id="{F0E7157D-0ED4-652A-8A59-DCC1031DA9E7}"/>
+              </a:ext>
+            </a:extLst>
+          </p:cNvPr>
+          <p:cNvSpPr txBox="1">
+            <a:spLocks/>
+          </p:cNvSpPr>
+          <p:nvPr/>
+        </p:nvSpPr>
+        <p:spPr>
+          <a:xfrm>
+            <a:off x="906670" y="60484"/>
+            <a:ext cx="7126664" cy="1125996"/>
+          </a:xfrm>
+          <a:prstGeom prst="rect">
+            <a:avLst/>
+          </a:prstGeom>
+        </p:spPr>
+        <p:txBody>
+          <a:bodyPr vert="horz" lIns="91440" tIns="45720" rIns="91440" bIns="45720" rtlCol="0" anchor="b">
+            <a:noAutofit/>
+          </a:bodyPr>
+          <a:lstStyle>
+            <a:lvl1pPr algn="ctr" defTabSz="914400" rtl="0" eaLnBrk="1" latinLnBrk="0" hangingPunct="1">
+              <a:lnSpc>
+                <a:spcPct val="90000"/>
+              </a:lnSpc>
+              <a:spcBef>
+                <a:spcPct val="0"/>
+              </a:spcBef>
+              <a:buNone/>
+              <a:defRPr sz="6000" kern="1200">
+                <a:solidFill>
+                  <a:schemeClr val="tx1"/>
+                </a:solidFill>
+                <a:latin typeface="+mj-lt"/>
+                <a:ea typeface="+mj-ea"/>
+                <a:cs typeface="+mj-cs"/>
+              </a:defRPr>
+            </a:lvl1pPr>
+          </a:lstStyle>
+          <a:p>
+            <a:r>
+              <a:rPr lang="en-US" sz="2000" b="1" dirty="0">
+                <a:latin typeface="Calisto MT" panose="02040603050505030304" pitchFamily="18" charset="0"/>
+                <a:cs typeface="JasmineUPC" panose="02020603050405020304" pitchFamily="18" charset="-34"/>
+              </a:rPr>
+              <a:t>VR SIDDHARTHA ENGINEERING COLLEGE, VIJAYAWADA</a:t>
+            </a:r>
+          </a:p>
+          <a:p>
+            <a:r>
+              <a:rPr lang="en-US" sz="2000" b="1" dirty="0">
+                <a:latin typeface="Calisto MT" panose="02040603050505030304" pitchFamily="18" charset="0"/>
+                <a:cs typeface="JasmineUPC" panose="02020603050405020304" pitchFamily="18" charset="-34"/>
+              </a:rPr>
+              <a:t>Department of Computer Science and Engineering</a:t>
+            </a:r>
+          </a:p>
+        </p:txBody>
+      </p:sp>
       <p:pic>
         <p:nvPicPr>
-          <p:cNvPr id="2" name="Picture 1" descr="01_title.png"/>
+          <p:cNvPr id="11" name="Picture 10" descr="A picture containing diagram&#10;&#10;Description automatically generated">
+            <a:extLst>
+              <a:ext uri="{FF2B5EF4-FFF2-40B4-BE49-F238E27FC236}">
+                <a16:creationId xmlns:a16="http://schemas.microsoft.com/office/drawing/2014/main" id="{2F0778DE-E80B-339F-BA7E-B056A92517C2}"/>
+              </a:ext>
+            </a:extLst>
+          </p:cNvPr>
           <p:cNvPicPr>
             <a:picLocks noChangeAspect="1"/>
           </p:cNvPicPr>
           <p:nvPr/>
         </p:nvPicPr>
         <p:blipFill>
-          <a:blip r:embed="rId2"/>
+          <a:blip r:embed="rId2">
+            <a:extLst>
+              <a:ext uri="{28A0092B-C50C-407E-A947-70E740481C1C}">
+                <a14:useLocalDpi xmlns:a14="http://schemas.microsoft.com/office/drawing/2010/main" val="0"/>
+              </a:ext>
+            </a:extLst>
+          </a:blip>
           <a:stretch>
             <a:fillRect/>
           </a:stretch>
         </p:blipFill>
         <p:spPr>
           <a:xfrm>
-            <a:off x="0" y="0"/>
-            <a:ext cx="12191695" cy="6858000"/>
+            <a:off x="372778" y="161404"/>
+            <a:ext cx="950349" cy="1118057"/>
           </a:xfrm>
           <a:prstGeom prst="rect">
             <a:avLst/>
           </a:prstGeom>
         </p:spPr>
       </p:pic>
-    </p:spTree>
-  </p:cSld>
-  <p:clrMapOvr>
-    <a:masterClrMapping/>
-  </p:clrMapOvr>
-</p:sld>
-</file>
-
-<file path=ppt/slides/slide10.xml><?xml version="1.0" encoding="utf-8"?>
-<p:sld xmlns:a="http://schemas.openxmlformats.org/drawingml/2006/main" xmlns:p="http://schemas.openxmlformats.org/presentationml/2006/main" xmlns:r="http://schemas.openxmlformats.org/officeDocument/2006/relationships">
-  <p:cSld>
-    <p:spTree>
-      <p:nvGrpSpPr>
-        <p:cNvPr id="1" name=""/>
-        <p:cNvGrpSpPr/>
-        <p:nvPr/>
-      </p:nvGrpSpPr>
-      <p:grpSpPr/>
       <p:pic>
         <p:nvPicPr>
-          <p:cNvPr id="2" name="Picture 1" descr="10_traces.png"/>
+          <p:cNvPr id="13" name="Picture 12" descr="Logo&#10;&#10;Description automatically generated">
+            <a:extLst>
+              <a:ext uri="{FF2B5EF4-FFF2-40B4-BE49-F238E27FC236}">
+                <a16:creationId xmlns:a16="http://schemas.microsoft.com/office/drawing/2014/main" id="{1D9962D5-2778-4C7F-FC4C-2CB25B3178F9}"/>
+              </a:ext>
+            </a:extLst>
+          </p:cNvPr>
           <p:cNvPicPr>
             <a:picLocks noChangeAspect="1"/>
           </p:cNvPicPr>
           <p:nvPr/>
         </p:nvPicPr>
         <p:blipFill>
-          <a:blip r:embed="rId2"/>
+          <a:blip r:embed="rId3">
+            <a:extLst>
+              <a:ext uri="{28A0092B-C50C-407E-A947-70E740481C1C}">
+                <a14:useLocalDpi xmlns:a14="http://schemas.microsoft.com/office/drawing/2010/main" val="0"/>
+              </a:ext>
+            </a:extLst>
+          </a:blip>
           <a:stretch>
             <a:fillRect/>
           </a:stretch>
         </p:blipFill>
         <p:spPr>
           <a:xfrm>
-            <a:off x="0" y="0"/>
-            <a:ext cx="12191695" cy="6858000"/>
+            <a:off x="7678301" y="153465"/>
+            <a:ext cx="1118057" cy="1118057"/>
           </a:xfrm>
           <a:prstGeom prst="rect">
             <a:avLst/>
           </a:prstGeom>
         </p:spPr>
       </p:pic>
+      <p:sp>
+        <p:nvSpPr>
+          <p:cNvPr id="16" name="Slide Number Placeholder 15">
+            <a:extLst>
+              <a:ext uri="{FF2B5EF4-FFF2-40B4-BE49-F238E27FC236}">
+                <a16:creationId xmlns:a16="http://schemas.microsoft.com/office/drawing/2014/main" id="{6C680849-8AC5-7306-7F26-02AD56BFE4F8}"/>
+              </a:ext>
+            </a:extLst>
+          </p:cNvPr>
+          <p:cNvSpPr>
+            <a:spLocks noGrp="1"/>
+          </p:cNvSpPr>
+          <p:nvPr>
+            <p:ph type="sldNum" sz="quarter" idx="12"/>
+          </p:nvPr>
+        </p:nvSpPr>
+        <p:spPr/>
+        <p:txBody>
+          <a:bodyPr/>
+          <a:lstStyle/>
+          <a:p>
+            <a:fld id="{D90542D4-23E8-43E0-BA8E-C972DA1A005D}" type="slidenum">
+              <a:rPr lang="en-US" smtClean="0"/>
+              <a:pPr/>
+              <a:t>1</a:t>
+            </a:fld>
+            <a:endParaRPr lang="en-US" dirty="0"/>
+          </a:p>
+        </p:txBody>
+      </p:sp>
     </p:spTree>
-  </p:cSld>
-  <p:clrMapOvr>
-    <a:masterClrMapping/>
-  </p:clrMapOvr>
-</p:sld>
-</file>
-
-<file path=ppt/slides/slide11.xml><?xml version="1.0" encoding="utf-8"?>
-<p:sld xmlns:a="http://schemas.openxmlformats.org/drawingml/2006/main" xmlns:p="http://schemas.openxmlformats.org/presentationml/2006/main" xmlns:r="http://schemas.openxmlformats.org/officeDocument/2006/relationships">
-  <p:cSld>
-    <p:spTree>
-      <p:nvGrpSpPr>
-        <p:cNvPr id="1" name=""/>
-        <p:cNvGrpSpPr/>
-        <p:nvPr/>
-      </p:nvGrpSpPr>
-      <p:grpSpPr/>
-      <p:pic>
-        <p:nvPicPr>
-          <p:cNvPr id="2" name="Picture 1" descr="11_result.png"/>
-          <p:cNvPicPr>
-            <a:picLocks noChangeAspect="1"/>
-          </p:cNvPicPr>
-          <p:nvPr/>
-        </p:nvPicPr>
-        <p:blipFill>
-          <a:blip r:embed="rId2"/>
-          <a:stretch>
-            <a:fillRect/>
-          </a:stretch>
-        </p:blipFill>
-        <p:spPr>
-          <a:xfrm>
-            <a:off x="0" y="0"/>
-            <a:ext cx="12191695" cy="6858000"/>
-          </a:xfrm>
-          <a:prstGeom prst="rect">
-            <a:avLst/>
-          </a:prstGeom>
-        </p:spPr>
-      </p:pic>
-    </p:spTree>
-  </p:cSld>
-  <p:clrMapOvr>
-    <a:masterClrMapping/>
-  </p:clrMapOvr>
-</p:sld>
-</file>
-
-<file path=ppt/slides/slide12.xml><?xml version="1.0" encoding="utf-8"?>
-<p:sld xmlns:a="http://schemas.openxmlformats.org/drawingml/2006/main" xmlns:p="http://schemas.openxmlformats.org/presentationml/2006/main" xmlns:r="http://schemas.openxmlformats.org/officeDocument/2006/relationships">
-  <p:cSld>
-    <p:spTree>
-      <p:nvGrpSpPr>
-        <p:cNvPr id="1" name=""/>
-        <p:cNvGrpSpPr/>
-        <p:nvPr/>
-      </p:nvGrpSpPr>
-      <p:grpSpPr/>
-      <p:pic>
-        <p:nvPicPr>
-          <p:cNvPr id="2" name="Picture 1" descr="12_controls.png"/>
-          <p:cNvPicPr>
-            <a:picLocks noChangeAspect="1"/>
-          </p:cNvPicPr>
-          <p:nvPr/>
-        </p:nvPicPr>
-        <p:blipFill>
-          <a:blip r:embed="rId2"/>
-          <a:stretch>
-            <a:fillRect/>
-          </a:stretch>
-        </p:blipFill>
-        <p:spPr>
-          <a:xfrm>
-            <a:off x="0" y="0"/>
-            <a:ext cx="12191695" cy="6858000"/>
-          </a:xfrm>
-          <a:prstGeom prst="rect">
-            <a:avLst/>
-          </a:prstGeom>
-        </p:spPr>
-      </p:pic>
-    </p:spTree>
-  </p:cSld>
-  <p:clrMapOvr>
-    <a:masterClrMapping/>
-  </p:clrMapOvr>
-</p:sld>
-</file>
-
-<file path=ppt/slides/slide13.xml><?xml version="1.0" encoding="utf-8"?>
-<p:sld xmlns:a="http://schemas.openxmlformats.org/drawingml/2006/main" xmlns:p="http://schemas.openxmlformats.org/presentationml/2006/main" xmlns:r="http://schemas.openxmlformats.org/officeDocument/2006/relationships">
-  <p:cSld>
-    <p:spTree>
-      <p:nvGrpSpPr>
-        <p:cNvPr id="1" name=""/>
-        <p:cNvGrpSpPr/>
-        <p:nvPr/>
-      </p:nvGrpSpPr>
-      <p:grpSpPr/>
-      <p:pic>
-        <p:nvPicPr>
-          <p:cNvPr id="2" name="Picture 1" descr="13_s4.png"/>
-          <p:cNvPicPr>
-            <a:picLocks noChangeAspect="1"/>
-          </p:cNvPicPr>
-          <p:nvPr/>
-        </p:nvPicPr>
-        <p:blipFill>
-          <a:blip r:embed="rId2"/>
-          <a:stretch>
-            <a:fillRect/>
-          </a:stretch>
-        </p:blipFill>
-        <p:spPr>
-          <a:xfrm>
-            <a:off x="0" y="0"/>
-            <a:ext cx="12191695" cy="6858000"/>
-          </a:xfrm>
-          <a:prstGeom prst="rect">
-            <a:avLst/>
-          </a:prstGeom>
-        </p:spPr>
-      </p:pic>
-    </p:spTree>
-  </p:cSld>
-  <p:clrMapOvr>
-    <a:masterClrMapping/>
-  </p:clrMapOvr>
-</p:sld>
-</file>
-
-<file path=ppt/slides/slide14.xml><?xml version="1.0" encoding="utf-8"?>
-<p:sld xmlns:a="http://schemas.openxmlformats.org/drawingml/2006/main" xmlns:p="http://schemas.openxmlformats.org/presentationml/2006/main" xmlns:r="http://schemas.openxmlformats.org/officeDocument/2006/relationships">
-  <p:cSld>
-    <p:spTree>
-      <p:nvGrpSpPr>
-        <p:cNvPr id="1" name=""/>
-        <p:cNvGrpSpPr/>
-        <p:nvPr/>
-      </p:nvGrpSpPr>
-      <p:grpSpPr/>
-      <p:pic>
-        <p:nvPicPr>
-          <p:cNvPr id="2" name="Picture 1" descr="14_s3.png"/>
-          <p:cNvPicPr>
-            <a:picLocks noChangeAspect="1"/>
-          </p:cNvPicPr>
-          <p:nvPr/>
-        </p:nvPicPr>
-        <p:blipFill>
-          <a:blip r:embed="rId2"/>
-          <a:stretch>
-            <a:fillRect/>
-          </a:stretch>
-        </p:blipFill>
-        <p:spPr>
-          <a:xfrm>
-            <a:off x="0" y="0"/>
-            <a:ext cx="12191695" cy="6858000"/>
-          </a:xfrm>
-          <a:prstGeom prst="rect">
-            <a:avLst/>
-          </a:prstGeom>
-        </p:spPr>
-      </p:pic>
-    </p:spTree>
-  </p:cSld>
-  <p:clrMapOvr>
-    <a:masterClrMapping/>
-  </p:clrMapOvr>
-</p:sld>
-</file>
-
-<file path=ppt/slides/slide15.xml><?xml version="1.0" encoding="utf-8"?>
-<p:sld xmlns:a="http://schemas.openxmlformats.org/drawingml/2006/main" xmlns:p="http://schemas.openxmlformats.org/presentationml/2006/main" xmlns:r="http://schemas.openxmlformats.org/officeDocument/2006/relationships">
-  <p:cSld>
-    <p:spTree>
-      <p:nvGrpSpPr>
-        <p:cNvPr id="1" name=""/>
-        <p:cNvGrpSpPr/>
-        <p:nvPr/>
-      </p:nvGrpSpPr>
-      <p:grpSpPr/>
-      <p:pic>
-        <p:nvPicPr>
-          <p:cNvPr id="2" name="Picture 1" descr="15_gate.png"/>
-          <p:cNvPicPr>
-            <a:picLocks noChangeAspect="1"/>
-          </p:cNvPicPr>
-          <p:nvPr/>
-        </p:nvPicPr>
-        <p:blipFill>
-          <a:blip r:embed="rId2"/>
-          <a:stretch>
-            <a:fillRect/>
-          </a:stretch>
-        </p:blipFill>
-        <p:spPr>
-          <a:xfrm>
-            <a:off x="0" y="0"/>
-            <a:ext cx="12191695" cy="6858000"/>
-          </a:xfrm>
-          <a:prstGeom prst="rect">
-            <a:avLst/>
-          </a:prstGeom>
-        </p:spPr>
-      </p:pic>
-    </p:spTree>
-  </p:cSld>
-  <p:clrMapOvr>
-    <a:masterClrMapping/>
-  </p:clrMapOvr>
-</p:sld>
-</file>
-
-<file path=ppt/slides/slide16.xml><?xml version="1.0" encoding="utf-8"?>
-<p:sld xmlns:a="http://schemas.openxmlformats.org/drawingml/2006/main" xmlns:p="http://schemas.openxmlformats.org/presentationml/2006/main" xmlns:r="http://schemas.openxmlformats.org/officeDocument/2006/relationships">
-  <p:cSld>
-    <p:spTree>
-      <p:nvGrpSpPr>
-        <p:cNvPr id="1" name=""/>
-        <p:cNvGrpSpPr/>
-        <p:nvPr/>
-      </p:nvGrpSpPr>
-      <p:grpSpPr/>
-      <p:pic>
-        <p:nvPicPr>
-          <p:cNvPr id="2" name="Picture 1" descr="16_reliance.png"/>
-          <p:cNvPicPr>
-            <a:picLocks noChangeAspect="1"/>
-          </p:cNvPicPr>
-          <p:nvPr/>
-        </p:nvPicPr>
-        <p:blipFill>
-          <a:blip r:embed="rId2"/>
-          <a:stretch>
-            <a:fillRect/>
-          </a:stretch>
-        </p:blipFill>
-        <p:spPr>
-          <a:xfrm>
-            <a:off x="0" y="0"/>
-            <a:ext cx="12191695" cy="6858000"/>
-          </a:xfrm>
-          <a:prstGeom prst="rect">
-            <a:avLst/>
-          </a:prstGeom>
-        </p:spPr>
-      </p:pic>
-    </p:spTree>
+    <p:extLst>
+      <p:ext uri="{BB962C8B-B14F-4D97-AF65-F5344CB8AC3E}">
+        <p14:creationId xmlns:p14="http://schemas.microsoft.com/office/powerpoint/2010/main" val="3592637692"/>
+      </p:ext>
+    </p:extLst>
   </p:cSld>
   <p:clrMapOvr>
     <a:masterClrMapping/>
@@ -3433,7 +4103,7 @@
 </file>
 
 <file path=ppt/slides/slide17.xml><?xml version="1.0" encoding="utf-8"?>
-<p:sld xmlns:a="http://schemas.openxmlformats.org/drawingml/2006/main" xmlns:p="http://schemas.openxmlformats.org/presentationml/2006/main" xmlns:r="http://schemas.openxmlformats.org/officeDocument/2006/relationships">
+<p:sld xmlns:a="http://schemas.openxmlformats.org/drawingml/2006/main" xmlns:r="http://schemas.openxmlformats.org/officeDocument/2006/relationships" xmlns:p="http://schemas.openxmlformats.org/presentationml/2006/main">
   <p:cSld>
     <p:spTree>
       <p:nvGrpSpPr>
@@ -3441,32 +4111,205 @@
         <p:cNvGrpSpPr/>
         <p:nvPr/>
       </p:nvGrpSpPr>
-      <p:grpSpPr/>
-      <p:pic>
-        <p:nvPicPr>
-          <p:cNvPr id="2" name="Picture 1" descr="17_depth.png"/>
-          <p:cNvPicPr>
-            <a:picLocks noChangeAspect="1"/>
-          </p:cNvPicPr>
-          <p:nvPr/>
-        </p:nvPicPr>
-        <p:blipFill>
-          <a:blip r:embed="rId2"/>
-          <a:stretch>
-            <a:fillRect/>
-          </a:stretch>
-        </p:blipFill>
+      <p:grpSpPr>
+        <a:xfrm>
+          <a:off x="0" y="0"/>
+          <a:ext cx="0" cy="0"/>
+          <a:chOff x="0" y="0"/>
+          <a:chExt cx="0" cy="0"/>
+        </a:xfrm>
+      </p:grpSpPr>
+      <p:sp>
+        <p:nvSpPr>
+          <p:cNvPr id="2" name="Title 1">
+            <a:extLst>
+              <a:ext uri="{FF2B5EF4-FFF2-40B4-BE49-F238E27FC236}">
+                <a16:creationId xmlns:a16="http://schemas.microsoft.com/office/drawing/2014/main" id="{5B738971-B764-E045-F92B-01E3322A0123}"/>
+              </a:ext>
+            </a:extLst>
+          </p:cNvPr>
+          <p:cNvSpPr>
+            <a:spLocks noGrp="1"/>
+          </p:cNvSpPr>
+          <p:nvPr>
+            <p:ph type="title"/>
+          </p:nvPr>
+        </p:nvSpPr>
         <p:spPr>
           <a:xfrm>
-            <a:off x="0" y="0"/>
-            <a:ext cx="12191695" cy="6858000"/>
+            <a:off x="202676" y="120029"/>
+            <a:ext cx="8738648" cy="747237"/>
           </a:xfrm>
-          <a:prstGeom prst="rect">
-            <a:avLst/>
-          </a:prstGeom>
         </p:spPr>
-      </p:pic>
+        <p:txBody>
+          <a:bodyPr>
+            <a:noAutofit/>
+          </a:bodyPr>
+          <a:lstStyle/>
+          <a:p>
+            <a:r>
+              <a:rPr lang="en-US" sz="3000" b="1" dirty="0">
+                <a:solidFill>
+                  <a:schemeClr val="accent2">
+                    <a:lumMod val="50000"/>
+                  </a:schemeClr>
+                </a:solidFill>
+                <a:latin typeface="Calisto MT" panose="02040603050505030304" pitchFamily="18" charset="0"/>
+              </a:rPr>
+              <a:t>11. Gap Analysis</a:t>
+            </a:r>
+          </a:p>
+        </p:txBody>
+      </p:sp>
+      <p:sp>
+        <p:nvSpPr>
+          <p:cNvPr id="3" name="Content Placeholder 2">
+            <a:extLst>
+              <a:ext uri="{FF2B5EF4-FFF2-40B4-BE49-F238E27FC236}">
+                <a16:creationId xmlns:a16="http://schemas.microsoft.com/office/drawing/2014/main" id="{E5D502BE-F636-7D1D-85F0-BAFFD3E05E1C}"/>
+              </a:ext>
+            </a:extLst>
+          </p:cNvPr>
+          <p:cNvSpPr>
+            <a:spLocks noGrp="1"/>
+          </p:cNvSpPr>
+          <p:nvPr>
+            <p:ph idx="1"/>
+          </p:nvPr>
+        </p:nvSpPr>
+        <p:spPr>
+          <a:xfrm>
+            <a:off x="358218" y="867265"/>
+            <a:ext cx="8314441" cy="5870705"/>
+          </a:xfrm>
+        </p:spPr>
+        <p:txBody>
+          <a:bodyPr numCol="1" wrap="square">
+            <a:normAutofit/>
+          </a:bodyPr>
+          <a:lstStyle/>
+          <a:p>
+            <a:pPr/>
+            <a:r>
+              <a:rPr sz="1400" b="1"/>
+              <a:t>Established in the literature</a:t>
+            </a:r>
+          </a:p>
+          <a:p>
+            <a:pPr lvl="1"/>
+            <a:r>
+              <a:rPr sz="1200" b="0"/>
+              <a:t>Foundation models pretrained on Hi-C maps exist (HiCFoundation)</a:t>
+            </a:r>
+          </a:p>
+          <a:p>
+            <a:pPr lvl="1"/>
+            <a:r>
+              <a:rPr sz="1200" b="0"/>
+              <a:t>Multimodal Hi-C and epigenomic pretraining exists (MIX-HIC)</a:t>
+            </a:r>
+          </a:p>
+          <a:p>
+            <a:pPr lvl="1"/>
+            <a:r>
+              <a:rPr sz="1200" b="0"/>
+              <a:t>Hi-C-guided distillation into a DNA encoder exists (Evo2HiC)</a:t>
+            </a:r>
+          </a:p>
+          <a:p>
+            <a:pPr/>
+            <a:r>
+              <a:rPr sz="1400" b="1"/>
+              <a:t>Still open</a:t>
+            </a:r>
+          </a:p>
+          <a:p>
+            <a:pPr lvl="1"/>
+            <a:r>
+              <a:rPr sz="1200" b="0"/>
+              <a:t>No published model trains a DNA encoder end to end while measured contact graphs control which distal windows exchange information at every layer</a:t>
+            </a:r>
+          </a:p>
+          <a:p>
+            <a:pPr lvl="1"/>
+            <a:r>
+              <a:rPr sz="1200" b="0"/>
+              <a:t>Post-hoc alignment and late fusion have not been separated from in-encoder conditioning under matched parameters, data and compute</a:t>
+            </a:r>
+          </a:p>
+          <a:p>
+            <a:pPr lvl="1"/>
+            <a:r>
+              <a:rPr sz="1200" b="0"/>
+              <a:t>Whether structural knowledge survives removal of Hi-C at inference is asserted more often than it is tested against a shuffled-contact control</a:t>
+            </a:r>
+          </a:p>
+          <a:p>
+            <a:pPr/>
+            <a:r>
+              <a:rPr sz="1400" b="1"/>
+              <a:t>Gap statement</a:t>
+            </a:r>
+          </a:p>
+          <a:p>
+            <a:pPr lvl="2"/>
+            <a:r>
+              <a:rPr sz="1000" b="0">
+                <a:solidFill>
+                  <a:srgbClr val="595959"/>
+                </a:solidFill>
+              </a:rPr>
+              <a:t>It remains untested whether contact graphs conditioning sequence contextualisation throughout pretraining yield a more transferable DNA representation than the alternatives, measured against distance-matched and shuffled-contact controls.</a:t>
+            </a:r>
+          </a:p>
+        </p:txBody>
+      </p:sp>
+      <p:sp>
+        <p:nvSpPr>
+          <p:cNvPr id="7" name="Slide Number Placeholder 6">
+            <a:extLst>
+              <a:ext uri="{FF2B5EF4-FFF2-40B4-BE49-F238E27FC236}">
+                <a16:creationId xmlns:a16="http://schemas.microsoft.com/office/drawing/2014/main" id="{14F45621-8939-04E9-03B4-11AF180D5862}"/>
+              </a:ext>
+            </a:extLst>
+          </p:cNvPr>
+          <p:cNvSpPr>
+            <a:spLocks noGrp="1"/>
+          </p:cNvSpPr>
+          <p:nvPr>
+            <p:ph type="sldNum" sz="quarter" idx="12"/>
+          </p:nvPr>
+        </p:nvSpPr>
+        <p:spPr/>
+        <p:txBody>
+          <a:bodyPr/>
+          <a:lstStyle/>
+          <a:p>
+            <a:fld id="{D90542D4-23E8-43E0-BA8E-C972DA1A005D}" type="slidenum">
+              <a:rPr lang="en-US" sz="1400" b="1" smtClean="0">
+                <a:solidFill>
+                  <a:schemeClr val="tx1"/>
+                </a:solidFill>
+                <a:latin typeface="Calisto MT" panose="02040603050505030304" pitchFamily="18" charset="0"/>
+              </a:rPr>
+              <a:pPr/>
+              <a:t>17</a:t>
+            </a:fld>
+            <a:endParaRPr lang="en-US" sz="1400" b="1" dirty="0">
+              <a:solidFill>
+                <a:schemeClr val="tx1"/>
+              </a:solidFill>
+              <a:latin typeface="Calisto MT" panose="02040603050505030304" pitchFamily="18" charset="0"/>
+            </a:endParaRPr>
+          </a:p>
+        </p:txBody>
+      </p:sp>
     </p:spTree>
+    <p:extLst>
+      <p:ext uri="{BB962C8B-B14F-4D97-AF65-F5344CB8AC3E}">
+        <p14:creationId xmlns:p14="http://schemas.microsoft.com/office/powerpoint/2010/main" val="2843785032"/>
+      </p:ext>
+    </p:extLst>
   </p:cSld>
   <p:clrMapOvr>
     <a:masterClrMapping/>
@@ -3474,8 +4317,8 @@
 </p:sld>
 </file>
 
-<file path=ppt/slides/slide18.xml><?xml version="1.0" encoding="utf-8"?>
-<p:sld xmlns:a="http://schemas.openxmlformats.org/drawingml/2006/main" xmlns:p="http://schemas.openxmlformats.org/presentationml/2006/main" xmlns:r="http://schemas.openxmlformats.org/officeDocument/2006/relationships">
+<file path=ppt/slides/slide27.xml><?xml version="1.0" encoding="utf-8"?>
+<p:sld xmlns:a="http://schemas.openxmlformats.org/drawingml/2006/main" xmlns:r="http://schemas.openxmlformats.org/officeDocument/2006/relationships" xmlns:p="http://schemas.openxmlformats.org/presentationml/2006/main">
   <p:cSld>
     <p:spTree>
       <p:nvGrpSpPr>
@@ -3483,116 +4326,160 @@
         <p:cNvGrpSpPr/>
         <p:nvPr/>
       </p:nvGrpSpPr>
-      <p:grpSpPr/>
+      <p:grpSpPr>
+        <a:xfrm>
+          <a:off x="0" y="0"/>
+          <a:ext cx="0" cy="0"/>
+          <a:chOff x="0" y="0"/>
+          <a:chExt cx="0" cy="0"/>
+        </a:xfrm>
+      </p:grpSpPr>
+      <p:sp>
+        <p:nvSpPr>
+          <p:cNvPr id="2" name="Title 1">
+            <a:extLst>
+              <a:ext uri="{FF2B5EF4-FFF2-40B4-BE49-F238E27FC236}">
+                <a16:creationId xmlns:a16="http://schemas.microsoft.com/office/drawing/2014/main" id="{5B738971-B764-E045-F92B-01E3322A0123}"/>
+              </a:ext>
+            </a:extLst>
+          </p:cNvPr>
+          <p:cNvSpPr>
+            <a:spLocks noGrp="1"/>
+          </p:cNvSpPr>
+          <p:nvPr>
+            <p:ph type="title"/>
+          </p:nvPr>
+        </p:nvSpPr>
+        <p:spPr>
+          <a:xfrm>
+            <a:off x="202676" y="0"/>
+            <a:ext cx="8738648" cy="747237"/>
+          </a:xfrm>
+        </p:spPr>
+        <p:txBody>
+          <a:bodyPr>
+            <a:noAutofit/>
+          </a:bodyPr>
+          <a:lstStyle/>
+          <a:p>
+            <a:r>
+              <a:rPr lang="en-US" sz="3000" b="1" dirty="0">
+                <a:solidFill>
+                  <a:schemeClr val="accent2">
+                    <a:lumMod val="50000"/>
+                  </a:schemeClr>
+                </a:solidFill>
+                <a:latin typeface="Calisto MT" panose="02040603050505030304" pitchFamily="18" charset="0"/>
+              </a:rPr>
+              <a:t>17.3. Proposed Model</a:t>
+            </a:r>
+          </a:p>
+        </p:txBody>
+      </p:sp>
+      <p:sp>
+        <p:nvSpPr>
+          <p:cNvPr id="7" name="Slide Number Placeholder 6">
+            <a:extLst>
+              <a:ext uri="{FF2B5EF4-FFF2-40B4-BE49-F238E27FC236}">
+                <a16:creationId xmlns:a16="http://schemas.microsoft.com/office/drawing/2014/main" id="{14F45621-8939-04E9-03B4-11AF180D5862}"/>
+              </a:ext>
+            </a:extLst>
+          </p:cNvPr>
+          <p:cNvSpPr>
+            <a:spLocks noGrp="1"/>
+          </p:cNvSpPr>
+          <p:nvPr>
+            <p:ph type="sldNum" sz="quarter" idx="12"/>
+          </p:nvPr>
+        </p:nvSpPr>
+        <p:spPr/>
+        <p:txBody>
+          <a:bodyPr/>
+          <a:lstStyle/>
+          <a:p>
+            <a:fld id="{D90542D4-23E8-43E0-BA8E-C972DA1A005D}" type="slidenum">
+              <a:rPr lang="en-US" sz="1400" b="1" smtClean="0">
+                <a:solidFill>
+                  <a:schemeClr val="tx1"/>
+                </a:solidFill>
+                <a:latin typeface="Calisto MT" panose="02040603050505030304" pitchFamily="18" charset="0"/>
+              </a:rPr>
+              <a:pPr/>
+              <a:t>27</a:t>
+            </a:fld>
+            <a:endParaRPr lang="en-US" sz="1400" b="1" dirty="0">
+              <a:solidFill>
+                <a:schemeClr val="tx1"/>
+              </a:solidFill>
+              <a:latin typeface="Calisto MT" panose="02040603050505030304" pitchFamily="18" charset="0"/>
+            </a:endParaRPr>
+          </a:p>
+        </p:txBody>
+      </p:sp>
       <p:pic>
         <p:nvPicPr>
-          <p:cNvPr id="2" name="Picture 1" descr="16_status.png"/>
+          <p:cNvPr id="8" name="Picture 7" descr="chromgraphfm_architecture_wide.png"/>
           <p:cNvPicPr>
             <a:picLocks noChangeAspect="1"/>
           </p:cNvPicPr>
           <p:nvPr/>
         </p:nvPicPr>
         <p:blipFill>
-          <a:blip r:embed="rId2"/>
+          <a:blip r:embed="rId4"/>
           <a:stretch>
             <a:fillRect/>
           </a:stretch>
         </p:blipFill>
         <p:spPr>
           <a:xfrm>
-            <a:off x="0" y="0"/>
-            <a:ext cx="12191695" cy="6858000"/>
+            <a:off x="228600" y="599616"/>
+            <a:ext cx="8686800" cy="4060581"/>
           </a:xfrm>
           <a:prstGeom prst="rect">
             <a:avLst/>
           </a:prstGeom>
         </p:spPr>
       </p:pic>
-    </p:spTree>
-  </p:cSld>
-  <p:clrMapOvr>
-    <a:masterClrMapping/>
-  </p:clrMapOvr>
-</p:sld>
-</file>
-
-<file path=ppt/slides/slide19.xml><?xml version="1.0" encoding="utf-8"?>
-<p:sld xmlns:a="http://schemas.openxmlformats.org/drawingml/2006/main" xmlns:p="http://schemas.openxmlformats.org/presentationml/2006/main" xmlns:r="http://schemas.openxmlformats.org/officeDocument/2006/relationships">
-  <p:cSld>
-    <p:spTree>
-      <p:nvGrpSpPr>
-        <p:cNvPr id="1" name=""/>
-        <p:cNvGrpSpPr/>
-        <p:nvPr/>
-      </p:nvGrpSpPr>
-      <p:grpSpPr/>
-      <p:pic>
-        <p:nvPicPr>
-          <p:cNvPr id="2" name="Picture 1" descr="17_close.png"/>
-          <p:cNvPicPr>
-            <a:picLocks noChangeAspect="1"/>
-          </p:cNvPicPr>
+      <p:sp>
+        <p:nvSpPr>
+          <p:cNvPr id="9" name="TextBox 8"/>
+          <p:cNvSpPr txBox="1"/>
           <p:nvPr/>
-        </p:nvPicPr>
-        <p:blipFill>
-          <a:blip r:embed="rId2"/>
-          <a:stretch>
-            <a:fillRect/>
-          </a:stretch>
-        </p:blipFill>
+        </p:nvSpPr>
         <p:spPr>
           <a:xfrm>
-            <a:off x="0" y="0"/>
-            <a:ext cx="12191695" cy="6858000"/>
+            <a:off x="365760" y="4715061"/>
+            <a:ext cx="8412480" cy="365760"/>
           </a:xfrm>
           <a:prstGeom prst="rect">
             <a:avLst/>
           </a:prstGeom>
+          <a:noFill/>
         </p:spPr>
-      </p:pic>
+        <p:txBody>
+          <a:bodyPr wrap="square">
+            <a:spAutoFit/>
+          </a:bodyPr>
+          <a:lstStyle/>
+          <a:p>
+            <a:pPr algn="ctr"/>
+            <a:r>
+              <a:rPr sz="1100" i="1">
+                <a:solidFill>
+                  <a:srgbClr val="595959"/>
+                </a:solidFill>
+              </a:rPr>
+              <a:t>Figure 6: ChromGraphFM. The Hi-C-derived edge bias enters the attention score, so the contact map decides which distal windows communicate.</a:t>
+            </a:r>
+          </a:p>
+        </p:txBody>
+      </p:sp>
     </p:spTree>
-  </p:cSld>
-  <p:clrMapOvr>
-    <a:masterClrMapping/>
-  </p:clrMapOvr>
-</p:sld>
-</file>
-
-<file path=ppt/slides/slide2.xml><?xml version="1.0" encoding="utf-8"?>
-<p:sld xmlns:a="http://schemas.openxmlformats.org/drawingml/2006/main" xmlns:p="http://schemas.openxmlformats.org/presentationml/2006/main" xmlns:r="http://schemas.openxmlformats.org/officeDocument/2006/relationships">
-  <p:cSld>
-    <p:spTree>
-      <p:nvGrpSpPr>
-        <p:cNvPr id="1" name=""/>
-        <p:cNvGrpSpPr/>
-        <p:nvPr/>
-      </p:nvGrpSpPr>
-      <p:grpSpPr/>
-      <p:pic>
-        <p:nvPicPr>
-          <p:cNvPr id="2" name="Picture 1" descr="02_problem.png"/>
-          <p:cNvPicPr>
-            <a:picLocks noChangeAspect="1"/>
-          </p:cNvPicPr>
-          <p:nvPr/>
-        </p:nvPicPr>
-        <p:blipFill>
-          <a:blip r:embed="rId2"/>
-          <a:stretch>
-            <a:fillRect/>
-          </a:stretch>
-        </p:blipFill>
-        <p:spPr>
-          <a:xfrm>
-            <a:off x="0" y="0"/>
-            <a:ext cx="12191695" cy="6858000"/>
-          </a:xfrm>
-          <a:prstGeom prst="rect">
-            <a:avLst/>
-          </a:prstGeom>
-        </p:spPr>
-      </p:pic>
-    </p:spTree>
+    <p:extLst>
+      <p:ext uri="{BB962C8B-B14F-4D97-AF65-F5344CB8AC3E}">
+        <p14:creationId xmlns:p14="http://schemas.microsoft.com/office/powerpoint/2010/main" val="852333019"/>
+      </p:ext>
+    </p:extLst>
   </p:cSld>
   <p:clrMapOvr>
     <a:masterClrMapping/>
@@ -3601,7 +4488,7 @@
 </file>
 
 <file path=ppt/slides/slide3.xml><?xml version="1.0" encoding="utf-8"?>
-<p:sld xmlns:a="http://schemas.openxmlformats.org/drawingml/2006/main" xmlns:p="http://schemas.openxmlformats.org/presentationml/2006/main" xmlns:r="http://schemas.openxmlformats.org/officeDocument/2006/relationships">
+<p:sld xmlns:a="http://schemas.openxmlformats.org/drawingml/2006/main" xmlns:r="http://schemas.openxmlformats.org/officeDocument/2006/relationships" xmlns:p="http://schemas.openxmlformats.org/presentationml/2006/main">
   <p:cSld>
     <p:spTree>
       <p:nvGrpSpPr>
@@ -3609,32 +4496,144 @@
         <p:cNvGrpSpPr/>
         <p:nvPr/>
       </p:nvGrpSpPr>
-      <p:grpSpPr/>
-      <p:pic>
-        <p:nvPicPr>
-          <p:cNvPr id="2" name="Picture 1" descr="03_gap.png"/>
-          <p:cNvPicPr>
-            <a:picLocks noChangeAspect="1"/>
-          </p:cNvPicPr>
-          <p:nvPr/>
-        </p:nvPicPr>
-        <p:blipFill>
-          <a:blip r:embed="rId2"/>
-          <a:stretch>
-            <a:fillRect/>
-          </a:stretch>
-        </p:blipFill>
+      <p:grpSpPr>
+        <a:xfrm>
+          <a:off x="0" y="0"/>
+          <a:ext cx="0" cy="0"/>
+          <a:chOff x="0" y="0"/>
+          <a:chExt cx="0" cy="0"/>
+        </a:xfrm>
+      </p:grpSpPr>
+      <p:sp>
+        <p:nvSpPr>
+          <p:cNvPr id="2" name="Title 1">
+            <a:extLst>
+              <a:ext uri="{FF2B5EF4-FFF2-40B4-BE49-F238E27FC236}">
+                <a16:creationId xmlns:a16="http://schemas.microsoft.com/office/drawing/2014/main" id="{5B738971-B764-E045-F92B-01E3322A0123}"/>
+              </a:ext>
+            </a:extLst>
+          </p:cNvPr>
+          <p:cNvSpPr>
+            <a:spLocks noGrp="1"/>
+          </p:cNvSpPr>
+          <p:nvPr>
+            <p:ph type="title"/>
+          </p:nvPr>
+        </p:nvSpPr>
         <p:spPr>
           <a:xfrm>
-            <a:off x="0" y="0"/>
-            <a:ext cx="12191695" cy="6858000"/>
+            <a:off x="628650" y="214298"/>
+            <a:ext cx="7886700" cy="709530"/>
           </a:xfrm>
-          <a:prstGeom prst="rect">
-            <a:avLst/>
-          </a:prstGeom>
         </p:spPr>
-      </p:pic>
+        <p:txBody>
+          <a:bodyPr/>
+          <a:lstStyle/>
+          <a:p>
+            <a:r>
+              <a:rPr lang="en-US" sz="3600" b="1">
+                <a:solidFill>
+                  <a:schemeClr val="accent2">
+                    <a:lumMod val="50000"/>
+                  </a:schemeClr>
+                </a:solidFill>
+                <a:latin typeface="Calisto MT" panose="02040603050505030304" pitchFamily="18" charset="0"/>
+              </a:rPr>
+              <a:t>Abstract</a:t>
+            </a:r>
+            <a:endParaRPr lang="en-US" b="1" dirty="0">
+              <a:solidFill>
+                <a:schemeClr val="accent2">
+                  <a:lumMod val="50000"/>
+                </a:schemeClr>
+              </a:solidFill>
+              <a:latin typeface="Calisto MT" panose="02040603050505030304" pitchFamily="18" charset="0"/>
+            </a:endParaRPr>
+          </a:p>
+        </p:txBody>
+      </p:sp>
+      <p:sp>
+        <p:nvSpPr>
+          <p:cNvPr id="3" name="Content Placeholder 2">
+            <a:extLst>
+              <a:ext uri="{FF2B5EF4-FFF2-40B4-BE49-F238E27FC236}">
+                <a16:creationId xmlns:a16="http://schemas.microsoft.com/office/drawing/2014/main" id="{E5D502BE-F636-7D1D-85F0-BAFFD3E05E1C}"/>
+              </a:ext>
+            </a:extLst>
+          </p:cNvPr>
+          <p:cNvSpPr>
+            <a:spLocks noGrp="1"/>
+          </p:cNvSpPr>
+          <p:nvPr>
+            <p:ph idx="1"/>
+          </p:nvPr>
+        </p:nvSpPr>
+        <p:spPr>
+          <a:xfrm>
+            <a:off x="628649" y="1046376"/>
+            <a:ext cx="8062863" cy="5253135"/>
+          </a:xfrm>
+        </p:spPr>
+        <p:txBody>
+          <a:bodyPr wrap="square">
+            <a:normAutofit/>
+          </a:bodyPr>
+          <a:lstStyle/>
+          <a:p>
+            <a:pPr/>
+            <a:r>
+              <a:rPr sz="1400" b="0"/>
+              <a:t>Three-dimensional chromatin organisation lets distal regulatory elements control gene expression, yet most genomic sequence models treat the genome as a one-dimensional string. This project develops ChromGraphFM, a compact 3D chromatin-conditioned genomic representation model trained from scratch on DNA sequence and Hi-C contact maps. Genomic regions become nodes in a sparse contact graph, and measured Hi-C contact strengths bias attention among distant DNA windows throughout self-supervised pretraining, so structure shapes the sequence representation instead of being appended after it. Pretraining combines masked DNA modelling, distance-matched contact-aware contrastive learning, and chromatin contact prediction. The model is evaluated against sequence-only, shuffled-contact, distance-only, random-graph and late-fusion controls trained at matched parameters, data and compute, using chromosome-level and cell-type held-out splits for contact-map prediction, chromatin loop detection, enhancer-promoter linking and Hi-C-free transfer. The central question is whether experimentally measured 3D structure can be internalised into a reusable DNA representation rather than supplied as an extra input at prediction time.</a:t>
+            </a:r>
+          </a:p>
+        </p:txBody>
+      </p:sp>
+      <p:sp>
+        <p:nvSpPr>
+          <p:cNvPr id="5" name="Slide Number Placeholder 4">
+            <a:extLst>
+              <a:ext uri="{FF2B5EF4-FFF2-40B4-BE49-F238E27FC236}">
+                <a16:creationId xmlns:a16="http://schemas.microsoft.com/office/drawing/2014/main" id="{02E3089C-7D4B-76D0-EDD6-D1FEEE855B77}"/>
+              </a:ext>
+            </a:extLst>
+          </p:cNvPr>
+          <p:cNvSpPr>
+            <a:spLocks noGrp="1"/>
+          </p:cNvSpPr>
+          <p:nvPr>
+            <p:ph type="sldNum" sz="quarter" idx="12"/>
+          </p:nvPr>
+        </p:nvSpPr>
+        <p:spPr/>
+        <p:txBody>
+          <a:bodyPr/>
+          <a:lstStyle/>
+          <a:p>
+            <a:fld id="{D90542D4-23E8-43E0-BA8E-C972DA1A005D}" type="slidenum">
+              <a:rPr lang="en-US" sz="1400" b="1" smtClean="0">
+                <a:solidFill>
+                  <a:schemeClr val="tx1"/>
+                </a:solidFill>
+                <a:latin typeface="Calisto MT" panose="02040603050505030304" pitchFamily="18" charset="0"/>
+              </a:rPr>
+              <a:pPr/>
+              <a:t>3</a:t>
+            </a:fld>
+            <a:endParaRPr lang="en-US" sz="1400" b="1" dirty="0">
+              <a:solidFill>
+                <a:schemeClr val="tx1"/>
+              </a:solidFill>
+              <a:latin typeface="Calisto MT" panose="02040603050505030304" pitchFamily="18" charset="0"/>
+            </a:endParaRPr>
+          </a:p>
+        </p:txBody>
+      </p:sp>
     </p:spTree>
+    <p:extLst>
+      <p:ext uri="{BB962C8B-B14F-4D97-AF65-F5344CB8AC3E}">
+        <p14:creationId xmlns:p14="http://schemas.microsoft.com/office/powerpoint/2010/main" val="3775680061"/>
+      </p:ext>
+    </p:extLst>
   </p:cSld>
   <p:clrMapOvr>
     <a:masterClrMapping/>
@@ -3642,251 +4641,223 @@
 </p:sld>
 </file>
 
-<file path=ppt/slides/slide4.xml><?xml version="1.0" encoding="utf-8"?>
-<p:sld xmlns:a="http://schemas.openxmlformats.org/drawingml/2006/main" xmlns:p="http://schemas.openxmlformats.org/presentationml/2006/main" xmlns:r="http://schemas.openxmlformats.org/officeDocument/2006/relationships">
+<file path=ppt/slides/slide37.xml><?xml version="1.0" encoding="utf-8"?>
+<p:sld xmlns:a="http://schemas.openxmlformats.org/drawingml/2006/main" xmlns:r="http://schemas.openxmlformats.org/officeDocument/2006/relationships" xmlns:p="http://schemas.openxmlformats.org/presentationml/2006/main">
   <p:cSld>
     <p:spTree>
       <p:nvGrpSpPr>
-        <p:cNvPr id="1" name=""/>
+        <p:cNvPr id="1" name="">
+          <a:extLst>
+            <a:ext uri="{FF2B5EF4-FFF2-40B4-BE49-F238E27FC236}">
+              <a16:creationId xmlns:a16="http://schemas.microsoft.com/office/drawing/2014/main" id="{70630335-CE52-15B2-B23A-61DE5AEDCE23}"/>
+            </a:ext>
+          </a:extLst>
+        </p:cNvPr>
         <p:cNvGrpSpPr/>
         <p:nvPr/>
       </p:nvGrpSpPr>
-      <p:grpSpPr/>
-      <p:pic>
-        <p:nvPicPr>
-          <p:cNvPr id="2" name="Picture 1" descr="04_pipeline.png"/>
-          <p:cNvPicPr>
-            <a:picLocks noChangeAspect="1"/>
-          </p:cNvPicPr>
-          <p:nvPr/>
-        </p:nvPicPr>
-        <p:blipFill>
-          <a:blip r:embed="rId2"/>
-          <a:stretch>
-            <a:fillRect/>
-          </a:stretch>
-        </p:blipFill>
+      <p:grpSpPr>
+        <a:xfrm>
+          <a:off x="0" y="0"/>
+          <a:ext cx="0" cy="0"/>
+          <a:chOff x="0" y="0"/>
+          <a:chExt cx="0" cy="0"/>
+        </a:xfrm>
+      </p:grpSpPr>
+      <p:sp>
+        <p:nvSpPr>
+          <p:cNvPr id="2" name="Title 1">
+            <a:extLst>
+              <a:ext uri="{FF2B5EF4-FFF2-40B4-BE49-F238E27FC236}">
+                <a16:creationId xmlns:a16="http://schemas.microsoft.com/office/drawing/2014/main" id="{A1D4A369-88B7-8BAE-FCEC-AD8E807C1CF9}"/>
+              </a:ext>
+            </a:extLst>
+          </p:cNvPr>
+          <p:cNvSpPr>
+            <a:spLocks noGrp="1"/>
+          </p:cNvSpPr>
+          <p:nvPr>
+            <p:ph type="title"/>
+          </p:nvPr>
+        </p:nvSpPr>
         <p:spPr>
           <a:xfrm>
-            <a:off x="0" y="0"/>
-            <a:ext cx="12191695" cy="6858000"/>
+            <a:off x="509047" y="270858"/>
+            <a:ext cx="8006303" cy="549273"/>
           </a:xfrm>
-          <a:prstGeom prst="rect">
-            <a:avLst/>
-          </a:prstGeom>
         </p:spPr>
-      </p:pic>
-    </p:spTree>
-  </p:cSld>
-  <p:clrMapOvr>
-    <a:masterClrMapping/>
-  </p:clrMapOvr>
-</p:sld>
-</file>
-
-<file path=ppt/slides/slide5.xml><?xml version="1.0" encoding="utf-8"?>
-<p:sld xmlns:a="http://schemas.openxmlformats.org/drawingml/2006/main" xmlns:p="http://schemas.openxmlformats.org/presentationml/2006/main" xmlns:r="http://schemas.openxmlformats.org/officeDocument/2006/relationships">
-  <p:cSld>
-    <p:spTree>
-      <p:nvGrpSpPr>
-        <p:cNvPr id="1" name=""/>
-        <p:cNvGrpSpPr/>
-        <p:nvPr/>
-      </p:nvGrpSpPr>
-      <p:grpSpPr/>
-      <p:pic>
-        <p:nvPicPr>
-          <p:cNvPr id="2" name="Picture 1" descr="05_validation.png"/>
-          <p:cNvPicPr>
-            <a:picLocks noChangeAspect="1"/>
-          </p:cNvPicPr>
-          <p:nvPr/>
-        </p:nvPicPr>
-        <p:blipFill>
-          <a:blip r:embed="rId2"/>
-          <a:stretch>
-            <a:fillRect/>
-          </a:stretch>
-        </p:blipFill>
+        <p:txBody>
+          <a:bodyPr>
+            <a:normAutofit fontScale="90000"/>
+          </a:bodyPr>
+          <a:lstStyle/>
+          <a:p>
+            <a:r>
+              <a:rPr lang="en-US" sz="4000" b="1" dirty="0">
+                <a:solidFill>
+                  <a:schemeClr val="accent2">
+                    <a:lumMod val="50000"/>
+                  </a:schemeClr>
+                </a:solidFill>
+                <a:latin typeface="Calisto MT" panose="02040603050505030304" pitchFamily="18" charset="0"/>
+              </a:rPr>
+              <a:t>20. Conclusion &amp; Future Work</a:t>
+            </a:r>
+          </a:p>
+        </p:txBody>
+      </p:sp>
+      <p:sp>
+        <p:nvSpPr>
+          <p:cNvPr id="3" name="Content Placeholder 2">
+            <a:extLst>
+              <a:ext uri="{FF2B5EF4-FFF2-40B4-BE49-F238E27FC236}">
+                <a16:creationId xmlns:a16="http://schemas.microsoft.com/office/drawing/2014/main" id="{CC32D841-5EAC-964D-B444-B7E25133E462}"/>
+              </a:ext>
+            </a:extLst>
+          </p:cNvPr>
+          <p:cNvSpPr>
+            <a:spLocks noGrp="1"/>
+          </p:cNvSpPr>
+          <p:nvPr>
+            <p:ph idx="1"/>
+          </p:nvPr>
+        </p:nvSpPr>
         <p:spPr>
           <a:xfrm>
-            <a:off x="0" y="0"/>
-            <a:ext cx="12191695" cy="6858000"/>
+            <a:off x="509047" y="989813"/>
+            <a:ext cx="8006303" cy="5748157"/>
           </a:xfrm>
-          <a:prstGeom prst="rect">
-            <a:avLst/>
-          </a:prstGeom>
         </p:spPr>
-      </p:pic>
+        <p:txBody>
+          <a:bodyPr numCol="1" wrap="square">
+            <a:normAutofit/>
+          </a:bodyPr>
+          <a:lstStyle/>
+          <a:p>
+            <a:pPr/>
+            <a:r>
+              <a:rPr sz="1400" b="1"/>
+              <a:t>Here, we have discussed</a:t>
+            </a:r>
+          </a:p>
+          <a:p>
+            <a:pPr lvl="1"/>
+            <a:r>
+              <a:rPr sz="1200" b="0"/>
+              <a:t>1. The regulatory problem: enhancers act across megabases, and sequence-only models must infer relationships that have already been measured</a:t>
+            </a:r>
+          </a:p>
+          <a:p>
+            <a:pPr lvl="1"/>
+            <a:r>
+              <a:rPr sz="1200" b="0"/>
+              <a:t>2. A mechanism: measured contact graphs biasing attention inside the encoder throughout pretraining, rather than fusion or post-hoc alignment</a:t>
+            </a:r>
+          </a:p>
+          <a:p>
+            <a:pPr lvl="1"/>
+            <a:r>
+              <a:rPr sz="1200" b="0"/>
+              <a:t>3. A controlled test: matched B0-B5 arms, chromosome and cell-line held-out splits, and a Hi-C-free inference probe</a:t>
+            </a:r>
+          </a:p>
+          <a:p>
+            <a:pPr lvl="1"/>
+            <a:r>
+              <a:rPr sz="1200" b="0"/>
+              <a:t>4. A discipline: no number without a tracked file, no superiority claim without a matched setting</a:t>
+            </a:r>
+          </a:p>
+          <a:p>
+            <a:pPr/>
+            <a:r>
+              <a:rPr sz="1400" b="1"/>
+              <a:t>Future work</a:t>
+            </a:r>
+          </a:p>
+          <a:p>
+            <a:pPr lvl="1"/>
+            <a:r>
+              <a:rPr sz="1200" b="0"/>
+              <a:t>Multi-scale contacts (5 kb plus 25-50 kb) for domains and compartments</a:t>
+            </a:r>
+          </a:p>
+          <a:p>
+            <a:pPr lvl="1"/>
+            <a:r>
+              <a:rPr sz="1200" b="0"/>
+              <a:t>More cell lines; epigenomic tracks as additional node or edge features</a:t>
+            </a:r>
+          </a:p>
+          <a:p>
+            <a:pPr lvl="1"/>
+            <a:r>
+              <a:rPr sz="1200" b="0"/>
+              <a:t>Variant-effect prediction on non-coding GWAS variants</a:t>
+            </a:r>
+          </a:p>
+          <a:p>
+            <a:pPr lvl="1"/>
+            <a:r>
+              <a:rPr sz="1200" b="0"/>
+              <a:t>Cross-species transfer to mouse; single-cell Hi-C with sparse contacts</a:t>
+            </a:r>
+          </a:p>
+          <a:p>
+            <a:pPr lvl="1"/>
+            <a:r>
+              <a:rPr sz="1200" b="0"/>
+              <a:t>A stronger backbone via parameter-efficient adaptation of Caduceus</a:t>
+            </a:r>
+          </a:p>
+        </p:txBody>
+      </p:sp>
+      <p:sp>
+        <p:nvSpPr>
+          <p:cNvPr id="7" name="Slide Number Placeholder 6">
+            <a:extLst>
+              <a:ext uri="{FF2B5EF4-FFF2-40B4-BE49-F238E27FC236}">
+                <a16:creationId xmlns:a16="http://schemas.microsoft.com/office/drawing/2014/main" id="{264345BD-7715-5CB3-45A7-6CEB49B2721A}"/>
+              </a:ext>
+            </a:extLst>
+          </p:cNvPr>
+          <p:cNvSpPr>
+            <a:spLocks noGrp="1"/>
+          </p:cNvSpPr>
+          <p:nvPr>
+            <p:ph type="sldNum" sz="quarter" idx="12"/>
+          </p:nvPr>
+        </p:nvSpPr>
+        <p:spPr/>
+        <p:txBody>
+          <a:bodyPr/>
+          <a:lstStyle/>
+          <a:p>
+            <a:fld id="{D90542D4-23E8-43E0-BA8E-C972DA1A005D}" type="slidenum">
+              <a:rPr lang="en-US" sz="1400" b="1" smtClean="0">
+                <a:solidFill>
+                  <a:schemeClr val="tx1"/>
+                </a:solidFill>
+                <a:latin typeface="Calisto MT" panose="02040603050505030304" pitchFamily="18" charset="0"/>
+              </a:rPr>
+              <a:pPr/>
+              <a:t>37</a:t>
+            </a:fld>
+            <a:endParaRPr lang="en-US" sz="1400" b="1" dirty="0">
+              <a:solidFill>
+                <a:schemeClr val="tx1"/>
+              </a:solidFill>
+              <a:latin typeface="Calisto MT" panose="02040603050505030304" pitchFamily="18" charset="0"/>
+            </a:endParaRPr>
+          </a:p>
+        </p:txBody>
+      </p:sp>
     </p:spTree>
-  </p:cSld>
-  <p:clrMapOvr>
-    <a:masterClrMapping/>
-  </p:clrMapOvr>
-</p:sld>
-</file>
-
-<file path=ppt/slides/slide6.xml><?xml version="1.0" encoding="utf-8"?>
-<p:sld xmlns:a="http://schemas.openxmlformats.org/drawingml/2006/main" xmlns:p="http://schemas.openxmlformats.org/presentationml/2006/main" xmlns:r="http://schemas.openxmlformats.org/officeDocument/2006/relationships">
-  <p:cSld>
-    <p:spTree>
-      <p:nvGrpSpPr>
-        <p:cNvPr id="1" name=""/>
-        <p:cNvGrpSpPr/>
-        <p:nvPr/>
-      </p:nvGrpSpPr>
-      <p:grpSpPr/>
-      <p:pic>
-        <p:nvPicPr>
-          <p:cNvPr id="2" name="Picture 1" descr="06_mechanism.png"/>
-          <p:cNvPicPr>
-            <a:picLocks noChangeAspect="1"/>
-          </p:cNvPicPr>
-          <p:nvPr/>
-        </p:nvPicPr>
-        <p:blipFill>
-          <a:blip r:embed="rId2"/>
-          <a:stretch>
-            <a:fillRect/>
-          </a:stretch>
-        </p:blipFill>
-        <p:spPr>
-          <a:xfrm>
-            <a:off x="0" y="0"/>
-            <a:ext cx="12191695" cy="6858000"/>
-          </a:xfrm>
-          <a:prstGeom prst="rect">
-            <a:avLst/>
-          </a:prstGeom>
-        </p:spPr>
-      </p:pic>
-    </p:spTree>
-  </p:cSld>
-  <p:clrMapOvr>
-    <a:masterClrMapping/>
-  </p:clrMapOvr>
-</p:sld>
-</file>
-
-<file path=ppt/slides/slide7.xml><?xml version="1.0" encoding="utf-8"?>
-<p:sld xmlns:a="http://schemas.openxmlformats.org/drawingml/2006/main" xmlns:p="http://schemas.openxmlformats.org/presentationml/2006/main" xmlns:r="http://schemas.openxmlformats.org/officeDocument/2006/relationships">
-  <p:cSld>
-    <p:spTree>
-      <p:nvGrpSpPr>
-        <p:cNvPr id="1" name=""/>
-        <p:cNvGrpSpPr/>
-        <p:nvPr/>
-      </p:nvGrpSpPr>
-      <p:grpSpPr/>
-      <p:pic>
-        <p:nvPicPr>
-          <p:cNvPr id="2" name="Picture 1" descr="07_matched.png"/>
-          <p:cNvPicPr>
-            <a:picLocks noChangeAspect="1"/>
-          </p:cNvPicPr>
-          <p:nvPr/>
-        </p:nvPicPr>
-        <p:blipFill>
-          <a:blip r:embed="rId2"/>
-          <a:stretch>
-            <a:fillRect/>
-          </a:stretch>
-        </p:blipFill>
-        <p:spPr>
-          <a:xfrm>
-            <a:off x="0" y="0"/>
-            <a:ext cx="12191695" cy="6858000"/>
-          </a:xfrm>
-          <a:prstGeom prst="rect">
-            <a:avLst/>
-          </a:prstGeom>
-        </p:spPr>
-      </p:pic>
-    </p:spTree>
-  </p:cSld>
-  <p:clrMapOvr>
-    <a:masterClrMapping/>
-  </p:clrMapOvr>
-</p:sld>
-</file>
-
-<file path=ppt/slides/slide8.xml><?xml version="1.0" encoding="utf-8"?>
-<p:sld xmlns:a="http://schemas.openxmlformats.org/drawingml/2006/main" xmlns:p="http://schemas.openxmlformats.org/presentationml/2006/main" xmlns:r="http://schemas.openxmlformats.org/officeDocument/2006/relationships">
-  <p:cSld>
-    <p:spTree>
-      <p:nvGrpSpPr>
-        <p:cNvPr id="1" name=""/>
-        <p:cNvGrpSpPr/>
-        <p:nvPr/>
-      </p:nvGrpSpPr>
-      <p:grpSpPr/>
-      <p:pic>
-        <p:nvPicPr>
-          <p:cNvPr id="2" name="Picture 1" descr="08_f4.png"/>
-          <p:cNvPicPr>
-            <a:picLocks noChangeAspect="1"/>
-          </p:cNvPicPr>
-          <p:nvPr/>
-        </p:nvPicPr>
-        <p:blipFill>
-          <a:blip r:embed="rId2"/>
-          <a:stretch>
-            <a:fillRect/>
-          </a:stretch>
-        </p:blipFill>
-        <p:spPr>
-          <a:xfrm>
-            <a:off x="0" y="0"/>
-            <a:ext cx="12191695" cy="6858000"/>
-          </a:xfrm>
-          <a:prstGeom prst="rect">
-            <a:avLst/>
-          </a:prstGeom>
-        </p:spPr>
-      </p:pic>
-    </p:spTree>
-  </p:cSld>
-  <p:clrMapOvr>
-    <a:masterClrMapping/>
-  </p:clrMapOvr>
-</p:sld>
-</file>
-
-<file path=ppt/slides/slide9.xml><?xml version="1.0" encoding="utf-8"?>
-<p:sld xmlns:a="http://schemas.openxmlformats.org/drawingml/2006/main" xmlns:p="http://schemas.openxmlformats.org/presentationml/2006/main" xmlns:r="http://schemas.openxmlformats.org/officeDocument/2006/relationships">
-  <p:cSld>
-    <p:spTree>
-      <p:nvGrpSpPr>
-        <p:cNvPr id="1" name=""/>
-        <p:cNvGrpSpPr/>
-        <p:nvPr/>
-      </p:nvGrpSpPr>
-      <p:grpSpPr/>
-      <p:pic>
-        <p:nvPicPr>
-          <p:cNvPr id="2" name="Picture 1" descr="09_negative.png"/>
-          <p:cNvPicPr>
-            <a:picLocks noChangeAspect="1"/>
-          </p:cNvPicPr>
-          <p:nvPr/>
-        </p:nvPicPr>
-        <p:blipFill>
-          <a:blip r:embed="rId2"/>
-          <a:stretch>
-            <a:fillRect/>
-          </a:stretch>
-        </p:blipFill>
-        <p:spPr>
-          <a:xfrm>
-            <a:off x="0" y="0"/>
-            <a:ext cx="12191695" cy="6858000"/>
-          </a:xfrm>
-          <a:prstGeom prst="rect">
-            <a:avLst/>
-          </a:prstGeom>
-        </p:spPr>
-      </p:pic>
-    </p:spTree>
+    <p:extLst>
+      <p:ext uri="{BB962C8B-B14F-4D97-AF65-F5344CB8AC3E}">
+        <p14:creationId xmlns:p14="http://schemas.microsoft.com/office/powerpoint/2010/main" val="3299475105"/>
+      </p:ext>
+    </p:extLst>
   </p:cSld>
   <p:clrMapOvr>
     <a:masterClrMapping/>
@@ -3897,7 +4868,7 @@
 <file path=ppt/theme/theme1.xml><?xml version="1.0" encoding="utf-8"?>
 <a:theme xmlns:a="http://schemas.openxmlformats.org/drawingml/2006/main" name="Office Theme">
   <a:themeElements>
-    <a:clrScheme name="Office">
+    <a:clrScheme name="Office Theme">
       <a:dk1>
         <a:sysClr val="windowText" lastClr="000000"/>
       </a:dk1>
@@ -3905,44 +4876,44 @@
         <a:sysClr val="window" lastClr="FFFFFF"/>
       </a:lt1>
       <a:dk2>
-        <a:srgbClr val="1F497D"/>
+        <a:srgbClr val="44546A"/>
       </a:dk2>
       <a:lt2>
-        <a:srgbClr val="EEECE1"/>
+        <a:srgbClr val="E7E6E6"/>
       </a:lt2>
       <a:accent1>
-        <a:srgbClr val="4F81BD"/>
+        <a:srgbClr val="4472C4"/>
       </a:accent1>
       <a:accent2>
-        <a:srgbClr val="C0504D"/>
+        <a:srgbClr val="ED7D31"/>
       </a:accent2>
       <a:accent3>
-        <a:srgbClr val="9BBB59"/>
+        <a:srgbClr val="A5A5A5"/>
       </a:accent3>
       <a:accent4>
-        <a:srgbClr val="8064A2"/>
+        <a:srgbClr val="FFC000"/>
       </a:accent4>
       <a:accent5>
-        <a:srgbClr val="4BACC6"/>
+        <a:srgbClr val="5B9BD5"/>
       </a:accent5>
       <a:accent6>
-        <a:srgbClr val="F79646"/>
+        <a:srgbClr val="70AD47"/>
       </a:accent6>
       <a:hlink>
-        <a:srgbClr val="0000FF"/>
+        <a:srgbClr val="0563C1"/>
       </a:hlink>
       <a:folHlink>
-        <a:srgbClr val="800080"/>
+        <a:srgbClr val="954F72"/>
       </a:folHlink>
     </a:clrScheme>
-    <a:fontScheme name="Office">
+    <a:fontScheme name="Office Theme">
       <a:majorFont>
-        <a:latin typeface="Calibri"/>
+        <a:latin typeface="Calibri Light"/>
         <a:ea typeface=""/>
         <a:cs typeface=""/>
-        <a:font script="Jpan" typeface="ＭＳ Ｐゴシック"/>
+        <a:font script="Jpan" typeface="游ゴシック Light"/>
         <a:font script="Hang" typeface="맑은 고딕"/>
-        <a:font script="Hans" typeface="宋体"/>
+        <a:font script="Hans" typeface="等线 Light"/>
         <a:font script="Hant" typeface="新細明體"/>
         <a:font script="Arab" typeface="Times New Roman"/>
         <a:font script="Hebr" typeface="Times New Roman"/>
@@ -3975,9 +4946,9 @@
         <a:latin typeface="Calibri"/>
         <a:ea typeface=""/>
         <a:cs typeface=""/>
-        <a:font script="Jpan" typeface="ＭＳ Ｐゴシック"/>
+        <a:font script="Jpan" typeface="游ゴシック"/>
         <a:font script="Hang" typeface="맑은 고딕"/>
-        <a:font script="Hans" typeface="宋体"/>
+        <a:font script="Hans" typeface="等线"/>
         <a:font script="Hant" typeface="新細明體"/>
         <a:font script="Arab" typeface="Arial"/>
         <a:font script="Hebr" typeface="Arial"/>
@@ -4007,6 +4978,301 @@
         <a:font script="Geor" typeface="Sylfaen"/>
       </a:minorFont>
     </a:fontScheme>
+    <a:fmtScheme name="Office Theme">
+      <a:fillStyleLst>
+        <a:solidFill>
+          <a:schemeClr val="phClr"/>
+        </a:solidFill>
+        <a:gradFill rotWithShape="1">
+          <a:gsLst>
+            <a:gs pos="0">
+              <a:schemeClr val="phClr">
+                <a:lumMod val="110000"/>
+                <a:satMod val="105000"/>
+                <a:tint val="67000"/>
+              </a:schemeClr>
+            </a:gs>
+            <a:gs pos="50000">
+              <a:schemeClr val="phClr">
+                <a:lumMod val="105000"/>
+                <a:satMod val="103000"/>
+                <a:tint val="73000"/>
+              </a:schemeClr>
+            </a:gs>
+            <a:gs pos="100000">
+              <a:schemeClr val="phClr">
+                <a:lumMod val="105000"/>
+                <a:satMod val="109000"/>
+                <a:tint val="81000"/>
+              </a:schemeClr>
+            </a:gs>
+          </a:gsLst>
+          <a:lin ang="5400000" scaled="0"/>
+        </a:gradFill>
+        <a:gradFill rotWithShape="1">
+          <a:gsLst>
+            <a:gs pos="0">
+              <a:schemeClr val="phClr">
+                <a:satMod val="103000"/>
+                <a:lumMod val="102000"/>
+                <a:tint val="94000"/>
+              </a:schemeClr>
+            </a:gs>
+            <a:gs pos="50000">
+              <a:schemeClr val="phClr">
+                <a:satMod val="110000"/>
+                <a:lumMod val="100000"/>
+                <a:shade val="100000"/>
+              </a:schemeClr>
+            </a:gs>
+            <a:gs pos="100000">
+              <a:schemeClr val="phClr">
+                <a:lumMod val="99000"/>
+                <a:satMod val="120000"/>
+                <a:shade val="78000"/>
+              </a:schemeClr>
+            </a:gs>
+          </a:gsLst>
+          <a:lin ang="5400000" scaled="0"/>
+        </a:gradFill>
+      </a:fillStyleLst>
+      <a:lnStyleLst>
+        <a:ln w="6350" cap="flat" cmpd="sng" algn="ctr">
+          <a:solidFill>
+            <a:schemeClr val="phClr"/>
+          </a:solidFill>
+          <a:prstDash val="solid"/>
+          <a:miter lim="800000"/>
+        </a:ln>
+        <a:ln w="12700" cap="flat" cmpd="sng" algn="ctr">
+          <a:solidFill>
+            <a:schemeClr val="phClr"/>
+          </a:solidFill>
+          <a:prstDash val="solid"/>
+          <a:miter lim="800000"/>
+        </a:ln>
+        <a:ln w="19050" cap="flat" cmpd="sng" algn="ctr">
+          <a:solidFill>
+            <a:schemeClr val="phClr"/>
+          </a:solidFill>
+          <a:prstDash val="solid"/>
+          <a:miter lim="800000"/>
+        </a:ln>
+      </a:lnStyleLst>
+      <a:effectStyleLst>
+        <a:effectStyle>
+          <a:effectLst/>
+        </a:effectStyle>
+        <a:effectStyle>
+          <a:effectLst/>
+        </a:effectStyle>
+        <a:effectStyle>
+          <a:effectLst>
+            <a:outerShdw blurRad="57150" dist="19050" dir="5400000" algn="ctr" rotWithShape="0">
+              <a:srgbClr val="000000">
+                <a:alpha val="63000"/>
+              </a:srgbClr>
+            </a:outerShdw>
+          </a:effectLst>
+        </a:effectStyle>
+      </a:effectStyleLst>
+      <a:bgFillStyleLst>
+        <a:solidFill>
+          <a:schemeClr val="phClr"/>
+        </a:solidFill>
+        <a:solidFill>
+          <a:schemeClr val="phClr">
+            <a:tint val="95000"/>
+            <a:satMod val="170000"/>
+          </a:schemeClr>
+        </a:solidFill>
+        <a:gradFill rotWithShape="1">
+          <a:gsLst>
+            <a:gs pos="0">
+              <a:schemeClr val="phClr">
+                <a:tint val="93000"/>
+                <a:satMod val="150000"/>
+                <a:shade val="98000"/>
+                <a:lumMod val="102000"/>
+              </a:schemeClr>
+            </a:gs>
+            <a:gs pos="50000">
+              <a:schemeClr val="phClr">
+                <a:tint val="98000"/>
+                <a:satMod val="130000"/>
+                <a:shade val="90000"/>
+                <a:lumMod val="103000"/>
+              </a:schemeClr>
+            </a:gs>
+            <a:gs pos="100000">
+              <a:schemeClr val="phClr">
+                <a:shade val="63000"/>
+                <a:satMod val="120000"/>
+              </a:schemeClr>
+            </a:gs>
+          </a:gsLst>
+          <a:lin ang="5400000" scaled="0"/>
+        </a:gradFill>
+      </a:bgFillStyleLst>
+    </a:fmtScheme>
+  </a:themeElements>
+  <a:objectDefaults/>
+  <a:extraClrSchemeLst/>
+  <a:extLst>
+    <a:ext uri="{05A4C25C-085E-4340-85A3-A5531E510DB2}">
+      <thm15:themeFamily xmlns:thm15="http://schemas.microsoft.com/office/thememl/2012/main" name="Office Theme 2013 - 2022" id="{62F939B6-93AF-4DB8-9C6B-D6C7DFDC589F}" vid="{4A3C46E8-61CC-4603-A589-7422A47A8E4A}"/>
+    </a:ext>
+  </a:extLst>
+</a:theme>
+</file>
+
+<file path=ppt/theme/theme2.xml><?xml version="1.0" encoding="utf-8"?>
+<a:theme xmlns:a="http://schemas.openxmlformats.org/drawingml/2006/main" name="Office Theme">
+  <a:themeElements>
+    <a:clrScheme name="Office">
+      <a:dk1>
+        <a:sysClr val="windowText" lastClr="000000"/>
+      </a:dk1>
+      <a:lt1>
+        <a:sysClr val="window" lastClr="FFFFFF"/>
+      </a:lt1>
+      <a:dk2>
+        <a:srgbClr val="44546A"/>
+      </a:dk2>
+      <a:lt2>
+        <a:srgbClr val="E7E6E6"/>
+      </a:lt2>
+      <a:accent1>
+        <a:srgbClr val="4472C4"/>
+      </a:accent1>
+      <a:accent2>
+        <a:srgbClr val="ED7D31"/>
+      </a:accent2>
+      <a:accent3>
+        <a:srgbClr val="A5A5A5"/>
+      </a:accent3>
+      <a:accent4>
+        <a:srgbClr val="FFC000"/>
+      </a:accent4>
+      <a:accent5>
+        <a:srgbClr val="5B9BD5"/>
+      </a:accent5>
+      <a:accent6>
+        <a:srgbClr val="70AD47"/>
+      </a:accent6>
+      <a:hlink>
+        <a:srgbClr val="0563C1"/>
+      </a:hlink>
+      <a:folHlink>
+        <a:srgbClr val="954F72"/>
+      </a:folHlink>
+    </a:clrScheme>
+    <a:fontScheme name="Office">
+      <a:majorFont>
+        <a:latin typeface="Calibri Light"/>
+        <a:ea typeface=""/>
+        <a:cs typeface=""/>
+        <a:font script="Jpan" typeface="游ゴシック Light"/>
+        <a:font script="Hang" typeface="맑은 고딕"/>
+        <a:font script="Hans" typeface="等线 Light"/>
+        <a:font script="Hant" typeface="新細明體"/>
+        <a:font script="Arab" typeface="Times New Roman"/>
+        <a:font script="Hebr" typeface="Times New Roman"/>
+        <a:font script="Thai" typeface="Angsana New"/>
+        <a:font script="Ethi" typeface="Nyala"/>
+        <a:font script="Beng" typeface="Vrinda"/>
+        <a:font script="Gujr" typeface="Shruti"/>
+        <a:font script="Khmr" typeface="MoolBoran"/>
+        <a:font script="Knda" typeface="Tunga"/>
+        <a:font script="Guru" typeface="Raavi"/>
+        <a:font script="Cans" typeface="Euphemia"/>
+        <a:font script="Cher" typeface="Plantagenet Cherokee"/>
+        <a:font script="Yiii" typeface="Microsoft Yi Baiti"/>
+        <a:font script="Tibt" typeface="Microsoft Himalaya"/>
+        <a:font script="Thaa" typeface="MV Boli"/>
+        <a:font script="Deva" typeface="Mangal"/>
+        <a:font script="Telu" typeface="Gautami"/>
+        <a:font script="Taml" typeface="Latha"/>
+        <a:font script="Syrc" typeface="Estrangelo Edessa"/>
+        <a:font script="Orya" typeface="Kalinga"/>
+        <a:font script="Mlym" typeface="Kartika"/>
+        <a:font script="Laoo" typeface="DokChampa"/>
+        <a:font script="Sinh" typeface="Iskoola Pota"/>
+        <a:font script="Mong" typeface="Mongolian Baiti"/>
+        <a:font script="Viet" typeface="Times New Roman"/>
+        <a:font script="Uigh" typeface="Microsoft Uighur"/>
+        <a:font script="Geor" typeface="Sylfaen"/>
+        <a:font script="Armn" typeface="Arial"/>
+        <a:font script="Bugi" typeface="Leelawadee UI"/>
+        <a:font script="Bopo" typeface="Microsoft JhengHei"/>
+        <a:font script="Java" typeface="Javanese Text"/>
+        <a:font script="Lisu" typeface="Segoe UI"/>
+        <a:font script="Mymr" typeface="Myanmar Text"/>
+        <a:font script="Nkoo" typeface="Ebrima"/>
+        <a:font script="Olck" typeface="Nirmala UI"/>
+        <a:font script="Osma" typeface="Ebrima"/>
+        <a:font script="Phag" typeface="Phagspa"/>
+        <a:font script="Syrn" typeface="Estrangelo Edessa"/>
+        <a:font script="Syrj" typeface="Estrangelo Edessa"/>
+        <a:font script="Syre" typeface="Estrangelo Edessa"/>
+        <a:font script="Sora" typeface="Nirmala UI"/>
+        <a:font script="Tale" typeface="Microsoft Tai Le"/>
+        <a:font script="Talu" typeface="Microsoft New Tai Lue"/>
+        <a:font script="Tfng" typeface="Ebrima"/>
+      </a:majorFont>
+      <a:minorFont>
+        <a:latin typeface="Calibri"/>
+        <a:ea typeface=""/>
+        <a:cs typeface=""/>
+        <a:font script="Jpan" typeface="游ゴシック"/>
+        <a:font script="Hang" typeface="맑은 고딕"/>
+        <a:font script="Hans" typeface="等线"/>
+        <a:font script="Hant" typeface="新細明體"/>
+        <a:font script="Arab" typeface="Arial"/>
+        <a:font script="Hebr" typeface="Arial"/>
+        <a:font script="Thai" typeface="Cordia New"/>
+        <a:font script="Ethi" typeface="Nyala"/>
+        <a:font script="Beng" typeface="Vrinda"/>
+        <a:font script="Gujr" typeface="Shruti"/>
+        <a:font script="Khmr" typeface="DaunPenh"/>
+        <a:font script="Knda" typeface="Tunga"/>
+        <a:font script="Guru" typeface="Raavi"/>
+        <a:font script="Cans" typeface="Euphemia"/>
+        <a:font script="Cher" typeface="Plantagenet Cherokee"/>
+        <a:font script="Yiii" typeface="Microsoft Yi Baiti"/>
+        <a:font script="Tibt" typeface="Microsoft Himalaya"/>
+        <a:font script="Thaa" typeface="MV Boli"/>
+        <a:font script="Deva" typeface="Mangal"/>
+        <a:font script="Telu" typeface="Gautami"/>
+        <a:font script="Taml" typeface="Latha"/>
+        <a:font script="Syrc" typeface="Estrangelo Edessa"/>
+        <a:font script="Orya" typeface="Kalinga"/>
+        <a:font script="Mlym" typeface="Kartika"/>
+        <a:font script="Laoo" typeface="DokChampa"/>
+        <a:font script="Sinh" typeface="Iskoola Pota"/>
+        <a:font script="Mong" typeface="Mongolian Baiti"/>
+        <a:font script="Viet" typeface="Arial"/>
+        <a:font script="Uigh" typeface="Microsoft Uighur"/>
+        <a:font script="Geor" typeface="Sylfaen"/>
+        <a:font script="Armn" typeface="Arial"/>
+        <a:font script="Bugi" typeface="Leelawadee UI"/>
+        <a:font script="Bopo" typeface="Microsoft JhengHei"/>
+        <a:font script="Java" typeface="Javanese Text"/>
+        <a:font script="Lisu" typeface="Segoe UI"/>
+        <a:font script="Mymr" typeface="Myanmar Text"/>
+        <a:font script="Nkoo" typeface="Ebrima"/>
+        <a:font script="Olck" typeface="Nirmala UI"/>
+        <a:font script="Osma" typeface="Ebrima"/>
+        <a:font script="Phag" typeface="Phagspa"/>
+        <a:font script="Syrn" typeface="Estrangelo Edessa"/>
+        <a:font script="Syrj" typeface="Estrangelo Edessa"/>
+        <a:font script="Syre" typeface="Estrangelo Edessa"/>
+        <a:font script="Sora" typeface="Nirmala UI"/>
+        <a:font script="Tale" typeface="Microsoft Tai Le"/>
+        <a:font script="Talu" typeface="Microsoft New Tai Lue"/>
+        <a:font script="Tfng" typeface="Ebrima"/>
+      </a:minorFont>
+    </a:fontScheme>
     <a:fmtScheme name="Office">
       <a:fillStyleLst>
         <a:solidFill>
@@ -4016,200 +5282,141 @@
           <a:gsLst>
             <a:gs pos="0">
               <a:schemeClr val="phClr">
-                <a:tint val="50000"/>
-                <a:satMod val="300000"/>
+                <a:lumMod val="110000"/>
+                <a:satMod val="105000"/>
+                <a:tint val="67000"/>
               </a:schemeClr>
             </a:gs>
-            <a:gs pos="35000">
+            <a:gs pos="50000">
               <a:schemeClr val="phClr">
-                <a:tint val="37000"/>
-                <a:satMod val="300000"/>
+                <a:lumMod val="105000"/>
+                <a:satMod val="103000"/>
+                <a:tint val="73000"/>
               </a:schemeClr>
             </a:gs>
             <a:gs pos="100000">
               <a:schemeClr val="phClr">
-                <a:tint val="15000"/>
-                <a:satMod val="350000"/>
+                <a:lumMod val="105000"/>
+                <a:satMod val="109000"/>
+                <a:tint val="81000"/>
               </a:schemeClr>
             </a:gs>
           </a:gsLst>
-          <a:lin ang="16200000" scaled="1"/>
+          <a:lin ang="5400000" scaled="0"/>
         </a:gradFill>
         <a:gradFill rotWithShape="1">
           <a:gsLst>
             <a:gs pos="0">
               <a:schemeClr val="phClr">
-                <a:tint val="100000"/>
+                <a:satMod val="103000"/>
+                <a:lumMod val="102000"/>
+                <a:tint val="94000"/>
+              </a:schemeClr>
+            </a:gs>
+            <a:gs pos="50000">
+              <a:schemeClr val="phClr">
+                <a:satMod val="110000"/>
+                <a:lumMod val="100000"/>
                 <a:shade val="100000"/>
-                <a:satMod val="130000"/>
               </a:schemeClr>
             </a:gs>
             <a:gs pos="100000">
               <a:schemeClr val="phClr">
-                <a:tint val="50000"/>
-                <a:shade val="100000"/>
-                <a:satMod val="350000"/>
+                <a:lumMod val="99000"/>
+                <a:satMod val="120000"/>
+                <a:shade val="78000"/>
               </a:schemeClr>
             </a:gs>
           </a:gsLst>
-          <a:lin ang="16200000" scaled="0"/>
+          <a:lin ang="5400000" scaled="0"/>
         </a:gradFill>
       </a:fillStyleLst>
       <a:lnStyleLst>
-        <a:ln w="9525" cap="flat" cmpd="sng" algn="ctr">
-          <a:solidFill>
-            <a:schemeClr val="phClr">
-              <a:shade val="95000"/>
-              <a:satMod val="105000"/>
-            </a:schemeClr>
-          </a:solidFill>
-          <a:prstDash val="solid"/>
-        </a:ln>
-        <a:ln w="25400" cap="flat" cmpd="sng" algn="ctr">
+        <a:ln w="6350" cap="flat" cmpd="sng" algn="ctr">
           <a:solidFill>
             <a:schemeClr val="phClr"/>
           </a:solidFill>
           <a:prstDash val="solid"/>
+          <a:miter lim="800000"/>
         </a:ln>
-        <a:ln w="38100" cap="flat" cmpd="sng" algn="ctr">
+        <a:ln w="12700" cap="flat" cmpd="sng" algn="ctr">
           <a:solidFill>
             <a:schemeClr val="phClr"/>
           </a:solidFill>
           <a:prstDash val="solid"/>
+          <a:miter lim="800000"/>
+        </a:ln>
+        <a:ln w="19050" cap="flat" cmpd="sng" algn="ctr">
+          <a:solidFill>
+            <a:schemeClr val="phClr"/>
+          </a:solidFill>
+          <a:prstDash val="solid"/>
+          <a:miter lim="800000"/>
         </a:ln>
       </a:lnStyleLst>
       <a:effectStyleLst>
         <a:effectStyle>
+          <a:effectLst/>
+        </a:effectStyle>
+        <a:effectStyle>
+          <a:effectLst/>
+        </a:effectStyle>
+        <a:effectStyle>
           <a:effectLst>
-            <a:outerShdw blurRad="40000" dist="20000" dir="5400000" rotWithShape="0">
+            <a:outerShdw blurRad="57150" dist="19050" dir="5400000" algn="ctr" rotWithShape="0">
               <a:srgbClr val="000000">
-                <a:alpha val="38000"/>
+                <a:alpha val="63000"/>
               </a:srgbClr>
             </a:outerShdw>
           </a:effectLst>
-        </a:effectStyle>
-        <a:effectStyle>
-          <a:effectLst>
-            <a:outerShdw blurRad="40000" dist="23000" dir="5400000" rotWithShape="0">
-              <a:srgbClr val="000000">
-                <a:alpha val="35000"/>
-              </a:srgbClr>
-            </a:outerShdw>
-          </a:effectLst>
-        </a:effectStyle>
-        <a:effectStyle>
-          <a:effectLst>
-            <a:outerShdw blurRad="40000" dist="23000" dir="5400000" rotWithShape="0">
-              <a:srgbClr val="000000">
-                <a:alpha val="35000"/>
-              </a:srgbClr>
-            </a:outerShdw>
-          </a:effectLst>
-          <a:scene3d>
-            <a:camera prst="orthographicFront">
-              <a:rot lat="0" lon="0" rev="0"/>
-            </a:camera>
-            <a:lightRig rig="threePt" dir="t">
-              <a:rot lat="0" lon="0" rev="1200000"/>
-            </a:lightRig>
-          </a:scene3d>
-          <a:sp3d>
-            <a:bevelT w="63500" h="25400"/>
-          </a:sp3d>
         </a:effectStyle>
       </a:effectStyleLst>
       <a:bgFillStyleLst>
         <a:solidFill>
           <a:schemeClr val="phClr"/>
         </a:solidFill>
+        <a:solidFill>
+          <a:schemeClr val="phClr">
+            <a:tint val="95000"/>
+            <a:satMod val="170000"/>
+          </a:schemeClr>
+        </a:solidFill>
         <a:gradFill rotWithShape="1">
           <a:gsLst>
             <a:gs pos="0">
               <a:schemeClr val="phClr">
-                <a:tint val="40000"/>
-                <a:satMod val="350000"/>
+                <a:tint val="93000"/>
+                <a:satMod val="150000"/>
+                <a:shade val="98000"/>
+                <a:lumMod val="102000"/>
               </a:schemeClr>
             </a:gs>
-            <a:gs pos="40000">
+            <a:gs pos="50000">
               <a:schemeClr val="phClr">
-                <a:tint val="45000"/>
-                <a:shade val="99000"/>
-                <a:satMod val="350000"/>
+                <a:tint val="98000"/>
+                <a:satMod val="130000"/>
+                <a:shade val="90000"/>
+                <a:lumMod val="103000"/>
               </a:schemeClr>
             </a:gs>
             <a:gs pos="100000">
               <a:schemeClr val="phClr">
-                <a:shade val="20000"/>
-                <a:satMod val="255000"/>
+                <a:shade val="63000"/>
+                <a:satMod val="120000"/>
               </a:schemeClr>
             </a:gs>
           </a:gsLst>
-          <a:path path="circle">
-            <a:fillToRect l="50000" t="-80000" r="50000" b="180000"/>
-          </a:path>
-        </a:gradFill>
-        <a:gradFill rotWithShape="1">
-          <a:gsLst>
-            <a:gs pos="0">
-              <a:schemeClr val="phClr">
-                <a:tint val="80000"/>
-                <a:satMod val="300000"/>
-              </a:schemeClr>
-            </a:gs>
-            <a:gs pos="100000">
-              <a:schemeClr val="phClr">
-                <a:shade val="30000"/>
-                <a:satMod val="200000"/>
-              </a:schemeClr>
-            </a:gs>
-          </a:gsLst>
-          <a:path path="circle">
-            <a:fillToRect l="50000" t="50000" r="50000" b="50000"/>
-          </a:path>
+          <a:lin ang="5400000" scaled="0"/>
         </a:gradFill>
       </a:bgFillStyleLst>
     </a:fmtScheme>
   </a:themeElements>
-  <a:objectDefaults>
-    <a:spDef>
-      <a:spPr/>
-      <a:bodyPr/>
-      <a:lstStyle/>
-      <a:style>
-        <a:lnRef idx="1">
-          <a:schemeClr val="accent1"/>
-        </a:lnRef>
-        <a:fillRef idx="3">
-          <a:schemeClr val="accent1"/>
-        </a:fillRef>
-        <a:effectRef idx="2">
-          <a:schemeClr val="accent1"/>
-        </a:effectRef>
-        <a:fontRef idx="minor">
-          <a:schemeClr val="lt1"/>
-        </a:fontRef>
-      </a:style>
-    </a:spDef>
-    <a:lnDef>
-      <a:spPr/>
-      <a:bodyPr/>
-      <a:lstStyle/>
-      <a:style>
-        <a:lnRef idx="2">
-          <a:schemeClr val="accent1"/>
-        </a:lnRef>
-        <a:fillRef idx="0">
-          <a:schemeClr val="accent1"/>
-        </a:fillRef>
-        <a:effectRef idx="1">
-          <a:schemeClr val="accent1"/>
-        </a:effectRef>
-        <a:fontRef idx="minor">
-          <a:schemeClr val="tx1"/>
-        </a:fontRef>
-      </a:style>
-    </a:lnDef>
-  </a:objectDefaults>
+  <a:objectDefaults/>
   <a:extraClrSchemeLst/>
+  <a:extLst>
+    <a:ext uri="{05A4C25C-085E-4340-85A3-A5531E510DB2}">
+      <thm15:themeFamily xmlns:thm15="http://schemas.microsoft.com/office/thememl/2012/main" name="Office Theme" id="{62F939B6-93AF-4DB8-9C6B-D6C7DFDC589F}" vid="{4A3C46E8-61CC-4603-A589-7422A47A8E4A}"/>
+    </a:ext>
+  </a:extLst>
 </a:theme>
 </file>